--- a/ch06/Django4-ch06.pptx
+++ b/ch06/Django4-ch06.pptx
@@ -295,7 +295,7 @@
             <a:fld id="{FBFE2433-649F-42E5-AECB-94990831C40A}" type="datetimeFigureOut">
               <a:rPr lang="zh-TW" altLang="en-US" smtClean="0"/>
               <a:pPr/>
-              <a:t>2025/9/14</a:t>
+              <a:t>2026/5/21</a:t>
             </a:fld>
             <a:endParaRPr lang="zh-TW" altLang="en-US"/>
           </a:p>
@@ -10126,7 +10126,7 @@
             <a:fld id="{DF19C816-D38B-498E-804E-00D02760FC7A}" type="datetime1">
               <a:rPr lang="zh-TW" altLang="en-US" smtClean="0"/>
               <a:pPr/>
-              <a:t>2025/9/14</a:t>
+              <a:t>2026/5/21</a:t>
             </a:fld>
             <a:endParaRPr lang="zh-TW" altLang="en-US"/>
           </a:p>
@@ -10516,7 +10516,7 @@
             <a:fld id="{BFF116A9-7278-4674-BCA0-66C5F066EB15}" type="datetime1">
               <a:rPr lang="zh-TW" altLang="en-US" smtClean="0"/>
               <a:pPr/>
-              <a:t>2025/9/14</a:t>
+              <a:t>2026/5/21</a:t>
             </a:fld>
             <a:endParaRPr lang="zh-TW" altLang="en-US"/>
           </a:p>
@@ -11046,7 +11046,7 @@
             <a:fld id="{97D0AF00-ACBD-4185-8358-D82955DAF0D3}" type="datetime1">
               <a:rPr lang="zh-TW" altLang="en-US" smtClean="0"/>
               <a:pPr/>
-              <a:t>2025/9/14</a:t>
+              <a:t>2026/5/21</a:t>
             </a:fld>
             <a:endParaRPr lang="zh-TW" altLang="en-US"/>
           </a:p>
@@ -11383,7 +11383,7 @@
             <a:fld id="{DF19C816-D38B-498E-804E-00D02760FC7A}" type="datetime1">
               <a:rPr lang="zh-TW" altLang="en-US" smtClean="0"/>
               <a:pPr/>
-              <a:t>2025/9/14</a:t>
+              <a:t>2026/5/21</a:t>
             </a:fld>
             <a:endParaRPr lang="zh-TW" altLang="en-US"/>
           </a:p>
@@ -11736,7 +11736,7 @@
             <a:fld id="{E16BAABA-C288-41C0-9D8E-87773CE9488B}" type="datetime1">
               <a:rPr lang="zh-TW" altLang="en-US" smtClean="0"/>
               <a:pPr/>
-              <a:t>2025/9/14</a:t>
+              <a:t>2026/5/21</a:t>
             </a:fld>
             <a:endParaRPr lang="zh-TW" altLang="en-US"/>
           </a:p>
@@ -12281,7 +12281,7 @@
             <a:fld id="{E6F79EFE-5102-4BAD-A377-702F02C2814E}" type="datetime1">
               <a:rPr lang="zh-TW" altLang="en-US" smtClean="0"/>
               <a:pPr/>
-              <a:t>2025/9/14</a:t>
+              <a:t>2026/5/21</a:t>
             </a:fld>
             <a:endParaRPr lang="zh-TW" altLang="en-US"/>
           </a:p>
@@ -12578,7 +12578,7 @@
             <a:fld id="{240F5BD8-68CC-49A6-B769-229D3FACB86C}" type="datetime1">
               <a:rPr lang="zh-TW" altLang="en-US" smtClean="0"/>
               <a:pPr/>
-              <a:t>2025/9/14</a:t>
+              <a:t>2026/5/21</a:t>
             </a:fld>
             <a:endParaRPr lang="zh-TW" altLang="en-US"/>
           </a:p>
@@ -13239,7 +13239,7 @@
             <a:fld id="{C95C3C99-9A5D-4B12-8519-BF3493FEA3BD}" type="datetime1">
               <a:rPr lang="zh-TW" altLang="en-US" smtClean="0"/>
               <a:pPr/>
-              <a:t>2025/9/14</a:t>
+              <a:t>2026/5/21</a:t>
             </a:fld>
             <a:endParaRPr lang="zh-TW" altLang="en-US"/>
           </a:p>
@@ -13682,7 +13682,7 @@
             <a:fld id="{C0C1B973-9C4C-43B9-BBC9-7D038B5E66BB}" type="datetime1">
               <a:rPr lang="zh-TW" altLang="en-US" smtClean="0"/>
               <a:pPr/>
-              <a:t>2025/9/14</a:t>
+              <a:t>2026/5/21</a:t>
             </a:fld>
             <a:endParaRPr lang="zh-TW" altLang="en-US"/>
           </a:p>
@@ -14002,7 +14002,7 @@
             <a:fld id="{E3A2E384-56FB-46D9-B267-C20E836A8212}" type="datetime1">
               <a:rPr lang="zh-TW" altLang="en-US" smtClean="0"/>
               <a:pPr/>
-              <a:t>2025/9/14</a:t>
+              <a:t>2026/5/21</a:t>
             </a:fld>
             <a:endParaRPr lang="zh-TW" altLang="en-US"/>
           </a:p>
@@ -14737,7 +14737,7 @@
             <a:fld id="{33A25C06-3635-48B4-9326-561BB1229EEB}" type="datetime1">
               <a:rPr lang="zh-TW" altLang="en-US" smtClean="0"/>
               <a:pPr/>
-              <a:t>2025/9/14</a:t>
+              <a:t>2026/5/21</a:t>
             </a:fld>
             <a:endParaRPr lang="zh-TW" altLang="en-US"/>
           </a:p>
@@ -14848,7 +14848,7 @@
             <a:fld id="{E16BAABA-C288-41C0-9D8E-87773CE9488B}" type="datetime1">
               <a:rPr lang="zh-TW" altLang="en-US" smtClean="0"/>
               <a:pPr/>
-              <a:t>2025/9/14</a:t>
+              <a:t>2026/5/21</a:t>
             </a:fld>
             <a:endParaRPr lang="zh-TW" altLang="en-US"/>
           </a:p>
@@ -15595,7 +15595,7 @@
             <a:fld id="{BA9F43BE-0941-4E88-B57D-D38DECBCB997}" type="datetime1">
               <a:rPr lang="zh-TW" altLang="en-US" smtClean="0"/>
               <a:pPr/>
-              <a:t>2025/9/14</a:t>
+              <a:t>2026/5/21</a:t>
             </a:fld>
             <a:endParaRPr lang="zh-TW" altLang="en-US"/>
           </a:p>
@@ -15748,7 +15748,7 @@
             <a:fld id="{BFF116A9-7278-4674-BCA0-66C5F066EB15}" type="datetime1">
               <a:rPr lang="zh-TW" altLang="en-US" smtClean="0"/>
               <a:pPr/>
-              <a:t>2025/9/14</a:t>
+              <a:t>2026/5/21</a:t>
             </a:fld>
             <a:endParaRPr lang="zh-TW" altLang="en-US"/>
           </a:p>
@@ -16283,7 +16283,7 @@
             <a:fld id="{97D0AF00-ACBD-4185-8358-D82955DAF0D3}" type="datetime1">
               <a:rPr lang="zh-TW" altLang="en-US" smtClean="0"/>
               <a:pPr/>
-              <a:t>2025/9/14</a:t>
+              <a:t>2026/5/21</a:t>
             </a:fld>
             <a:endParaRPr lang="zh-TW" altLang="en-US"/>
           </a:p>
@@ -16770,7 +16770,7 @@
             <a:fld id="{E6F79EFE-5102-4BAD-A377-702F02C2814E}" type="datetime1">
               <a:rPr lang="zh-TW" altLang="en-US" smtClean="0"/>
               <a:pPr/>
-              <a:t>2025/9/14</a:t>
+              <a:t>2026/5/21</a:t>
             </a:fld>
             <a:endParaRPr lang="zh-TW" altLang="en-US"/>
           </a:p>
@@ -17062,7 +17062,7 @@
             <a:fld id="{240F5BD8-68CC-49A6-B769-229D3FACB86C}" type="datetime1">
               <a:rPr lang="zh-TW" altLang="en-US" smtClean="0"/>
               <a:pPr/>
-              <a:t>2025/9/14</a:t>
+              <a:t>2026/5/21</a:t>
             </a:fld>
             <a:endParaRPr lang="zh-TW" altLang="en-US"/>
           </a:p>
@@ -17718,7 +17718,7 @@
             <a:fld id="{C95C3C99-9A5D-4B12-8519-BF3493FEA3BD}" type="datetime1">
               <a:rPr lang="zh-TW" altLang="en-US" smtClean="0"/>
               <a:pPr/>
-              <a:t>2025/9/14</a:t>
+              <a:t>2026/5/21</a:t>
             </a:fld>
             <a:endParaRPr lang="zh-TW" altLang="en-US"/>
           </a:p>
@@ -18156,7 +18156,7 @@
             <a:fld id="{C0C1B973-9C4C-43B9-BBC9-7D038B5E66BB}" type="datetime1">
               <a:rPr lang="zh-TW" altLang="en-US" smtClean="0"/>
               <a:pPr/>
-              <a:t>2025/9/14</a:t>
+              <a:t>2026/5/21</a:t>
             </a:fld>
             <a:endParaRPr lang="zh-TW" altLang="en-US"/>
           </a:p>
@@ -18471,7 +18471,7 @@
             <a:fld id="{E3A2E384-56FB-46D9-B267-C20E836A8212}" type="datetime1">
               <a:rPr lang="zh-TW" altLang="en-US" smtClean="0"/>
               <a:pPr/>
-              <a:t>2025/9/14</a:t>
+              <a:t>2026/5/21</a:t>
             </a:fld>
             <a:endParaRPr lang="zh-TW" altLang="en-US"/>
           </a:p>
@@ -19201,7 +19201,7 @@
             <a:fld id="{33A25C06-3635-48B4-9326-561BB1229EEB}" type="datetime1">
               <a:rPr lang="zh-TW" altLang="en-US" smtClean="0"/>
               <a:pPr/>
-              <a:t>2025/9/14</a:t>
+              <a:t>2026/5/21</a:t>
             </a:fld>
             <a:endParaRPr lang="zh-TW" altLang="en-US"/>
           </a:p>
@@ -19867,7 +19867,7 @@
             <a:fld id="{BA9F43BE-0941-4E88-B57D-D38DECBCB997}" type="datetime1">
               <a:rPr lang="zh-TW" altLang="en-US" smtClean="0"/>
               <a:pPr/>
-              <a:t>2025/9/14</a:t>
+              <a:t>2026/5/21</a:t>
             </a:fld>
             <a:endParaRPr lang="zh-TW" altLang="en-US"/>
           </a:p>
@@ -20141,7 +20141,7 @@
             <a:fld id="{73E7C058-3467-44CD-AC53-31F205DF3CA0}" type="datetime1">
               <a:rPr lang="zh-TW" altLang="en-US" smtClean="0"/>
               <a:pPr/>
-              <a:t>2025/9/14</a:t>
+              <a:t>2026/5/21</a:t>
             </a:fld>
             <a:endParaRPr lang="zh-TW" altLang="en-US"/>
           </a:p>
@@ -21038,7 +21038,7 @@
             <a:fld id="{73E7C058-3467-44CD-AC53-31F205DF3CA0}" type="datetime1">
               <a:rPr lang="zh-TW" altLang="en-US" smtClean="0"/>
               <a:pPr/>
-              <a:t>2025/9/14</a:t>
+              <a:t>2026/5/21</a:t>
             </a:fld>
             <a:endParaRPr lang="zh-TW" altLang="en-US"/>
           </a:p>
@@ -23982,12 +23982,56 @@
         </p:nvSpPr>
         <p:spPr/>
         <p:txBody>
-          <a:bodyPr/>
+          <a:bodyPr>
+            <a:normAutofit fontScale="90000"/>
+          </a:bodyPr>
           <a:lstStyle/>
           <a:p>
             <a:r>
               <a:rPr lang="zh-TW" altLang="zh-TW" dirty="0"/>
               <a:t>共用模版的使用</a:t>
+            </a:r>
+            <a:br>
+              <a:rPr lang="en-US" altLang="zh-TW" dirty="0"/>
+            </a:br>
+            <a:r>
+              <a:rPr lang="en-US" altLang="zh-TW" dirty="0"/>
+              <a:t>file:02mblog\</a:t>
+            </a:r>
+            <a:r>
+              <a:rPr lang="en-US" altLang="zh-TW" dirty="0" err="1"/>
+              <a:t>mblog</a:t>
+            </a:r>
+            <a:r>
+              <a:rPr lang="en-US" altLang="zh-TW" dirty="0"/>
+              <a:t>\</a:t>
+            </a:r>
+            <a:r>
+              <a:rPr lang="en-US" altLang="zh-TW" dirty="0" err="1"/>
+              <a:t>mysite</a:t>
+            </a:r>
+            <a:r>
+              <a:rPr lang="en-US" altLang="zh-TW" dirty="0"/>
+              <a:t>\templates</a:t>
+            </a:r>
+            <a:br>
+              <a:rPr lang="en-US" altLang="zh-TW" dirty="0"/>
+            </a:br>
+            <a:r>
+              <a:rPr lang="en-US" altLang="zh-TW" dirty="0"/>
+              <a:t>ch02\</a:t>
+            </a:r>
+            <a:r>
+              <a:rPr lang="en-US" altLang="zh-TW" dirty="0" err="1"/>
+              <a:t>mblog</a:t>
+            </a:r>
+            <a:r>
+              <a:rPr lang="en-US" altLang="zh-TW" dirty="0"/>
+              <a:t>\templates</a:t>
+            </a:r>
+            <a:r>
+              <a:rPr lang="zh-TW" altLang="en-US"/>
+              <a:t>也有</a:t>
             </a:r>
             <a:endParaRPr lang="zh-TW" altLang="en-US" dirty="0"/>
           </a:p>
@@ -49402,28 +49446,59 @@
             <p:ph type="title"/>
           </p:nvPr>
         </p:nvSpPr>
-        <p:spPr/>
-        <p:txBody>
-          <a:bodyPr/>
-          <a:lstStyle/>
-          <a:p>
-            <a:r>
-              <a:rPr lang="zh-TW" altLang="en-US" dirty="0"/>
+        <p:spPr>
+          <a:xfrm>
+            <a:off x="0" y="44624"/>
+            <a:ext cx="9144000" cy="758952"/>
+          </a:xfrm>
+        </p:spPr>
+        <p:txBody>
+          <a:bodyPr>
+            <a:noAutofit/>
+          </a:bodyPr>
+          <a:lstStyle/>
+          <a:p>
+            <a:r>
+              <a:rPr lang="zh-TW" altLang="en-US" sz="2400" dirty="0"/>
               <a:t>習題</a:t>
             </a:r>
             <a:r>
-              <a:rPr lang="en-US" altLang="zh-TW" dirty="0"/>
+              <a:rPr lang="en-US" altLang="zh-TW" sz="2400" dirty="0"/>
               <a:t>-</a:t>
             </a:r>
             <a:r>
-              <a:rPr lang="zh-TW" altLang="en-US" dirty="0"/>
+              <a:rPr lang="zh-TW" altLang="en-US" sz="2400" dirty="0"/>
               <a:t>拆解</a:t>
             </a:r>
             <a:r>
-              <a:rPr lang="en-US" altLang="zh-TW" dirty="0"/>
-              <a:t>html</a:t>
-            </a:r>
-            <a:endParaRPr lang="zh-TW" altLang="en-US" dirty="0"/>
+              <a:rPr lang="en-US" altLang="zh-TW" sz="2400" dirty="0"/>
+              <a:t>-</a:t>
+            </a:r>
+            <a:r>
+              <a:rPr lang="zh-TW" altLang="en-US" sz="2400" dirty="0"/>
+              <a:t>檔案在</a:t>
+            </a:r>
+            <a:r>
+              <a:rPr lang="en-US" altLang="zh-TW" sz="2400" dirty="0"/>
+              <a:t>06template\</a:t>
+            </a:r>
+            <a:r>
+              <a:rPr lang="en-US" altLang="zh-TW" sz="2400" dirty="0" err="1"/>
+              <a:t>livetv</a:t>
+            </a:r>
+            <a:r>
+              <a:rPr lang="en-US" altLang="zh-TW" sz="2400" dirty="0"/>
+              <a:t>\</a:t>
+            </a:r>
+            <a:r>
+              <a:rPr lang="en-US" altLang="zh-TW" sz="2400" dirty="0" err="1"/>
+              <a:t>mysite</a:t>
+            </a:r>
+            <a:r>
+              <a:rPr lang="en-US" altLang="zh-TW" sz="2400" dirty="0"/>
+              <a:t>\templates</a:t>
+            </a:r>
+            <a:endParaRPr lang="zh-TW" altLang="en-US" sz="2400" dirty="0"/>
           </a:p>
         </p:txBody>
       </p:sp>
@@ -49471,7 +49546,7 @@
         </p:nvSpPr>
         <p:spPr>
           <a:xfrm>
-            <a:off x="0" y="1263526"/>
+            <a:off x="0" y="764704"/>
             <a:ext cx="9144000" cy="6124754"/>
           </a:xfrm>
           <a:prstGeom prst="rect">

--- a/ch06/Django4-ch06.pptx
+++ b/ch06/Django4-ch06.pptx
@@ -295,7 +295,7 @@
             <a:fld id="{FBFE2433-649F-42E5-AECB-94990831C40A}" type="datetimeFigureOut">
               <a:rPr lang="zh-TW" altLang="en-US" smtClean="0"/>
               <a:pPr/>
-              <a:t>2026/5/21</a:t>
+              <a:t>2026/5/27</a:t>
             </a:fld>
             <a:endParaRPr lang="zh-TW" altLang="en-US"/>
           </a:p>
@@ -929,6 +929,191 @@
           <a:lstStyle/>
           <a:p>
             <a:r>
+              <a:rPr lang="en-US" altLang="zh-TW" dirty="0" err="1"/>
+              <a:t>BootS</a:t>
+            </a:r>
+            <a:r>
+              <a:rPr lang="zh-TW" altLang="en-US" dirty="0"/>
+              <a:t>把這一段程式碼放在</a:t>
+            </a:r>
+            <a:r>
+              <a:rPr lang="en-US" altLang="zh-TW" dirty="0"/>
+              <a:t>index.html </a:t>
+            </a:r>
+            <a:r>
+              <a:rPr lang="zh-TW" altLang="en-US" dirty="0"/>
+              <a:t>的 </a:t>
+            </a:r>
+            <a:r>
+              <a:rPr lang="en-US" altLang="zh-TW" dirty="0"/>
+              <a:t>&lt;head&gt;&lt;/head&gt;</a:t>
+            </a:r>
+            <a:r>
+              <a:rPr lang="zh-TW" altLang="en-US" dirty="0"/>
+              <a:t>之間</a:t>
+            </a:r>
+            <a:r>
+              <a:rPr lang="en-US" altLang="zh-TW" dirty="0"/>
+              <a:t>,</a:t>
+            </a:r>
+            <a:r>
+              <a:rPr lang="zh-TW" altLang="en-US" dirty="0"/>
+              <a:t>一般是放在</a:t>
+            </a:r>
+            <a:r>
+              <a:rPr lang="en-US" altLang="zh-TW" dirty="0"/>
+              <a:t>&lt;/head&gt;</a:t>
+            </a:r>
+            <a:r>
+              <a:rPr lang="zh-TW" altLang="en-US" dirty="0"/>
+              <a:t>這一行的前面。</a:t>
+            </a:r>
+            <a:endParaRPr lang="en-US" altLang="zh-TW" dirty="0"/>
+          </a:p>
+          <a:p>
+            <a:r>
+              <a:rPr lang="en-US" altLang="zh-TW" dirty="0"/>
+              <a:t>JavaScript</a:t>
+            </a:r>
+            <a:r>
+              <a:rPr lang="zh-TW" altLang="en-US" dirty="0"/>
+              <a:t>的連結則是放在</a:t>
+            </a:r>
+            <a:r>
+              <a:rPr lang="en-US" altLang="zh-TW" dirty="0"/>
+              <a:t>&lt;/body&gt;</a:t>
+            </a:r>
+            <a:r>
+              <a:rPr lang="zh-TW" altLang="en-US" dirty="0"/>
+              <a:t>的前面</a:t>
+            </a:r>
+            <a:r>
+              <a:rPr lang="en-US" altLang="zh-TW" dirty="0"/>
+              <a:t>:</a:t>
+            </a:r>
+          </a:p>
+          <a:p>
+            <a:r>
+              <a:rPr lang="en-US" altLang="zh-TW" dirty="0"/>
+              <a:t>Bundle = min + Popper</a:t>
+            </a:r>
+            <a:r>
+              <a:rPr lang="zh-TW" altLang="en-US" dirty="0"/>
+              <a:t>，所以上面</a:t>
+            </a:r>
+            <a:r>
+              <a:rPr lang="en-US" altLang="zh-TW" dirty="0"/>
+              <a:t>script</a:t>
+            </a:r>
+            <a:r>
+              <a:rPr lang="zh-TW" altLang="en-US" dirty="0"/>
+              <a:t>選一個即可</a:t>
+            </a:r>
+            <a:endParaRPr lang="en-US" altLang="zh-TW" dirty="0"/>
+          </a:p>
+          <a:p>
+            <a:r>
+              <a:rPr lang="zh-TW" altLang="en-US" dirty="0"/>
+              <a:t>說明</a:t>
+            </a:r>
+            <a:r>
+              <a:rPr lang="en-US" altLang="zh-TW" dirty="0"/>
+              <a:t>From</a:t>
+            </a:r>
+            <a:r>
+              <a:rPr lang="zh-TW" altLang="en-US" dirty="0"/>
+              <a:t>六角：</a:t>
+            </a:r>
+            <a:r>
+              <a:rPr lang="en-US" altLang="zh-TW" dirty="0"/>
+              <a:t>https://bootstrap5.hexschool.com/docs/5.0/getting-started/introduction/</a:t>
+            </a:r>
+            <a:endParaRPr lang="zh-TW" altLang="en-US" dirty="0"/>
+          </a:p>
+        </p:txBody>
+      </p:sp>
+      <p:sp>
+        <p:nvSpPr>
+          <p:cNvPr id="4" name="投影片編號版面配置區 3"/>
+          <p:cNvSpPr>
+            <a:spLocks noGrp="1"/>
+          </p:cNvSpPr>
+          <p:nvPr>
+            <p:ph type="sldNum" sz="quarter" idx="5"/>
+          </p:nvPr>
+        </p:nvSpPr>
+        <p:spPr/>
+        <p:txBody>
+          <a:bodyPr/>
+          <a:lstStyle/>
+          <a:p>
+            <a:fld id="{027FE99C-3BAC-4305-ABBB-3890AB1B4510}" type="slidenum">
+              <a:rPr lang="zh-TW" altLang="en-US" smtClean="0"/>
+              <a:pPr/>
+              <a:t>22</a:t>
+            </a:fld>
+            <a:endParaRPr lang="zh-TW" altLang="en-US"/>
+          </a:p>
+        </p:txBody>
+      </p:sp>
+    </p:spTree>
+    <p:extLst>
+      <p:ext uri="{BB962C8B-B14F-4D97-AF65-F5344CB8AC3E}">
+        <p14:creationId xmlns:p14="http://schemas.microsoft.com/office/powerpoint/2010/main" val="1807161063"/>
+      </p:ext>
+    </p:extLst>
+  </p:cSld>
+  <p:clrMapOvr>
+    <a:masterClrMapping/>
+  </p:clrMapOvr>
+</p:notes>
+</file>
+
+<file path=ppt/notesSlides/notesSlide11.xml><?xml version="1.0" encoding="utf-8"?>
+<p:notes xmlns:a="http://schemas.openxmlformats.org/drawingml/2006/main" xmlns:r="http://schemas.openxmlformats.org/officeDocument/2006/relationships" xmlns:p="http://schemas.openxmlformats.org/presentationml/2006/main">
+  <p:cSld>
+    <p:spTree>
+      <p:nvGrpSpPr>
+        <p:cNvPr id="1" name=""/>
+        <p:cNvGrpSpPr/>
+        <p:nvPr/>
+      </p:nvGrpSpPr>
+      <p:grpSpPr>
+        <a:xfrm>
+          <a:off x="0" y="0"/>
+          <a:ext cx="0" cy="0"/>
+          <a:chOff x="0" y="0"/>
+          <a:chExt cx="0" cy="0"/>
+        </a:xfrm>
+      </p:grpSpPr>
+      <p:sp>
+        <p:nvSpPr>
+          <p:cNvPr id="2" name="投影片影像版面配置區 1"/>
+          <p:cNvSpPr>
+            <a:spLocks noGrp="1" noRot="1" noChangeAspect="1"/>
+          </p:cNvSpPr>
+          <p:nvPr>
+            <p:ph type="sldImg"/>
+          </p:nvPr>
+        </p:nvSpPr>
+        <p:spPr/>
+      </p:sp>
+      <p:sp>
+        <p:nvSpPr>
+          <p:cNvPr id="3" name="備忘稿版面配置區 2"/>
+          <p:cNvSpPr>
+            <a:spLocks noGrp="1"/>
+          </p:cNvSpPr>
+          <p:nvPr>
+            <p:ph type="body" idx="1"/>
+          </p:nvPr>
+        </p:nvSpPr>
+        <p:spPr/>
+        <p:txBody>
+          <a:bodyPr/>
+          <a:lstStyle/>
+          <a:p>
+            <a:r>
               <a:rPr lang="en-US" altLang="zh-TW" dirty="0"/>
               <a:t>Create env</a:t>
             </a:r>
@@ -1185,7 +1370,7 @@
 </p:notes>
 </file>
 
-<file path=ppt/notesSlides/notesSlide11.xml><?xml version="1.0" encoding="utf-8"?>
+<file path=ppt/notesSlides/notesSlide12.xml><?xml version="1.0" encoding="utf-8"?>
 <p:notes xmlns:a="http://schemas.openxmlformats.org/drawingml/2006/main" xmlns:r="http://schemas.openxmlformats.org/officeDocument/2006/relationships" xmlns:p="http://schemas.openxmlformats.org/presentationml/2006/main">
   <p:cSld>
     <p:spTree>
@@ -1356,103 +1541,6 @@
 </p:notes>
 </file>
 
-<file path=ppt/notesSlides/notesSlide12.xml><?xml version="1.0" encoding="utf-8"?>
-<p:notes xmlns:a="http://schemas.openxmlformats.org/drawingml/2006/main" xmlns:r="http://schemas.openxmlformats.org/officeDocument/2006/relationships" xmlns:p="http://schemas.openxmlformats.org/presentationml/2006/main">
-  <p:cSld>
-    <p:spTree>
-      <p:nvGrpSpPr>
-        <p:cNvPr id="1" name=""/>
-        <p:cNvGrpSpPr/>
-        <p:nvPr/>
-      </p:nvGrpSpPr>
-      <p:grpSpPr>
-        <a:xfrm>
-          <a:off x="0" y="0"/>
-          <a:ext cx="0" cy="0"/>
-          <a:chOff x="0" y="0"/>
-          <a:chExt cx="0" cy="0"/>
-        </a:xfrm>
-      </p:grpSpPr>
-      <p:sp>
-        <p:nvSpPr>
-          <p:cNvPr id="2" name="投影片影像版面配置區 1"/>
-          <p:cNvSpPr>
-            <a:spLocks noGrp="1" noRot="1" noChangeAspect="1"/>
-          </p:cNvSpPr>
-          <p:nvPr>
-            <p:ph type="sldImg"/>
-          </p:nvPr>
-        </p:nvSpPr>
-        <p:spPr/>
-      </p:sp>
-      <p:sp>
-        <p:nvSpPr>
-          <p:cNvPr id="3" name="備忘稿版面配置區 2"/>
-          <p:cNvSpPr>
-            <a:spLocks noGrp="1"/>
-          </p:cNvSpPr>
-          <p:nvPr>
-            <p:ph type="body" idx="1"/>
-          </p:nvPr>
-        </p:nvSpPr>
-        <p:spPr/>
-        <p:txBody>
-          <a:bodyPr/>
-          <a:lstStyle/>
-          <a:p>
-            <a:r>
-              <a:rPr lang="en-US" altLang="zh-TW" dirty="0"/>
-              <a:t>/embed/</a:t>
-            </a:r>
-            <a:r>
-              <a:rPr lang="zh-TW" altLang="en-US" dirty="0"/>
-              <a:t>之後的字元就是影片的</a:t>
-            </a:r>
-            <a:r>
-              <a:rPr lang="en-US" altLang="zh-TW" dirty="0"/>
-              <a:t>id</a:t>
-            </a:r>
-            <a:endParaRPr lang="zh-TW" altLang="en-US" dirty="0"/>
-          </a:p>
-        </p:txBody>
-      </p:sp>
-      <p:sp>
-        <p:nvSpPr>
-          <p:cNvPr id="4" name="投影片編號版面配置區 3"/>
-          <p:cNvSpPr>
-            <a:spLocks noGrp="1"/>
-          </p:cNvSpPr>
-          <p:nvPr>
-            <p:ph type="sldNum" sz="quarter" idx="5"/>
-          </p:nvPr>
-        </p:nvSpPr>
-        <p:spPr/>
-        <p:txBody>
-          <a:bodyPr/>
-          <a:lstStyle/>
-          <a:p>
-            <a:fld id="{027FE99C-3BAC-4305-ABBB-3890AB1B4510}" type="slidenum">
-              <a:rPr lang="zh-TW" altLang="en-US" smtClean="0"/>
-              <a:pPr/>
-              <a:t>30</a:t>
-            </a:fld>
-            <a:endParaRPr lang="zh-TW" altLang="en-US"/>
-          </a:p>
-        </p:txBody>
-      </p:sp>
-    </p:spTree>
-    <p:extLst>
-      <p:ext uri="{BB962C8B-B14F-4D97-AF65-F5344CB8AC3E}">
-        <p14:creationId xmlns:p14="http://schemas.microsoft.com/office/powerpoint/2010/main" val="1486772739"/>
-      </p:ext>
-    </p:extLst>
-  </p:cSld>
-  <p:clrMapOvr>
-    <a:masterClrMapping/>
-  </p:clrMapOvr>
-</p:notes>
-</file>
-
 <file path=ppt/notesSlides/notesSlide13.xml><?xml version="1.0" encoding="utf-8"?>
 <p:notes xmlns:a="http://schemas.openxmlformats.org/drawingml/2006/main" xmlns:r="http://schemas.openxmlformats.org/officeDocument/2006/relationships" xmlns:p="http://schemas.openxmlformats.org/presentationml/2006/main">
   <p:cSld>
@@ -1498,89 +1586,18 @@
           <a:lstStyle/>
           <a:p>
             <a:r>
+              <a:rPr lang="en-US" altLang="zh-TW" dirty="0"/>
+              <a:t>/embed/</a:t>
+            </a:r>
+            <a:r>
               <a:rPr lang="zh-TW" altLang="en-US" dirty="0"/>
-              <a:t>第</a:t>
-            </a:r>
-            <a:r>
-              <a:rPr lang="en-US" altLang="zh-TW" dirty="0"/>
-              <a:t>3</a:t>
-            </a:r>
-            <a:r>
-              <a:rPr lang="zh-TW" altLang="en-US" dirty="0"/>
-              <a:t>行就是增加讓網址可以識別出</a:t>
-            </a:r>
-            <a:r>
-              <a:rPr lang="en-US" altLang="zh-TW" dirty="0"/>
-              <a:t>1</a:t>
-            </a:r>
-            <a:r>
-              <a:rPr lang="zh-TW" altLang="en-US" dirty="0"/>
-              <a:t>個數字「</a:t>
-            </a:r>
-            <a:r>
-              <a:rPr lang="en-US" altLang="zh-TW" dirty="0"/>
-              <a:t>&lt;</a:t>
-            </a:r>
-            <a:r>
-              <a:rPr lang="en-US" altLang="zh-TW" dirty="0" err="1"/>
-              <a:t>int:tvno</a:t>
-            </a:r>
-            <a:r>
-              <a:rPr lang="en-US" altLang="zh-TW" dirty="0"/>
-              <a:t>&gt;</a:t>
-            </a:r>
-            <a:r>
-              <a:rPr lang="zh-TW" altLang="en-US" dirty="0"/>
-              <a:t>」的設定</a:t>
-            </a:r>
-            <a:r>
-              <a:rPr lang="en-US" altLang="zh-TW" dirty="0"/>
-              <a:t>,</a:t>
-            </a:r>
-          </a:p>
-          <a:p>
-            <a:r>
-              <a:rPr lang="zh-TW" altLang="en-US" dirty="0"/>
-              <a:t>因為我們在</a:t>
-            </a:r>
-            <a:r>
-              <a:rPr lang="en-US" altLang="zh-TW" dirty="0"/>
-              <a:t>index.html</a:t>
-            </a:r>
-            <a:r>
-              <a:rPr lang="zh-TW" altLang="en-US" dirty="0"/>
-              <a:t>會使用這行設定來對網址進</a:t>
-            </a:r>
-          </a:p>
-          <a:p>
-            <a:r>
-              <a:rPr lang="zh-TW" altLang="en-US" dirty="0"/>
-              <a:t>行編碼</a:t>
-            </a:r>
-            <a:r>
-              <a:rPr lang="en-US" altLang="zh-TW" dirty="0"/>
-              <a:t>,</a:t>
-            </a:r>
-            <a:r>
-              <a:rPr lang="zh-TW" altLang="en-US" dirty="0"/>
-              <a:t>因此也把這個設定給一個名字叫做「</a:t>
-            </a:r>
-            <a:r>
-              <a:rPr lang="en-US" altLang="zh-TW" dirty="0"/>
-              <a:t>tv-</a:t>
-            </a:r>
-            <a:r>
-              <a:rPr lang="en-US" altLang="zh-TW" dirty="0" err="1"/>
-              <a:t>url</a:t>
-            </a:r>
-            <a:r>
-              <a:rPr lang="en-US" altLang="zh-TW" dirty="0"/>
-              <a:t>,</a:t>
-            </a:r>
-            <a:r>
-              <a:rPr lang="zh-TW" altLang="en-US" dirty="0"/>
-              <a:t>便於後續續網址的產生。</a:t>
-            </a:r>
+              <a:t>之後的字元就是影片的</a:t>
+            </a:r>
+            <a:r>
+              <a:rPr lang="en-US" altLang="zh-TW" dirty="0"/>
+              <a:t>id</a:t>
+            </a:r>
+            <a:endParaRPr lang="zh-TW" altLang="en-US" dirty="0"/>
           </a:p>
         </p:txBody>
       </p:sp>
@@ -1602,7 +1619,7 @@
             <a:fld id="{027FE99C-3BAC-4305-ABBB-3890AB1B4510}" type="slidenum">
               <a:rPr lang="zh-TW" altLang="en-US" smtClean="0"/>
               <a:pPr/>
-              <a:t>32</a:t>
+              <a:t>30</a:t>
             </a:fld>
             <a:endParaRPr lang="zh-TW" altLang="en-US"/>
           </a:p>
@@ -1611,7 +1628,7 @@
     </p:spTree>
     <p:extLst>
       <p:ext uri="{BB962C8B-B14F-4D97-AF65-F5344CB8AC3E}">
-        <p14:creationId xmlns:p14="http://schemas.microsoft.com/office/powerpoint/2010/main" val="3743146158"/>
+        <p14:creationId xmlns:p14="http://schemas.microsoft.com/office/powerpoint/2010/main" val="1486772739"/>
       </p:ext>
     </p:extLst>
   </p:cSld>
@@ -1666,108 +1683,88 @@
           <a:lstStyle/>
           <a:p>
             <a:r>
-              <a:rPr lang="en-US" altLang="zh-TW" dirty="0"/>
-              <a:t>(</a:t>
-            </a:r>
-            <a:r>
               <a:rPr lang="zh-TW" altLang="en-US" dirty="0"/>
-              <a:t>從網址列中選取</a:t>
+              <a:t>第</a:t>
+            </a:r>
+            <a:r>
+              <a:rPr lang="en-US" altLang="zh-TW" dirty="0"/>
+              <a:t>3</a:t>
+            </a:r>
+            <a:r>
+              <a:rPr lang="zh-TW" altLang="en-US" dirty="0"/>
+              <a:t>行就是增加讓網址可以識別出</a:t>
+            </a:r>
+            <a:r>
+              <a:rPr lang="en-US" altLang="zh-TW" dirty="0"/>
+              <a:t>1</a:t>
+            </a:r>
+            <a:r>
+              <a:rPr lang="zh-TW" altLang="en-US" dirty="0"/>
+              <a:t>個數字「</a:t>
+            </a:r>
+            <a:r>
+              <a:rPr lang="en-US" altLang="zh-TW" dirty="0"/>
+              <a:t>&lt;</a:t>
+            </a:r>
+            <a:r>
+              <a:rPr lang="en-US" altLang="zh-TW" dirty="0" err="1"/>
+              <a:t>int:tvno</a:t>
+            </a:r>
+            <a:r>
+              <a:rPr lang="en-US" altLang="zh-TW" dirty="0"/>
+              <a:t>&gt;</a:t>
+            </a:r>
+            <a:r>
+              <a:rPr lang="zh-TW" altLang="en-US" dirty="0"/>
+              <a:t>」的設定</a:t>
             </a:r>
             <a:r>
               <a:rPr lang="en-US" altLang="zh-TW" dirty="0"/>
               <a:t>,</a:t>
             </a:r>
+          </a:p>
+          <a:p>
             <a:r>
               <a:rPr lang="zh-TW" altLang="en-US" dirty="0"/>
-              <a:t>例如</a:t>
-            </a:r>
-            <a:r>
-              <a:rPr lang="en-US" altLang="zh-TW" dirty="0"/>
-              <a:t>localhost:8000/1/</a:t>
+              <a:t>因為我們在</a:t>
+            </a:r>
+            <a:r>
+              <a:rPr lang="en-US" altLang="zh-TW" dirty="0"/>
+              <a:t>index.html</a:t>
             </a:r>
             <a:r>
               <a:rPr lang="zh-TW" altLang="en-US" dirty="0"/>
-              <a:t>會選用</a:t>
-            </a:r>
-            <a:r>
-              <a:rPr lang="en-US" altLang="zh-TW" dirty="0"/>
-              <a:t>1,</a:t>
-            </a:r>
+              <a:t>會使用這行設定來對網址進</a:t>
+            </a:r>
+          </a:p>
+          <a:p>
             <a:r>
               <a:rPr lang="zh-TW" altLang="en-US" dirty="0"/>
-              <a:t>而</a:t>
-            </a:r>
-            <a:r>
-              <a:rPr lang="en-US" altLang="zh-TW" dirty="0"/>
-              <a:t>localhost:800/2/</a:t>
+              <a:t>行編碼</a:t>
+            </a:r>
+            <a:r>
+              <a:rPr lang="en-US" altLang="zh-TW" dirty="0"/>
+              <a:t>,</a:t>
             </a:r>
             <a:r>
               <a:rPr lang="zh-TW" altLang="en-US" dirty="0"/>
-              <a:t>會選用</a:t>
-            </a:r>
-            <a:r>
-              <a:rPr lang="en-US" altLang="zh-TW" dirty="0"/>
-              <a:t>2,</a:t>
-            </a:r>
-          </a:p>
-          <a:p>
+              <a:t>因此也把這個設定給一個名字叫做「</a:t>
+            </a:r>
+            <a:r>
+              <a:rPr lang="en-US" altLang="zh-TW" dirty="0"/>
+              <a:t>tv-</a:t>
+            </a:r>
+            <a:r>
+              <a:rPr lang="en-US" altLang="zh-TW" dirty="0" err="1"/>
+              <a:t>url</a:t>
+            </a:r>
+            <a:r>
+              <a:rPr lang="en-US" altLang="zh-TW" dirty="0"/>
+              <a:t>,</a:t>
+            </a:r>
             <a:r>
               <a:rPr lang="zh-TW" altLang="en-US" dirty="0"/>
-              <a:t>由於</a:t>
-            </a:r>
-            <a:r>
-              <a:rPr lang="en-US" altLang="zh-TW" dirty="0"/>
-              <a:t>tv</a:t>
-            </a:r>
-            <a:r>
-              <a:rPr lang="zh-TW" altLang="en-US" dirty="0"/>
-              <a:t>變數是一個字典型態的變數</a:t>
-            </a:r>
-            <a:r>
-              <a:rPr lang="en-US" altLang="zh-TW" dirty="0"/>
-              <a:t>,</a:t>
-            </a:r>
-            <a:r>
-              <a:rPr lang="zh-TW" altLang="en-US" dirty="0"/>
-              <a:t>因此可以使用</a:t>
-            </a:r>
-            <a:r>
-              <a:rPr lang="en-US" altLang="zh-TW" dirty="0"/>
-              <a:t>tv.name </a:t>
-            </a:r>
-            <a:r>
-              <a:rPr lang="zh-TW" altLang="en-US" dirty="0"/>
-              <a:t>取出頻道的名</a:t>
-            </a:r>
-          </a:p>
-          <a:p>
-            <a:r>
-              <a:rPr lang="zh-TW" altLang="en-US" dirty="0"/>
-              <a:t>稱</a:t>
-            </a:r>
-            <a:r>
-              <a:rPr lang="en-US" altLang="zh-TW" dirty="0"/>
-              <a:t>,</a:t>
-            </a:r>
-            <a:r>
-              <a:rPr lang="en-US" altLang="zh-TW" dirty="0" err="1"/>
-              <a:t>tv.tvcode</a:t>
-            </a:r>
-            <a:r>
-              <a:rPr lang="en-US" altLang="zh-TW" dirty="0"/>
-              <a:t> </a:t>
-            </a:r>
-            <a:r>
-              <a:rPr lang="zh-TW" altLang="en-US" dirty="0"/>
-              <a:t>取出影片的</a:t>
-            </a:r>
-            <a:r>
-              <a:rPr lang="en-US" altLang="zh-TW" dirty="0"/>
-              <a:t>ID</a:t>
-            </a:r>
-            <a:r>
-              <a:rPr lang="zh-TW" altLang="en-US" dirty="0"/>
-              <a:t>。</a:t>
+              <a:t>便於後續續網址的產生。</a:t>
             </a:r>
           </a:p>
         </p:txBody>
@@ -1790,7 +1787,7 @@
             <a:fld id="{027FE99C-3BAC-4305-ABBB-3890AB1B4510}" type="slidenum">
               <a:rPr lang="zh-TW" altLang="en-US" smtClean="0"/>
               <a:pPr/>
-              <a:t>33</a:t>
+              <a:t>32</a:t>
             </a:fld>
             <a:endParaRPr lang="zh-TW" altLang="en-US"/>
           </a:p>
@@ -1799,7 +1796,7 @@
     </p:spTree>
     <p:extLst>
       <p:ext uri="{BB962C8B-B14F-4D97-AF65-F5344CB8AC3E}">
-        <p14:creationId xmlns:p14="http://schemas.microsoft.com/office/powerpoint/2010/main" val="1833117342"/>
+        <p14:creationId xmlns:p14="http://schemas.microsoft.com/office/powerpoint/2010/main" val="3743146158"/>
       </p:ext>
     </p:extLst>
   </p:cSld>
@@ -1854,6 +1851,194 @@
           <a:lstStyle/>
           <a:p>
             <a:r>
+              <a:rPr lang="en-US" altLang="zh-TW" dirty="0"/>
+              <a:t>(</a:t>
+            </a:r>
+            <a:r>
+              <a:rPr lang="zh-TW" altLang="en-US" dirty="0"/>
+              <a:t>從網址列中選取</a:t>
+            </a:r>
+            <a:r>
+              <a:rPr lang="en-US" altLang="zh-TW" dirty="0"/>
+              <a:t>,</a:t>
+            </a:r>
+            <a:r>
+              <a:rPr lang="zh-TW" altLang="en-US" dirty="0"/>
+              <a:t>例如</a:t>
+            </a:r>
+            <a:r>
+              <a:rPr lang="en-US" altLang="zh-TW" dirty="0"/>
+              <a:t>localhost:8000/1/</a:t>
+            </a:r>
+            <a:r>
+              <a:rPr lang="zh-TW" altLang="en-US" dirty="0"/>
+              <a:t>會選用</a:t>
+            </a:r>
+            <a:r>
+              <a:rPr lang="en-US" altLang="zh-TW" dirty="0"/>
+              <a:t>1,</a:t>
+            </a:r>
+            <a:r>
+              <a:rPr lang="zh-TW" altLang="en-US" dirty="0"/>
+              <a:t>而</a:t>
+            </a:r>
+            <a:r>
+              <a:rPr lang="en-US" altLang="zh-TW" dirty="0"/>
+              <a:t>localhost:800/2/</a:t>
+            </a:r>
+            <a:r>
+              <a:rPr lang="zh-TW" altLang="en-US" dirty="0"/>
+              <a:t>會選用</a:t>
+            </a:r>
+            <a:r>
+              <a:rPr lang="en-US" altLang="zh-TW" dirty="0"/>
+              <a:t>2,</a:t>
+            </a:r>
+          </a:p>
+          <a:p>
+            <a:r>
+              <a:rPr lang="zh-TW" altLang="en-US" dirty="0"/>
+              <a:t>由於</a:t>
+            </a:r>
+            <a:r>
+              <a:rPr lang="en-US" altLang="zh-TW" dirty="0"/>
+              <a:t>tv</a:t>
+            </a:r>
+            <a:r>
+              <a:rPr lang="zh-TW" altLang="en-US" dirty="0"/>
+              <a:t>變數是一個字典型態的變數</a:t>
+            </a:r>
+            <a:r>
+              <a:rPr lang="en-US" altLang="zh-TW" dirty="0"/>
+              <a:t>,</a:t>
+            </a:r>
+            <a:r>
+              <a:rPr lang="zh-TW" altLang="en-US" dirty="0"/>
+              <a:t>因此可以使用</a:t>
+            </a:r>
+            <a:r>
+              <a:rPr lang="en-US" altLang="zh-TW" dirty="0"/>
+              <a:t>tv.name </a:t>
+            </a:r>
+            <a:r>
+              <a:rPr lang="zh-TW" altLang="en-US" dirty="0"/>
+              <a:t>取出頻道的名</a:t>
+            </a:r>
+          </a:p>
+          <a:p>
+            <a:r>
+              <a:rPr lang="zh-TW" altLang="en-US" dirty="0"/>
+              <a:t>稱</a:t>
+            </a:r>
+            <a:r>
+              <a:rPr lang="en-US" altLang="zh-TW" dirty="0"/>
+              <a:t>,</a:t>
+            </a:r>
+            <a:r>
+              <a:rPr lang="en-US" altLang="zh-TW" dirty="0" err="1"/>
+              <a:t>tv.tvcode</a:t>
+            </a:r>
+            <a:r>
+              <a:rPr lang="en-US" altLang="zh-TW" dirty="0"/>
+              <a:t> </a:t>
+            </a:r>
+            <a:r>
+              <a:rPr lang="zh-TW" altLang="en-US" dirty="0"/>
+              <a:t>取出影片的</a:t>
+            </a:r>
+            <a:r>
+              <a:rPr lang="en-US" altLang="zh-TW" dirty="0"/>
+              <a:t>ID</a:t>
+            </a:r>
+            <a:r>
+              <a:rPr lang="zh-TW" altLang="en-US" dirty="0"/>
+              <a:t>。</a:t>
+            </a:r>
+          </a:p>
+        </p:txBody>
+      </p:sp>
+      <p:sp>
+        <p:nvSpPr>
+          <p:cNvPr id="4" name="投影片編號版面配置區 3"/>
+          <p:cNvSpPr>
+            <a:spLocks noGrp="1"/>
+          </p:cNvSpPr>
+          <p:nvPr>
+            <p:ph type="sldNum" sz="quarter" idx="5"/>
+          </p:nvPr>
+        </p:nvSpPr>
+        <p:spPr/>
+        <p:txBody>
+          <a:bodyPr/>
+          <a:lstStyle/>
+          <a:p>
+            <a:fld id="{027FE99C-3BAC-4305-ABBB-3890AB1B4510}" type="slidenum">
+              <a:rPr lang="zh-TW" altLang="en-US" smtClean="0"/>
+              <a:pPr/>
+              <a:t>33</a:t>
+            </a:fld>
+            <a:endParaRPr lang="zh-TW" altLang="en-US"/>
+          </a:p>
+        </p:txBody>
+      </p:sp>
+    </p:spTree>
+    <p:extLst>
+      <p:ext uri="{BB962C8B-B14F-4D97-AF65-F5344CB8AC3E}">
+        <p14:creationId xmlns:p14="http://schemas.microsoft.com/office/powerpoint/2010/main" val="1833117342"/>
+      </p:ext>
+    </p:extLst>
+  </p:cSld>
+  <p:clrMapOvr>
+    <a:masterClrMapping/>
+  </p:clrMapOvr>
+</p:notes>
+</file>
+
+<file path=ppt/notesSlides/notesSlide16.xml><?xml version="1.0" encoding="utf-8"?>
+<p:notes xmlns:a="http://schemas.openxmlformats.org/drawingml/2006/main" xmlns:r="http://schemas.openxmlformats.org/officeDocument/2006/relationships" xmlns:p="http://schemas.openxmlformats.org/presentationml/2006/main">
+  <p:cSld>
+    <p:spTree>
+      <p:nvGrpSpPr>
+        <p:cNvPr id="1" name=""/>
+        <p:cNvGrpSpPr/>
+        <p:nvPr/>
+      </p:nvGrpSpPr>
+      <p:grpSpPr>
+        <a:xfrm>
+          <a:off x="0" y="0"/>
+          <a:ext cx="0" cy="0"/>
+          <a:chOff x="0" y="0"/>
+          <a:chExt cx="0" cy="0"/>
+        </a:xfrm>
+      </p:grpSpPr>
+      <p:sp>
+        <p:nvSpPr>
+          <p:cNvPr id="2" name="投影片影像版面配置區 1"/>
+          <p:cNvSpPr>
+            <a:spLocks noGrp="1" noRot="1" noChangeAspect="1"/>
+          </p:cNvSpPr>
+          <p:nvPr>
+            <p:ph type="sldImg"/>
+          </p:nvPr>
+        </p:nvSpPr>
+        <p:spPr/>
+      </p:sp>
+      <p:sp>
+        <p:nvSpPr>
+          <p:cNvPr id="3" name="備忘稿版面配置區 2"/>
+          <p:cNvSpPr>
+            <a:spLocks noGrp="1"/>
+          </p:cNvSpPr>
+          <p:nvPr>
+            <p:ph type="body" idx="1"/>
+          </p:nvPr>
+        </p:nvSpPr>
+        <p:spPr/>
+        <p:txBody>
+          <a:bodyPr/>
+          <a:lstStyle/>
+          <a:p>
+            <a:r>
               <a:rPr lang="en-US" altLang="zh-TW" dirty="0">
                 <a:solidFill>
                   <a:srgbClr val="FF0000"/>
@@ -2771,7 +2956,7 @@
 </p:notes>
 </file>
 
-<file path=ppt/notesSlides/notesSlide16.xml><?xml version="1.0" encoding="utf-8"?>
+<file path=ppt/notesSlides/notesSlide17.xml><?xml version="1.0" encoding="utf-8"?>
 <p:notes xmlns:a="http://schemas.openxmlformats.org/drawingml/2006/main" xmlns:r="http://schemas.openxmlformats.org/officeDocument/2006/relationships" xmlns:p="http://schemas.openxmlformats.org/presentationml/2006/main">
   <p:cSld>
     <p:spTree>
@@ -3738,182 +3923,6 @@
     <p:extLst>
       <p:ext uri="{BB962C8B-B14F-4D97-AF65-F5344CB8AC3E}">
         <p14:creationId xmlns:p14="http://schemas.microsoft.com/office/powerpoint/2010/main" val="264265561"/>
-      </p:ext>
-    </p:extLst>
-  </p:cSld>
-  <p:clrMapOvr>
-    <a:masterClrMapping/>
-  </p:clrMapOvr>
-</p:notes>
-</file>
-
-<file path=ppt/notesSlides/notesSlide17.xml><?xml version="1.0" encoding="utf-8"?>
-<p:notes xmlns:a="http://schemas.openxmlformats.org/drawingml/2006/main" xmlns:r="http://schemas.openxmlformats.org/officeDocument/2006/relationships" xmlns:p="http://schemas.openxmlformats.org/presentationml/2006/main">
-  <p:cSld>
-    <p:spTree>
-      <p:nvGrpSpPr>
-        <p:cNvPr id="1" name=""/>
-        <p:cNvGrpSpPr/>
-        <p:nvPr/>
-      </p:nvGrpSpPr>
-      <p:grpSpPr>
-        <a:xfrm>
-          <a:off x="0" y="0"/>
-          <a:ext cx="0" cy="0"/>
-          <a:chOff x="0" y="0"/>
-          <a:chExt cx="0" cy="0"/>
-        </a:xfrm>
-      </p:grpSpPr>
-      <p:sp>
-        <p:nvSpPr>
-          <p:cNvPr id="2" name="投影片影像版面配置區 1"/>
-          <p:cNvSpPr>
-            <a:spLocks noGrp="1" noRot="1" noChangeAspect="1"/>
-          </p:cNvSpPr>
-          <p:nvPr>
-            <p:ph type="sldImg"/>
-          </p:nvPr>
-        </p:nvSpPr>
-        <p:spPr/>
-      </p:sp>
-      <p:sp>
-        <p:nvSpPr>
-          <p:cNvPr id="3" name="備忘稿版面配置區 2"/>
-          <p:cNvSpPr>
-            <a:spLocks noGrp="1"/>
-          </p:cNvSpPr>
-          <p:nvPr>
-            <p:ph type="body" idx="1"/>
-          </p:nvPr>
-        </p:nvSpPr>
-        <p:spPr/>
-        <p:txBody>
-          <a:bodyPr/>
-          <a:lstStyle/>
-          <a:p>
-            <a:r>
-              <a:rPr lang="zh-TW" altLang="en-US" dirty="0"/>
-              <a:t>注意到</a:t>
-            </a:r>
-            <a:r>
-              <a:rPr lang="en-US" altLang="zh-TW" dirty="0"/>
-              <a:t>/embed/</a:t>
-            </a:r>
-            <a:r>
-              <a:rPr lang="zh-TW" altLang="en-US" dirty="0"/>
-              <a:t>字串後面的</a:t>
-            </a:r>
-            <a:r>
-              <a:rPr lang="en-US" altLang="zh-TW" dirty="0"/>
-              <a:t>([</a:t>
-            </a:r>
-            <a:r>
-              <a:rPr lang="en-US" altLang="zh-TW" dirty="0" err="1"/>
-              <a:t>tv.tvcodel</a:t>
-            </a:r>
-            <a:r>
-              <a:rPr lang="en-US" altLang="zh-TW" dirty="0"/>
-              <a:t>),</a:t>
-            </a:r>
-            <a:r>
-              <a:rPr lang="zh-TW" altLang="en-US" dirty="0"/>
-              <a:t>即是透過</a:t>
-            </a:r>
-            <a:r>
-              <a:rPr lang="en-US" altLang="zh-TW" dirty="0"/>
-              <a:t>Template </a:t>
-            </a:r>
-            <a:r>
-              <a:rPr lang="zh-TW" altLang="en-US" dirty="0"/>
-              <a:t>把從</a:t>
-            </a:r>
-            <a:r>
-              <a:rPr lang="en-US" altLang="zh-TW" dirty="0"/>
-              <a:t>views.py </a:t>
-            </a:r>
-            <a:r>
-              <a:rPr lang="zh-TW" altLang="en-US" dirty="0"/>
-              <a:t>傳遞過來</a:t>
-            </a:r>
-          </a:p>
-          <a:p>
-            <a:r>
-              <a:rPr lang="zh-TW" altLang="en-US" dirty="0"/>
-              <a:t>的變數取出其影片</a:t>
-            </a:r>
-            <a:r>
-              <a:rPr lang="en-US" altLang="zh-TW" dirty="0"/>
-              <a:t>ID</a:t>
-            </a:r>
-            <a:r>
-              <a:rPr lang="zh-TW" altLang="en-US" dirty="0"/>
-              <a:t>的部份</a:t>
-            </a:r>
-            <a:r>
-              <a:rPr lang="en-US" altLang="zh-TW" dirty="0"/>
-              <a:t>,</a:t>
-            </a:r>
-            <a:r>
-              <a:rPr lang="zh-TW" altLang="en-US" dirty="0"/>
-              <a:t>然後串接在嵌入碼的地方。在此</a:t>
-            </a:r>
-            <a:r>
-              <a:rPr lang="en-US" altLang="zh-TW" dirty="0"/>
-              <a:t>ID</a:t>
-            </a:r>
-            <a:r>
-              <a:rPr lang="zh-TW" altLang="en-US" dirty="0"/>
-              <a:t>後面加上</a:t>
-            </a:r>
-            <a:r>
-              <a:rPr lang="en-US" altLang="zh-TW" dirty="0"/>
-              <a:t>?autoplay=1,</a:t>
-            </a:r>
-          </a:p>
-          <a:p>
-            <a:r>
-              <a:rPr lang="zh-TW" altLang="en-US" dirty="0"/>
-              <a:t>讓此影片可以在選取之後立即自動播放</a:t>
-            </a:r>
-            <a:r>
-              <a:rPr lang="en-US" altLang="zh-TW" dirty="0"/>
-              <a:t>,</a:t>
-            </a:r>
-            <a:r>
-              <a:rPr lang="zh-TW" altLang="en-US" dirty="0"/>
-              <a:t>這樣操作起來就比較像是電視機的選台功能了。</a:t>
-            </a:r>
-          </a:p>
-        </p:txBody>
-      </p:sp>
-      <p:sp>
-        <p:nvSpPr>
-          <p:cNvPr id="4" name="投影片編號版面配置區 3"/>
-          <p:cNvSpPr>
-            <a:spLocks noGrp="1"/>
-          </p:cNvSpPr>
-          <p:nvPr>
-            <p:ph type="sldNum" sz="quarter" idx="5"/>
-          </p:nvPr>
-        </p:nvSpPr>
-        <p:spPr/>
-        <p:txBody>
-          <a:bodyPr/>
-          <a:lstStyle/>
-          <a:p>
-            <a:fld id="{027FE99C-3BAC-4305-ABBB-3890AB1B4510}" type="slidenum">
-              <a:rPr lang="zh-TW" altLang="en-US" smtClean="0"/>
-              <a:pPr/>
-              <a:t>38</a:t>
-            </a:fld>
-            <a:endParaRPr lang="zh-TW" altLang="en-US"/>
-          </a:p>
-        </p:txBody>
-      </p:sp>
-    </p:spTree>
-    <p:extLst>
-      <p:ext uri="{BB962C8B-B14F-4D97-AF65-F5344CB8AC3E}">
-        <p14:creationId xmlns:p14="http://schemas.microsoft.com/office/powerpoint/2010/main" val="3354763777"/>
       </p:ext>
     </p:extLst>
   </p:cSld>
@@ -3967,390 +3976,98 @@
           <a:bodyPr/>
           <a:lstStyle/>
           <a:p>
-            <a:pPr marL="0" marR="0" lvl="0" indent="0" algn="l" defTabSz="914400" rtl="0" eaLnBrk="1" fontAlgn="auto" latinLnBrk="0" hangingPunct="1">
-              <a:lnSpc>
-                <a:spcPct val="100000"/>
-              </a:lnSpc>
-              <a:spcBef>
-                <a:spcPts val="0"/>
-              </a:spcBef>
-              <a:spcAft>
-                <a:spcPts val="0"/>
-              </a:spcAft>
-              <a:buClrTx/>
-              <a:buSzTx/>
-              <a:buFontTx/>
-              <a:buNone/>
-              <a:tabLst/>
-              <a:defRPr/>
-            </a:pPr>
-            <a:r>
-              <a:rPr lang="zh-TW" altLang="en-US" b="0" dirty="0">
-                <a:solidFill>
-                  <a:srgbClr val="C594C5"/>
-                </a:solidFill>
-                <a:effectLst/>
-                <a:latin typeface="Consolas" panose="020B0609020204030204" pitchFamily="49" charset="0"/>
-              </a:rPr>
-              <a:t>如果</a:t>
-            </a:r>
-            <a:r>
-              <a:rPr lang="en-US" altLang="zh-TW" b="0" dirty="0">
-                <a:solidFill>
-                  <a:srgbClr val="C594C5"/>
-                </a:solidFill>
-                <a:effectLst/>
-                <a:latin typeface="Consolas" panose="020B0609020204030204" pitchFamily="49" charset="0"/>
-              </a:rPr>
-              <a:t>def</a:t>
-            </a:r>
-            <a:r>
-              <a:rPr lang="en-US" altLang="zh-TW" b="0" dirty="0">
-                <a:solidFill>
-                  <a:srgbClr val="CDD3DE"/>
-                </a:solidFill>
-                <a:effectLst/>
-                <a:latin typeface="Consolas" panose="020B0609020204030204" pitchFamily="49" charset="0"/>
-              </a:rPr>
-              <a:t> </a:t>
-            </a:r>
-            <a:r>
-              <a:rPr lang="en-US" altLang="zh-TW" b="0" dirty="0">
-                <a:solidFill>
-                  <a:srgbClr val="6699CC"/>
-                </a:solidFill>
-                <a:effectLst/>
-                <a:latin typeface="Consolas" panose="020B0609020204030204" pitchFamily="49" charset="0"/>
-              </a:rPr>
-              <a:t>index</a:t>
-            </a:r>
-            <a:r>
-              <a:rPr lang="en-US" altLang="zh-TW" b="0" dirty="0">
-                <a:solidFill>
-                  <a:srgbClr val="5FB3B3"/>
-                </a:solidFill>
-                <a:effectLst/>
-                <a:latin typeface="Consolas" panose="020B0609020204030204" pitchFamily="49" charset="0"/>
-              </a:rPr>
-              <a:t>(</a:t>
-            </a:r>
-            <a:r>
-              <a:rPr lang="en-US" altLang="zh-TW" b="0" dirty="0">
-                <a:solidFill>
-                  <a:srgbClr val="F99157"/>
-                </a:solidFill>
-                <a:effectLst/>
-                <a:latin typeface="Consolas" panose="020B0609020204030204" pitchFamily="49" charset="0"/>
-              </a:rPr>
-              <a:t>request</a:t>
-            </a:r>
-            <a:r>
-              <a:rPr lang="en-US" altLang="zh-TW" b="0" dirty="0">
-                <a:solidFill>
-                  <a:srgbClr val="5FB3B3"/>
-                </a:solidFill>
-                <a:effectLst/>
-                <a:latin typeface="Consolas" panose="020B0609020204030204" pitchFamily="49" charset="0"/>
-              </a:rPr>
+            <a:r>
+              <a:rPr lang="zh-TW" altLang="en-US" dirty="0"/>
+              <a:t>注意到</a:t>
+            </a:r>
+            <a:r>
+              <a:rPr lang="en-US" altLang="zh-TW" dirty="0"/>
+              <a:t>/embed/</a:t>
+            </a:r>
+            <a:r>
+              <a:rPr lang="zh-TW" altLang="en-US" dirty="0"/>
+              <a:t>字串後面的</a:t>
+            </a:r>
+            <a:r>
+              <a:rPr lang="en-US" altLang="zh-TW" dirty="0"/>
+              <a:t>([</a:t>
+            </a:r>
+            <a:r>
+              <a:rPr lang="en-US" altLang="zh-TW" dirty="0" err="1"/>
+              <a:t>tv.tvcodel</a:t>
+            </a:r>
+            <a:r>
+              <a:rPr lang="en-US" altLang="zh-TW" dirty="0"/>
+              <a:t>),</a:t>
+            </a:r>
+            <a:r>
+              <a:rPr lang="zh-TW" altLang="en-US" dirty="0"/>
+              <a:t>即是透過</a:t>
+            </a:r>
+            <a:r>
+              <a:rPr lang="en-US" altLang="zh-TW" dirty="0"/>
+              <a:t>Template </a:t>
+            </a:r>
+            <a:r>
+              <a:rPr lang="zh-TW" altLang="en-US" dirty="0"/>
+              <a:t>把從</a:t>
+            </a:r>
+            <a:r>
+              <a:rPr lang="en-US" altLang="zh-TW" dirty="0"/>
+              <a:t>views.py </a:t>
+            </a:r>
+            <a:r>
+              <a:rPr lang="zh-TW" altLang="en-US" dirty="0"/>
+              <a:t>傳遞過來</a:t>
+            </a:r>
+          </a:p>
+          <a:p>
+            <a:r>
+              <a:rPr lang="zh-TW" altLang="en-US" dirty="0"/>
+              <a:t>的變數取出其影片</a:t>
+            </a:r>
+            <a:r>
+              <a:rPr lang="en-US" altLang="zh-TW" dirty="0"/>
+              <a:t>ID</a:t>
+            </a:r>
+            <a:r>
+              <a:rPr lang="zh-TW" altLang="en-US" dirty="0"/>
+              <a:t>的部份</a:t>
+            </a:r>
+            <a:r>
+              <a:rPr lang="en-US" altLang="zh-TW" dirty="0"/>
               <a:t>,</a:t>
             </a:r>
             <a:r>
-              <a:rPr lang="en-US" altLang="zh-TW" b="0" dirty="0">
-                <a:solidFill>
-                  <a:srgbClr val="CDD3DE"/>
-                </a:solidFill>
-                <a:effectLst/>
-                <a:latin typeface="Consolas" panose="020B0609020204030204" pitchFamily="49" charset="0"/>
-              </a:rPr>
-              <a:t> </a:t>
-            </a:r>
-            <a:r>
-              <a:rPr lang="en-US" altLang="zh-TW" b="0" dirty="0" err="1">
-                <a:solidFill>
-                  <a:srgbClr val="F99157"/>
-                </a:solidFill>
-                <a:effectLst/>
-                <a:latin typeface="Consolas" panose="020B0609020204030204" pitchFamily="49" charset="0"/>
-              </a:rPr>
-              <a:t>tvno</a:t>
-            </a:r>
-            <a:r>
-              <a:rPr lang="en-US" altLang="zh-TW" b="0" dirty="0">
-                <a:solidFill>
-                  <a:srgbClr val="5FB3B3"/>
-                </a:solidFill>
-                <a:effectLst/>
-                <a:latin typeface="Consolas" panose="020B0609020204030204" pitchFamily="49" charset="0"/>
-              </a:rPr>
-              <a:t>):</a:t>
-            </a:r>
-            <a:r>
-              <a:rPr lang="en-US" altLang="zh-TW" b="0" dirty="0">
-                <a:solidFill>
-                  <a:srgbClr val="CDD3DE"/>
-                </a:solidFill>
-                <a:effectLst/>
-                <a:latin typeface="Consolas" panose="020B0609020204030204" pitchFamily="49" charset="0"/>
-              </a:rPr>
-              <a:t> </a:t>
-            </a:r>
-            <a:r>
-              <a:rPr lang="zh-TW" altLang="en-US" b="0" dirty="0">
-                <a:solidFill>
-                  <a:srgbClr val="CDD3DE"/>
-                </a:solidFill>
-                <a:effectLst/>
-                <a:latin typeface="Consolas" panose="020B0609020204030204" pitchFamily="49" charset="0"/>
-              </a:rPr>
-              <a:t>進入首頁不打頻道號碼</a:t>
-            </a:r>
-            <a:r>
-              <a:rPr lang="en-US" altLang="zh-TW" b="0" dirty="0">
-                <a:solidFill>
-                  <a:srgbClr val="C594C5"/>
-                </a:solidFill>
-                <a:effectLst/>
-                <a:latin typeface="Consolas" panose="020B0609020204030204" pitchFamily="49" charset="0"/>
-              </a:rPr>
-              <a:t>http://localhost:8000/</a:t>
-            </a:r>
-          </a:p>
-          <a:p>
-            <a:pPr marL="0" marR="0" lvl="0" indent="0" algn="l" defTabSz="914400" rtl="0" eaLnBrk="1" fontAlgn="auto" latinLnBrk="0" hangingPunct="1">
-              <a:lnSpc>
-                <a:spcPct val="100000"/>
-              </a:lnSpc>
-              <a:spcBef>
-                <a:spcPts val="0"/>
-              </a:spcBef>
-              <a:spcAft>
-                <a:spcPts val="0"/>
-              </a:spcAft>
-              <a:buClrTx/>
-              <a:buSzTx/>
-              <a:buFontTx/>
-              <a:buNone/>
-              <a:tabLst/>
-              <a:defRPr/>
-            </a:pPr>
-            <a:r>
-              <a:rPr lang="zh-TW" altLang="en-US" b="0" dirty="0">
-                <a:solidFill>
-                  <a:srgbClr val="C594C5"/>
-                </a:solidFill>
-                <a:effectLst/>
-                <a:latin typeface="Consolas" panose="020B0609020204030204" pitchFamily="49" charset="0"/>
-              </a:rPr>
-              <a:t>會出現</a:t>
-            </a:r>
-            <a:r>
-              <a:rPr lang="en-US" altLang="zh-TW" b="0" dirty="0">
-                <a:solidFill>
-                  <a:srgbClr val="C594C5"/>
-                </a:solidFill>
-                <a:effectLst/>
-                <a:latin typeface="Consolas" panose="020B0609020204030204" pitchFamily="49" charset="0"/>
-              </a:rPr>
-              <a:t>error</a:t>
-            </a:r>
-            <a:r>
-              <a:rPr lang="zh-TW" altLang="en-US" b="0" dirty="0">
-                <a:solidFill>
-                  <a:srgbClr val="C594C5"/>
-                </a:solidFill>
-                <a:effectLst/>
-                <a:latin typeface="Consolas" panose="020B0609020204030204" pitchFamily="49" charset="0"/>
-              </a:rPr>
-              <a:t>：</a:t>
-            </a:r>
-            <a:r>
-              <a:rPr lang="en-US" altLang="zh-TW" dirty="0"/>
-              <a:t>index() missing 1 required positional argument: '</a:t>
-            </a:r>
-            <a:r>
-              <a:rPr lang="en-US" altLang="zh-TW" dirty="0" err="1"/>
-              <a:t>tvno</a:t>
-            </a:r>
-            <a:r>
-              <a:rPr lang="en-US" altLang="zh-TW" dirty="0"/>
-              <a:t>‘</a:t>
-            </a:r>
-            <a:endParaRPr lang="en-US" altLang="zh-TW" b="0" dirty="0">
-              <a:solidFill>
-                <a:srgbClr val="C594C5"/>
-              </a:solidFill>
-              <a:effectLst/>
-              <a:latin typeface="Consolas" panose="020B0609020204030204" pitchFamily="49" charset="0"/>
-            </a:endParaRPr>
-          </a:p>
-          <a:p>
-            <a:pPr marL="0" marR="0" lvl="0" indent="0" algn="l" defTabSz="914400" rtl="0" eaLnBrk="1" fontAlgn="auto" latinLnBrk="0" hangingPunct="1">
-              <a:lnSpc>
-                <a:spcPct val="100000"/>
-              </a:lnSpc>
-              <a:spcBef>
-                <a:spcPts val="0"/>
-              </a:spcBef>
-              <a:spcAft>
-                <a:spcPts val="0"/>
-              </a:spcAft>
-              <a:buClrTx/>
-              <a:buSzTx/>
-              <a:buFontTx/>
-              <a:buNone/>
-              <a:tabLst/>
-              <a:defRPr/>
-            </a:pPr>
-            <a:r>
-              <a:rPr lang="zh-TW" altLang="en-US" b="0" dirty="0">
-                <a:solidFill>
-                  <a:srgbClr val="C594C5"/>
-                </a:solidFill>
-                <a:effectLst/>
-                <a:latin typeface="Consolas" panose="020B0609020204030204" pitchFamily="49" charset="0"/>
-              </a:rPr>
-              <a:t>要用指定預設值來解決</a:t>
-            </a:r>
-            <a:r>
-              <a:rPr lang="en-US" altLang="zh-TW" b="0" dirty="0">
-                <a:solidFill>
-                  <a:srgbClr val="C594C5"/>
-                </a:solidFill>
-                <a:effectLst/>
-                <a:latin typeface="Consolas" panose="020B0609020204030204" pitchFamily="49" charset="0"/>
-              </a:rPr>
-              <a:t>def</a:t>
-            </a:r>
-            <a:r>
-              <a:rPr lang="en-US" altLang="zh-TW" b="0" dirty="0">
-                <a:solidFill>
-                  <a:srgbClr val="CDD3DE"/>
-                </a:solidFill>
-                <a:effectLst/>
-                <a:latin typeface="Consolas" panose="020B0609020204030204" pitchFamily="49" charset="0"/>
-              </a:rPr>
-              <a:t> </a:t>
-            </a:r>
-            <a:r>
-              <a:rPr lang="en-US" altLang="zh-TW" b="0" dirty="0">
-                <a:solidFill>
-                  <a:srgbClr val="6699CC"/>
-                </a:solidFill>
-                <a:effectLst/>
-                <a:latin typeface="Consolas" panose="020B0609020204030204" pitchFamily="49" charset="0"/>
-              </a:rPr>
-              <a:t>index</a:t>
-            </a:r>
-            <a:r>
-              <a:rPr lang="en-US" altLang="zh-TW" b="0" dirty="0">
-                <a:solidFill>
-                  <a:srgbClr val="5FB3B3"/>
-                </a:solidFill>
-                <a:effectLst/>
-                <a:latin typeface="Consolas" panose="020B0609020204030204" pitchFamily="49" charset="0"/>
-              </a:rPr>
-              <a:t>(</a:t>
-            </a:r>
-            <a:r>
-              <a:rPr lang="en-US" altLang="zh-TW" b="0" dirty="0">
-                <a:solidFill>
-                  <a:srgbClr val="F99157"/>
-                </a:solidFill>
-                <a:effectLst/>
-                <a:latin typeface="Consolas" panose="020B0609020204030204" pitchFamily="49" charset="0"/>
-              </a:rPr>
-              <a:t>request</a:t>
-            </a:r>
-            <a:r>
-              <a:rPr lang="en-US" altLang="zh-TW" b="0" dirty="0">
-                <a:solidFill>
-                  <a:srgbClr val="5FB3B3"/>
-                </a:solidFill>
-                <a:effectLst/>
-                <a:latin typeface="Consolas" panose="020B0609020204030204" pitchFamily="49" charset="0"/>
-              </a:rPr>
+              <a:rPr lang="zh-TW" altLang="en-US" dirty="0"/>
+              <a:t>然後串接在嵌入碼的地方。在此</a:t>
+            </a:r>
+            <a:r>
+              <a:rPr lang="en-US" altLang="zh-TW" dirty="0"/>
+              <a:t>ID</a:t>
+            </a:r>
+            <a:r>
+              <a:rPr lang="zh-TW" altLang="en-US" dirty="0"/>
+              <a:t>後面加上</a:t>
+            </a:r>
+            <a:r>
+              <a:rPr lang="en-US" altLang="zh-TW" dirty="0"/>
+              <a:t>?autoplay=1,</a:t>
+            </a:r>
+          </a:p>
+          <a:p>
+            <a:r>
+              <a:rPr lang="zh-TW" altLang="en-US" dirty="0"/>
+              <a:t>讓此影片可以在選取之後立即自動播放</a:t>
+            </a:r>
+            <a:r>
+              <a:rPr lang="en-US" altLang="zh-TW" dirty="0"/>
               <a:t>,</a:t>
             </a:r>
             <a:r>
-              <a:rPr lang="en-US" altLang="zh-TW" b="0" dirty="0">
-                <a:solidFill>
-                  <a:srgbClr val="CDD3DE"/>
-                </a:solidFill>
-                <a:effectLst/>
-                <a:latin typeface="Consolas" panose="020B0609020204030204" pitchFamily="49" charset="0"/>
-              </a:rPr>
-              <a:t> </a:t>
-            </a:r>
-            <a:r>
-              <a:rPr lang="en-US" altLang="zh-TW" b="1" dirty="0" err="1">
-                <a:solidFill>
-                  <a:srgbClr val="F99157"/>
-                </a:solidFill>
-                <a:effectLst/>
-                <a:latin typeface="Consolas" panose="020B0609020204030204" pitchFamily="49" charset="0"/>
-              </a:rPr>
-              <a:t>tvno</a:t>
-            </a:r>
-            <a:r>
-              <a:rPr lang="en-US" altLang="zh-TW" b="1" dirty="0">
-                <a:solidFill>
-                  <a:srgbClr val="CDD3DE"/>
-                </a:solidFill>
-                <a:effectLst/>
-                <a:latin typeface="Consolas" panose="020B0609020204030204" pitchFamily="49" charset="0"/>
-              </a:rPr>
-              <a:t> </a:t>
-            </a:r>
-            <a:r>
-              <a:rPr lang="en-US" altLang="zh-TW" b="1" dirty="0">
-                <a:solidFill>
-                  <a:srgbClr val="5FB3B3"/>
-                </a:solidFill>
-                <a:effectLst/>
-                <a:latin typeface="Consolas" panose="020B0609020204030204" pitchFamily="49" charset="0"/>
-              </a:rPr>
-              <a:t>=</a:t>
-            </a:r>
-            <a:r>
-              <a:rPr lang="en-US" altLang="zh-TW" b="1" dirty="0">
-                <a:solidFill>
-                  <a:srgbClr val="CDD3DE"/>
-                </a:solidFill>
-                <a:effectLst/>
-                <a:latin typeface="Consolas" panose="020B0609020204030204" pitchFamily="49" charset="0"/>
-              </a:rPr>
-              <a:t> </a:t>
-            </a:r>
-            <a:r>
-              <a:rPr lang="en-US" altLang="zh-TW" b="1" dirty="0">
-                <a:solidFill>
-                  <a:srgbClr val="F99157"/>
-                </a:solidFill>
-                <a:effectLst/>
-                <a:latin typeface="Consolas" panose="020B0609020204030204" pitchFamily="49" charset="0"/>
-              </a:rPr>
-              <a:t>0</a:t>
-            </a:r>
-            <a:r>
-              <a:rPr lang="en-US" altLang="zh-TW" b="0" dirty="0">
-                <a:solidFill>
-                  <a:srgbClr val="5FB3B3"/>
-                </a:solidFill>
-                <a:effectLst/>
-                <a:latin typeface="Consolas" panose="020B0609020204030204" pitchFamily="49" charset="0"/>
-              </a:rPr>
-              <a:t>):</a:t>
-            </a:r>
-            <a:endParaRPr lang="en-US" altLang="zh-TW" b="0" dirty="0">
-              <a:solidFill>
-                <a:srgbClr val="CDD3DE"/>
-              </a:solidFill>
-              <a:effectLst/>
-              <a:latin typeface="Consolas" panose="020B0609020204030204" pitchFamily="49" charset="0"/>
-            </a:endParaRPr>
-          </a:p>
-          <a:p>
-            <a:endParaRPr lang="zh-TW" altLang="en-US" dirty="0"/>
+              <a:rPr lang="zh-TW" altLang="en-US" dirty="0"/>
+              <a:t>這樣操作起來就比較像是電視機的選台功能了。</a:t>
+            </a:r>
           </a:p>
         </p:txBody>
       </p:sp>
@@ -4372,7 +4089,7 @@
             <a:fld id="{027FE99C-3BAC-4305-ABBB-3890AB1B4510}" type="slidenum">
               <a:rPr lang="zh-TW" altLang="en-US" smtClean="0"/>
               <a:pPr/>
-              <a:t>39</a:t>
+              <a:t>38</a:t>
             </a:fld>
             <a:endParaRPr lang="zh-TW" altLang="en-US"/>
           </a:p>
@@ -4381,7 +4098,7 @@
     </p:spTree>
     <p:extLst>
       <p:ext uri="{BB962C8B-B14F-4D97-AF65-F5344CB8AC3E}">
-        <p14:creationId xmlns:p14="http://schemas.microsoft.com/office/powerpoint/2010/main" val="807924264"/>
+        <p14:creationId xmlns:p14="http://schemas.microsoft.com/office/powerpoint/2010/main" val="3354763777"/>
       </p:ext>
     </p:extLst>
   </p:cSld>
@@ -4435,161 +4152,389 @@
           <a:bodyPr/>
           <a:lstStyle/>
           <a:p>
-            <a:r>
-              <a:rPr lang="zh-TW" altLang="en-US" dirty="0"/>
-              <a:t>問：已有</a:t>
-            </a:r>
-            <a:r>
-              <a:rPr lang="en-US" altLang="zh-TW" dirty="0"/>
-              <a:t>static</a:t>
-            </a:r>
-            <a:r>
-              <a:rPr lang="zh-TW" altLang="en-US" dirty="0"/>
-              <a:t>目錄了，為何還要設定</a:t>
-            </a:r>
-            <a:r>
-              <a:rPr lang="en-US" altLang="zh-TW" sz="1200" kern="100" dirty="0" err="1">
-                <a:effectLst/>
-                <a:latin typeface="Courier New" panose="02070309020205020404" pitchFamily="49" charset="0"/>
-                <a:ea typeface="標楷體" panose="03000509000000000000" pitchFamily="65" charset="-120"/>
-              </a:rPr>
-              <a:t>staticfiles</a:t>
-            </a:r>
-            <a:r>
-              <a:rPr lang="zh-TW" altLang="en-US" sz="1200" kern="100" dirty="0">
-                <a:effectLst/>
-                <a:latin typeface="Courier New" panose="02070309020205020404" pitchFamily="49" charset="0"/>
-                <a:ea typeface="標楷體" panose="03000509000000000000" pitchFamily="65" charset="-120"/>
-              </a:rPr>
-              <a:t>並將檔案</a:t>
-            </a:r>
-            <a:r>
-              <a:rPr lang="en-US" altLang="zh-TW" sz="1200" kern="100" dirty="0">
-                <a:effectLst/>
-                <a:latin typeface="Courier New" panose="02070309020205020404" pitchFamily="49" charset="0"/>
-                <a:ea typeface="標楷體" panose="03000509000000000000" pitchFamily="65" charset="-120"/>
-              </a:rPr>
-              <a:t>copy</a:t>
-            </a:r>
-            <a:r>
-              <a:rPr lang="zh-TW" altLang="en-US" sz="1200" kern="100" dirty="0">
-                <a:effectLst/>
-                <a:latin typeface="Courier New" panose="02070309020205020404" pitchFamily="49" charset="0"/>
-                <a:ea typeface="標楷體" panose="03000509000000000000" pitchFamily="65" charset="-120"/>
-              </a:rPr>
-              <a:t>過去</a:t>
-            </a:r>
-            <a:r>
-              <a:rPr lang="en-US" altLang="zh-TW" sz="1200" kern="100" dirty="0">
-                <a:effectLst/>
-                <a:latin typeface="Courier New" panose="02070309020205020404" pitchFamily="49" charset="0"/>
-                <a:ea typeface="標楷體" panose="03000509000000000000" pitchFamily="65" charset="-120"/>
-              </a:rPr>
-              <a:t>?</a:t>
-            </a:r>
-          </a:p>
-          <a:p>
-            <a:r>
-              <a:rPr lang="en-US" altLang="zh-TW" sz="1200" kern="100" dirty="0">
-                <a:effectLst/>
-                <a:latin typeface="Courier New" panose="02070309020205020404" pitchFamily="49" charset="0"/>
-                <a:ea typeface="標楷體" panose="03000509000000000000" pitchFamily="65" charset="-120"/>
-              </a:rPr>
-              <a:t>Ans</a:t>
-            </a:r>
-            <a:r>
-              <a:rPr lang="zh-TW" altLang="en-US" sz="1200" kern="100" dirty="0">
-                <a:effectLst/>
-                <a:latin typeface="Courier New" panose="02070309020205020404" pitchFamily="49" charset="0"/>
-                <a:ea typeface="標楷體" panose="03000509000000000000" pitchFamily="65" charset="-120"/>
-              </a:rPr>
-              <a:t>：此設定是給</a:t>
-            </a:r>
-            <a:r>
-              <a:rPr lang="en-US" altLang="zh-TW" sz="1200" kern="100" dirty="0">
-                <a:effectLst/>
-                <a:latin typeface="Courier New" panose="02070309020205020404" pitchFamily="49" charset="0"/>
-                <a:ea typeface="標楷體" panose="03000509000000000000" pitchFamily="65" charset="-120"/>
-              </a:rPr>
-              <a:t>templates</a:t>
-            </a:r>
-            <a:r>
-              <a:rPr lang="zh-TW" altLang="en-US" sz="1200" kern="100" dirty="0">
-                <a:effectLst/>
-                <a:latin typeface="Courier New" panose="02070309020205020404" pitchFamily="49" charset="0"/>
-                <a:ea typeface="標楷體" panose="03000509000000000000" pitchFamily="65" charset="-120"/>
-              </a:rPr>
-              <a:t>引擎知道要去哪找</a:t>
-            </a:r>
-            <a:r>
-              <a:rPr lang="en-US" altLang="zh-TW" sz="1200" kern="100" dirty="0">
-                <a:effectLst/>
-                <a:latin typeface="Courier New" panose="02070309020205020404" pitchFamily="49" charset="0"/>
-                <a:ea typeface="標楷體" panose="03000509000000000000" pitchFamily="65" charset="-120"/>
-              </a:rPr>
-              <a:t>static</a:t>
-            </a:r>
-            <a:r>
-              <a:rPr lang="zh-TW" altLang="en-US" sz="1200" kern="100" dirty="0">
-                <a:effectLst/>
-                <a:latin typeface="Courier New" panose="02070309020205020404" pitchFamily="49" charset="0"/>
-                <a:ea typeface="標楷體" panose="03000509000000000000" pitchFamily="65" charset="-120"/>
-              </a:rPr>
-              <a:t>的檔案，也就是在</a:t>
-            </a:r>
-            <a:r>
-              <a:rPr lang="en-US" altLang="zh-TW" dirty="0"/>
-              <a:t>{% load</a:t>
-            </a:r>
-            <a:r>
-              <a:rPr lang="zh-TW" altLang="en-US" dirty="0"/>
+            <a:pPr marL="0" marR="0" lvl="0" indent="0" algn="l" defTabSz="914400" rtl="0" eaLnBrk="1" fontAlgn="auto" latinLnBrk="0" hangingPunct="1">
+              <a:lnSpc>
+                <a:spcPct val="100000"/>
+              </a:lnSpc>
+              <a:spcBef>
+                <a:spcPts val="0"/>
+              </a:spcBef>
+              <a:spcAft>
+                <a:spcPts val="0"/>
+              </a:spcAft>
+              <a:buClrTx/>
+              <a:buSzTx/>
+              <a:buFontTx/>
+              <a:buNone/>
+              <a:tabLst/>
+              <a:defRPr/>
+            </a:pPr>
+            <a:r>
+              <a:rPr lang="zh-TW" altLang="en-US" b="0" dirty="0">
+                <a:solidFill>
+                  <a:srgbClr val="C594C5"/>
+                </a:solidFill>
+                <a:effectLst/>
+                <a:latin typeface="Consolas" panose="020B0609020204030204" pitchFamily="49" charset="0"/>
+              </a:rPr>
+              <a:t>如果</a:t>
+            </a:r>
+            <a:r>
+              <a:rPr lang="en-US" altLang="zh-TW" b="0" dirty="0">
+                <a:solidFill>
+                  <a:srgbClr val="C594C5"/>
+                </a:solidFill>
+                <a:effectLst/>
+                <a:latin typeface="Consolas" panose="020B0609020204030204" pitchFamily="49" charset="0"/>
+              </a:rPr>
+              <a:t>def</a:t>
+            </a:r>
+            <a:r>
+              <a:rPr lang="en-US" altLang="zh-TW" b="0" dirty="0">
+                <a:solidFill>
+                  <a:srgbClr val="CDD3DE"/>
+                </a:solidFill>
+                <a:effectLst/>
+                <a:latin typeface="Consolas" panose="020B0609020204030204" pitchFamily="49" charset="0"/>
+              </a:rPr>
               <a:t> </a:t>
             </a:r>
             <a:r>
-              <a:rPr lang="en-US" altLang="zh-TW" dirty="0"/>
-              <a:t>static %}</a:t>
-            </a:r>
-            <a:r>
-              <a:rPr lang="zh-TW" altLang="en-US" dirty="0"/>
-              <a:t>之內會用到，另外其他套件的</a:t>
-            </a:r>
-            <a:r>
-              <a:rPr lang="en-US" altLang="zh-TW" dirty="0"/>
-              <a:t>static file</a:t>
-            </a:r>
-            <a:r>
-              <a:rPr lang="zh-TW" altLang="en-US" dirty="0"/>
-              <a:t>也會一起</a:t>
-            </a:r>
-            <a:r>
-              <a:rPr lang="en-US" altLang="zh-TW" dirty="0"/>
-              <a:t>copy</a:t>
-            </a:r>
-            <a:r>
-              <a:rPr lang="zh-TW" altLang="en-US" dirty="0"/>
-              <a:t>進來，不會只有我們建立的</a:t>
-            </a:r>
-            <a:r>
-              <a:rPr lang="en-US" altLang="zh-TW" dirty="0"/>
-              <a:t>static files</a:t>
-            </a:r>
-          </a:p>
-          <a:p>
-            <a:r>
-              <a:rPr lang="en-US" altLang="zh-TW" dirty="0"/>
-              <a:t>python manage.py </a:t>
+              <a:rPr lang="en-US" altLang="zh-TW" b="0" dirty="0">
+                <a:solidFill>
+                  <a:srgbClr val="6699CC"/>
+                </a:solidFill>
+                <a:effectLst/>
+                <a:latin typeface="Consolas" panose="020B0609020204030204" pitchFamily="49" charset="0"/>
+              </a:rPr>
+              <a:t>index</a:t>
+            </a:r>
+            <a:r>
+              <a:rPr lang="en-US" altLang="zh-TW" b="0" dirty="0">
+                <a:solidFill>
+                  <a:srgbClr val="5FB3B3"/>
+                </a:solidFill>
+                <a:effectLst/>
+                <a:latin typeface="Consolas" panose="020B0609020204030204" pitchFamily="49" charset="0"/>
+              </a:rPr>
+              <a:t>(</a:t>
+            </a:r>
+            <a:r>
+              <a:rPr lang="en-US" altLang="zh-TW" b="0" dirty="0">
+                <a:solidFill>
+                  <a:srgbClr val="F99157"/>
+                </a:solidFill>
+                <a:effectLst/>
+                <a:latin typeface="Consolas" panose="020B0609020204030204" pitchFamily="49" charset="0"/>
+              </a:rPr>
+              <a:t>request</a:t>
+            </a:r>
+            <a:r>
+              <a:rPr lang="en-US" altLang="zh-TW" b="0" dirty="0">
+                <a:solidFill>
+                  <a:srgbClr val="5FB3B3"/>
+                </a:solidFill>
+                <a:effectLst/>
+                <a:latin typeface="Consolas" panose="020B0609020204030204" pitchFamily="49" charset="0"/>
+              </a:rPr>
+              <a:t>,</a:t>
+            </a:r>
+            <a:r>
+              <a:rPr lang="en-US" altLang="zh-TW" b="0" dirty="0">
+                <a:solidFill>
+                  <a:srgbClr val="CDD3DE"/>
+                </a:solidFill>
+                <a:effectLst/>
+                <a:latin typeface="Consolas" panose="020B0609020204030204" pitchFamily="49" charset="0"/>
+              </a:rPr>
+              <a:t> </a:t>
+            </a:r>
+            <a:r>
+              <a:rPr lang="en-US" altLang="zh-TW" b="0" dirty="0" err="1">
+                <a:solidFill>
+                  <a:srgbClr val="F99157"/>
+                </a:solidFill>
+                <a:effectLst/>
+                <a:latin typeface="Consolas" panose="020B0609020204030204" pitchFamily="49" charset="0"/>
+              </a:rPr>
+              <a:t>tvno</a:t>
+            </a:r>
+            <a:r>
+              <a:rPr lang="en-US" altLang="zh-TW" b="0" dirty="0">
+                <a:solidFill>
+                  <a:srgbClr val="5FB3B3"/>
+                </a:solidFill>
+                <a:effectLst/>
+                <a:latin typeface="Consolas" panose="020B0609020204030204" pitchFamily="49" charset="0"/>
+              </a:rPr>
+              <a:t>):</a:t>
+            </a:r>
+            <a:r>
+              <a:rPr lang="en-US" altLang="zh-TW" b="0" dirty="0">
+                <a:solidFill>
+                  <a:srgbClr val="CDD3DE"/>
+                </a:solidFill>
+                <a:effectLst/>
+                <a:latin typeface="Consolas" panose="020B0609020204030204" pitchFamily="49" charset="0"/>
+              </a:rPr>
+              <a:t> </a:t>
+            </a:r>
+            <a:r>
+              <a:rPr lang="zh-TW" altLang="en-US" b="0" dirty="0">
+                <a:solidFill>
+                  <a:srgbClr val="CDD3DE"/>
+                </a:solidFill>
+                <a:effectLst/>
+                <a:latin typeface="Consolas" panose="020B0609020204030204" pitchFamily="49" charset="0"/>
+              </a:rPr>
+              <a:t>進入首頁不打頻道號碼</a:t>
+            </a:r>
+            <a:r>
+              <a:rPr lang="en-US" altLang="zh-TW" b="0" dirty="0">
+                <a:solidFill>
+                  <a:srgbClr val="C594C5"/>
+                </a:solidFill>
+                <a:effectLst/>
+                <a:latin typeface="Consolas" panose="020B0609020204030204" pitchFamily="49" charset="0"/>
+              </a:rPr>
+              <a:t>http://localhost:8000/</a:t>
+            </a:r>
+          </a:p>
+          <a:p>
+            <a:pPr marL="0" marR="0" lvl="0" indent="0" algn="l" defTabSz="914400" rtl="0" eaLnBrk="1" fontAlgn="auto" latinLnBrk="0" hangingPunct="1">
+              <a:lnSpc>
+                <a:spcPct val="100000"/>
+              </a:lnSpc>
+              <a:spcBef>
+                <a:spcPts val="0"/>
+              </a:spcBef>
+              <a:spcAft>
+                <a:spcPts val="0"/>
+              </a:spcAft>
+              <a:buClrTx/>
+              <a:buSzTx/>
+              <a:buFontTx/>
+              <a:buNone/>
+              <a:tabLst/>
+              <a:defRPr/>
+            </a:pPr>
+            <a:r>
+              <a:rPr lang="zh-TW" altLang="en-US" b="0" dirty="0">
+                <a:solidFill>
+                  <a:srgbClr val="C594C5"/>
+                </a:solidFill>
+                <a:effectLst/>
+                <a:latin typeface="Consolas" panose="020B0609020204030204" pitchFamily="49" charset="0"/>
+              </a:rPr>
+              <a:t>會出現</a:t>
+            </a:r>
+            <a:r>
+              <a:rPr lang="en-US" altLang="zh-TW" b="0" dirty="0">
+                <a:solidFill>
+                  <a:srgbClr val="C594C5"/>
+                </a:solidFill>
+                <a:effectLst/>
+                <a:latin typeface="Consolas" panose="020B0609020204030204" pitchFamily="49" charset="0"/>
+              </a:rPr>
+              <a:t>error</a:t>
+            </a:r>
+            <a:r>
+              <a:rPr lang="zh-TW" altLang="en-US" b="0" dirty="0">
+                <a:solidFill>
+                  <a:srgbClr val="C594C5"/>
+                </a:solidFill>
+                <a:effectLst/>
+                <a:latin typeface="Consolas" panose="020B0609020204030204" pitchFamily="49" charset="0"/>
+              </a:rPr>
+              <a:t>：</a:t>
+            </a:r>
+            <a:r>
+              <a:rPr lang="en-US" altLang="zh-TW" dirty="0"/>
+              <a:t>index() missing 1 required positional argument: '</a:t>
             </a:r>
             <a:r>
               <a:rPr lang="en-US" altLang="zh-TW" dirty="0" err="1"/>
-              <a:t>collectstatic</a:t>
-            </a:r>
-            <a:endParaRPr lang="en-US" altLang="zh-TW" dirty="0"/>
-          </a:p>
-          <a:p>
-            <a:r>
-              <a:rPr lang="en-US" altLang="zh-TW" dirty="0"/>
-              <a:t>http://127.0.0.1:8000/static/images/logo.png</a:t>
-            </a:r>
+              <a:t>tvno</a:t>
+            </a:r>
+            <a:r>
+              <a:rPr lang="en-US" altLang="zh-TW" dirty="0"/>
+              <a:t>‘</a:t>
+            </a:r>
+            <a:endParaRPr lang="en-US" altLang="zh-TW" b="0" dirty="0">
+              <a:solidFill>
+                <a:srgbClr val="C594C5"/>
+              </a:solidFill>
+              <a:effectLst/>
+              <a:latin typeface="Consolas" panose="020B0609020204030204" pitchFamily="49" charset="0"/>
+            </a:endParaRPr>
+          </a:p>
+          <a:p>
+            <a:pPr marL="0" marR="0" lvl="0" indent="0" algn="l" defTabSz="914400" rtl="0" eaLnBrk="1" fontAlgn="auto" latinLnBrk="0" hangingPunct="1">
+              <a:lnSpc>
+                <a:spcPct val="100000"/>
+              </a:lnSpc>
+              <a:spcBef>
+                <a:spcPts val="0"/>
+              </a:spcBef>
+              <a:spcAft>
+                <a:spcPts val="0"/>
+              </a:spcAft>
+              <a:buClrTx/>
+              <a:buSzTx/>
+              <a:buFontTx/>
+              <a:buNone/>
+              <a:tabLst/>
+              <a:defRPr/>
+            </a:pPr>
+            <a:r>
+              <a:rPr lang="zh-TW" altLang="en-US" b="0" dirty="0">
+                <a:solidFill>
+                  <a:srgbClr val="C594C5"/>
+                </a:solidFill>
+                <a:effectLst/>
+                <a:latin typeface="Consolas" panose="020B0609020204030204" pitchFamily="49" charset="0"/>
+              </a:rPr>
+              <a:t>要用指定預設值來解決</a:t>
+            </a:r>
+            <a:r>
+              <a:rPr lang="en-US" altLang="zh-TW" b="0" dirty="0">
+                <a:solidFill>
+                  <a:srgbClr val="C594C5"/>
+                </a:solidFill>
+                <a:effectLst/>
+                <a:latin typeface="Consolas" panose="020B0609020204030204" pitchFamily="49" charset="0"/>
+              </a:rPr>
+              <a:t>def</a:t>
+            </a:r>
+            <a:r>
+              <a:rPr lang="en-US" altLang="zh-TW" b="0" dirty="0">
+                <a:solidFill>
+                  <a:srgbClr val="CDD3DE"/>
+                </a:solidFill>
+                <a:effectLst/>
+                <a:latin typeface="Consolas" panose="020B0609020204030204" pitchFamily="49" charset="0"/>
+              </a:rPr>
+              <a:t> </a:t>
+            </a:r>
+            <a:r>
+              <a:rPr lang="en-US" altLang="zh-TW" b="0" dirty="0">
+                <a:solidFill>
+                  <a:srgbClr val="6699CC"/>
+                </a:solidFill>
+                <a:effectLst/>
+                <a:latin typeface="Consolas" panose="020B0609020204030204" pitchFamily="49" charset="0"/>
+              </a:rPr>
+              <a:t>index</a:t>
+            </a:r>
+            <a:r>
+              <a:rPr lang="en-US" altLang="zh-TW" b="0" dirty="0">
+                <a:solidFill>
+                  <a:srgbClr val="5FB3B3"/>
+                </a:solidFill>
+                <a:effectLst/>
+                <a:latin typeface="Consolas" panose="020B0609020204030204" pitchFamily="49" charset="0"/>
+              </a:rPr>
+              <a:t>(</a:t>
+            </a:r>
+            <a:r>
+              <a:rPr lang="en-US" altLang="zh-TW" b="0" dirty="0">
+                <a:solidFill>
+                  <a:srgbClr val="F99157"/>
+                </a:solidFill>
+                <a:effectLst/>
+                <a:latin typeface="Consolas" panose="020B0609020204030204" pitchFamily="49" charset="0"/>
+              </a:rPr>
+              <a:t>request</a:t>
+            </a:r>
+            <a:r>
+              <a:rPr lang="en-US" altLang="zh-TW" b="0" dirty="0">
+                <a:solidFill>
+                  <a:srgbClr val="5FB3B3"/>
+                </a:solidFill>
+                <a:effectLst/>
+                <a:latin typeface="Consolas" panose="020B0609020204030204" pitchFamily="49" charset="0"/>
+              </a:rPr>
+              <a:t>,</a:t>
+            </a:r>
+            <a:r>
+              <a:rPr lang="en-US" altLang="zh-TW" b="0" dirty="0">
+                <a:solidFill>
+                  <a:srgbClr val="CDD3DE"/>
+                </a:solidFill>
+                <a:effectLst/>
+                <a:latin typeface="Consolas" panose="020B0609020204030204" pitchFamily="49" charset="0"/>
+              </a:rPr>
+              <a:t> </a:t>
+            </a:r>
+            <a:r>
+              <a:rPr lang="en-US" altLang="zh-TW" b="1" dirty="0" err="1">
+                <a:solidFill>
+                  <a:srgbClr val="F99157"/>
+                </a:solidFill>
+                <a:effectLst/>
+                <a:latin typeface="Consolas" panose="020B0609020204030204" pitchFamily="49" charset="0"/>
+              </a:rPr>
+              <a:t>tvno</a:t>
+            </a:r>
+            <a:r>
+              <a:rPr lang="en-US" altLang="zh-TW" b="1" dirty="0">
+                <a:solidFill>
+                  <a:srgbClr val="CDD3DE"/>
+                </a:solidFill>
+                <a:effectLst/>
+                <a:latin typeface="Consolas" panose="020B0609020204030204" pitchFamily="49" charset="0"/>
+              </a:rPr>
+              <a:t> </a:t>
+            </a:r>
+            <a:r>
+              <a:rPr lang="en-US" altLang="zh-TW" b="1" dirty="0">
+                <a:solidFill>
+                  <a:srgbClr val="5FB3B3"/>
+                </a:solidFill>
+                <a:effectLst/>
+                <a:latin typeface="Consolas" panose="020B0609020204030204" pitchFamily="49" charset="0"/>
+              </a:rPr>
+              <a:t>=</a:t>
+            </a:r>
+            <a:r>
+              <a:rPr lang="en-US" altLang="zh-TW" b="1" dirty="0">
+                <a:solidFill>
+                  <a:srgbClr val="CDD3DE"/>
+                </a:solidFill>
+                <a:effectLst/>
+                <a:latin typeface="Consolas" panose="020B0609020204030204" pitchFamily="49" charset="0"/>
+              </a:rPr>
+              <a:t> </a:t>
+            </a:r>
+            <a:r>
+              <a:rPr lang="en-US" altLang="zh-TW" b="1" dirty="0">
+                <a:solidFill>
+                  <a:srgbClr val="F99157"/>
+                </a:solidFill>
+                <a:effectLst/>
+                <a:latin typeface="Consolas" panose="020B0609020204030204" pitchFamily="49" charset="0"/>
+              </a:rPr>
+              <a:t>0</a:t>
+            </a:r>
+            <a:r>
+              <a:rPr lang="en-US" altLang="zh-TW" b="0" dirty="0">
+                <a:solidFill>
+                  <a:srgbClr val="5FB3B3"/>
+                </a:solidFill>
+                <a:effectLst/>
+                <a:latin typeface="Consolas" panose="020B0609020204030204" pitchFamily="49" charset="0"/>
+              </a:rPr>
+              <a:t>):</a:t>
+            </a:r>
+            <a:endParaRPr lang="en-US" altLang="zh-TW" b="0" dirty="0">
+              <a:solidFill>
+                <a:srgbClr val="CDD3DE"/>
+              </a:solidFill>
+              <a:effectLst/>
+              <a:latin typeface="Consolas" panose="020B0609020204030204" pitchFamily="49" charset="0"/>
+            </a:endParaRPr>
+          </a:p>
+          <a:p>
             <a:endParaRPr lang="zh-TW" altLang="en-US" dirty="0"/>
           </a:p>
         </p:txBody>
@@ -4612,7 +4557,7 @@
             <a:fld id="{027FE99C-3BAC-4305-ABBB-3890AB1B4510}" type="slidenum">
               <a:rPr lang="zh-TW" altLang="en-US" smtClean="0"/>
               <a:pPr/>
-              <a:t>40</a:t>
+              <a:t>39</a:t>
             </a:fld>
             <a:endParaRPr lang="zh-TW" altLang="en-US"/>
           </a:p>
@@ -4621,7 +4566,7 @@
     </p:spTree>
     <p:extLst>
       <p:ext uri="{BB962C8B-B14F-4D97-AF65-F5344CB8AC3E}">
-        <p14:creationId xmlns:p14="http://schemas.microsoft.com/office/powerpoint/2010/main" val="1781074241"/>
+        <p14:creationId xmlns:p14="http://schemas.microsoft.com/office/powerpoint/2010/main" val="807924264"/>
       </p:ext>
     </p:extLst>
   </p:cSld>
@@ -4857,88 +4802,159 @@
           <a:p>
             <a:r>
               <a:rPr lang="zh-TW" altLang="en-US" dirty="0"/>
-              <a:t>上述的設定完成之後</a:t>
-            </a:r>
-            <a:r>
-              <a:rPr lang="en-US" altLang="zh-TW" dirty="0"/>
-              <a:t>,</a:t>
+              <a:t>問：已有</a:t>
+            </a:r>
+            <a:r>
+              <a:rPr lang="en-US" altLang="zh-TW" dirty="0"/>
+              <a:t>static</a:t>
             </a:r>
             <a:r>
               <a:rPr lang="zh-TW" altLang="en-US" dirty="0"/>
-              <a:t>需要再執行</a:t>
+              <a:t>目錄了，為何還要設定</a:t>
+            </a:r>
+            <a:r>
+              <a:rPr lang="en-US" altLang="zh-TW" sz="1200" kern="100" dirty="0" err="1">
+                <a:effectLst/>
+                <a:latin typeface="Courier New" panose="02070309020205020404" pitchFamily="49" charset="0"/>
+                <a:ea typeface="標楷體" panose="03000509000000000000" pitchFamily="65" charset="-120"/>
+              </a:rPr>
+              <a:t>staticfiles</a:t>
+            </a:r>
+            <a:r>
+              <a:rPr lang="zh-TW" altLang="en-US" sz="1200" kern="100" dirty="0">
+                <a:effectLst/>
+                <a:latin typeface="Courier New" panose="02070309020205020404" pitchFamily="49" charset="0"/>
+                <a:ea typeface="標楷體" panose="03000509000000000000" pitchFamily="65" charset="-120"/>
+              </a:rPr>
+              <a:t>並將檔案</a:t>
+            </a:r>
+            <a:r>
+              <a:rPr lang="en-US" altLang="zh-TW" sz="1200" kern="100" dirty="0">
+                <a:effectLst/>
+                <a:latin typeface="Courier New" panose="02070309020205020404" pitchFamily="49" charset="0"/>
+                <a:ea typeface="標楷體" panose="03000509000000000000" pitchFamily="65" charset="-120"/>
+              </a:rPr>
+              <a:t>copy</a:t>
+            </a:r>
+            <a:r>
+              <a:rPr lang="zh-TW" altLang="en-US" sz="1200" kern="100" dirty="0">
+                <a:effectLst/>
+                <a:latin typeface="Courier New" panose="02070309020205020404" pitchFamily="49" charset="0"/>
+                <a:ea typeface="標楷體" panose="03000509000000000000" pitchFamily="65" charset="-120"/>
+              </a:rPr>
+              <a:t>過去</a:t>
+            </a:r>
+            <a:r>
+              <a:rPr lang="en-US" altLang="zh-TW" sz="1200" kern="100" dirty="0">
+                <a:effectLst/>
+                <a:latin typeface="Courier New" panose="02070309020205020404" pitchFamily="49" charset="0"/>
+                <a:ea typeface="標楷體" panose="03000509000000000000" pitchFamily="65" charset="-120"/>
+              </a:rPr>
+              <a:t>?</a:t>
+            </a:r>
+          </a:p>
+          <a:p>
+            <a:r>
+              <a:rPr lang="en-US" altLang="zh-TW" sz="1200" kern="100" dirty="0">
+                <a:effectLst/>
+                <a:latin typeface="Courier New" panose="02070309020205020404" pitchFamily="49" charset="0"/>
+                <a:ea typeface="標楷體" panose="03000509000000000000" pitchFamily="65" charset="-120"/>
+              </a:rPr>
+              <a:t>Ans</a:t>
+            </a:r>
+            <a:r>
+              <a:rPr lang="zh-TW" altLang="en-US" sz="1200" kern="100" dirty="0">
+                <a:effectLst/>
+                <a:latin typeface="Courier New" panose="02070309020205020404" pitchFamily="49" charset="0"/>
+                <a:ea typeface="標楷體" panose="03000509000000000000" pitchFamily="65" charset="-120"/>
+              </a:rPr>
+              <a:t>：此設定是給</a:t>
+            </a:r>
+            <a:r>
+              <a:rPr lang="en-US" altLang="zh-TW" sz="1200" kern="100" dirty="0">
+                <a:effectLst/>
+                <a:latin typeface="Courier New" panose="02070309020205020404" pitchFamily="49" charset="0"/>
+                <a:ea typeface="標楷體" panose="03000509000000000000" pitchFamily="65" charset="-120"/>
+              </a:rPr>
+              <a:t>templates</a:t>
+            </a:r>
+            <a:r>
+              <a:rPr lang="zh-TW" altLang="en-US" sz="1200" kern="100" dirty="0">
+                <a:effectLst/>
+                <a:latin typeface="Courier New" panose="02070309020205020404" pitchFamily="49" charset="0"/>
+                <a:ea typeface="標楷體" panose="03000509000000000000" pitchFamily="65" charset="-120"/>
+              </a:rPr>
+              <a:t>引擎知道要去哪找</a:t>
+            </a:r>
+            <a:r>
+              <a:rPr lang="en-US" altLang="zh-TW" sz="1200" kern="100" dirty="0">
+                <a:effectLst/>
+                <a:latin typeface="Courier New" panose="02070309020205020404" pitchFamily="49" charset="0"/>
+                <a:ea typeface="標楷體" panose="03000509000000000000" pitchFamily="65" charset="-120"/>
+              </a:rPr>
+              <a:t>static</a:t>
+            </a:r>
+            <a:r>
+              <a:rPr lang="zh-TW" altLang="en-US" sz="1200" kern="100" dirty="0">
+                <a:effectLst/>
+                <a:latin typeface="Courier New" panose="02070309020205020404" pitchFamily="49" charset="0"/>
+                <a:ea typeface="標楷體" panose="03000509000000000000" pitchFamily="65" charset="-120"/>
+              </a:rPr>
+              <a:t>的檔案，也就是在</a:t>
+            </a:r>
+            <a:r>
+              <a:rPr lang="en-US" altLang="zh-TW" dirty="0"/>
+              <a:t>{% load</a:t>
+            </a:r>
+            <a:r>
+              <a:rPr lang="zh-TW" altLang="en-US" dirty="0"/>
+              <a:t> </a:t>
+            </a:r>
+            <a:r>
+              <a:rPr lang="en-US" altLang="zh-TW" dirty="0"/>
+              <a:t>static %}</a:t>
+            </a:r>
+            <a:r>
+              <a:rPr lang="zh-TW" altLang="en-US" dirty="0"/>
+              <a:t>之內會用到，另外其他套件的</a:t>
+            </a:r>
+            <a:r>
+              <a:rPr lang="en-US" altLang="zh-TW" dirty="0"/>
+              <a:t>static file</a:t>
+            </a:r>
+            <a:r>
+              <a:rPr lang="zh-TW" altLang="en-US" dirty="0"/>
+              <a:t>也會一起</a:t>
+            </a:r>
+            <a:r>
+              <a:rPr lang="en-US" altLang="zh-TW" dirty="0"/>
+              <a:t>copy</a:t>
+            </a:r>
+            <a:r>
+              <a:rPr lang="zh-TW" altLang="en-US" dirty="0"/>
+              <a:t>進來，不會只有我們建立的</a:t>
+            </a:r>
+            <a:r>
+              <a:rPr lang="en-US" altLang="zh-TW" dirty="0"/>
+              <a:t>static files</a:t>
+            </a:r>
+          </a:p>
+          <a:p>
+            <a:r>
+              <a:rPr lang="en-US" altLang="zh-TW" dirty="0"/>
+              <a:t>python manage.py </a:t>
             </a:r>
             <a:r>
               <a:rPr lang="en-US" altLang="zh-TW" dirty="0" err="1"/>
               <a:t>collectstatic</a:t>
             </a:r>
-            <a:r>
-              <a:rPr lang="zh-TW" altLang="en-US" dirty="0"/>
-              <a:t>的指令</a:t>
-            </a:r>
-            <a:r>
-              <a:rPr lang="en-US" altLang="zh-TW" dirty="0"/>
-              <a:t>,</a:t>
-            </a:r>
-            <a:r>
-              <a:rPr lang="zh-TW" altLang="en-US" dirty="0"/>
-              <a:t>用來把靜態檔案從</a:t>
-            </a:r>
-            <a:r>
-              <a:rPr lang="en-US" altLang="zh-TW" dirty="0"/>
-              <a:t>static</a:t>
-            </a:r>
-            <a:r>
-              <a:rPr lang="zh-TW" altLang="en-US" dirty="0"/>
-              <a:t>的</a:t>
-            </a:r>
-          </a:p>
-          <a:p>
-            <a:r>
-              <a:rPr lang="zh-TW" altLang="en-US" dirty="0"/>
-              <a:t>資料夾中複製一份到</a:t>
-            </a:r>
-            <a:r>
-              <a:rPr lang="en-US" altLang="zh-TW" dirty="0" err="1"/>
-              <a:t>staticfles</a:t>
-            </a:r>
-            <a:r>
-              <a:rPr lang="zh-TW" altLang="en-US" dirty="0"/>
-              <a:t>資料夾中</a:t>
-            </a:r>
-            <a:r>
-              <a:rPr lang="en-US" altLang="zh-TW" dirty="0"/>
-              <a:t>,</a:t>
-            </a:r>
-          </a:p>
-          <a:p>
-            <a:pPr marL="0" marR="0" lvl="0" indent="0" algn="l" defTabSz="914400" rtl="0" eaLnBrk="1" fontAlgn="auto" latinLnBrk="0" hangingPunct="1">
-              <a:lnSpc>
-                <a:spcPct val="100000"/>
-              </a:lnSpc>
-              <a:spcBef>
-                <a:spcPts val="0"/>
-              </a:spcBef>
-              <a:spcAft>
-                <a:spcPts val="0"/>
-              </a:spcAft>
-              <a:buClrTx/>
-              <a:buSzTx/>
-              <a:buFontTx/>
-              <a:buNone/>
-              <a:tabLst/>
-              <a:defRPr/>
-            </a:pPr>
-            <a:r>
-              <a:rPr lang="en-US" altLang="zh-TW" dirty="0"/>
-              <a:t>python manage.py </a:t>
-            </a:r>
-            <a:r>
-              <a:rPr lang="en-US" altLang="zh-TW" dirty="0" err="1"/>
-              <a:t>collectstatic</a:t>
-            </a:r>
-            <a:endParaRPr lang="zh-TW" altLang="en-US" dirty="0"/>
-          </a:p>
-          <a:p>
+            <a:endParaRPr lang="en-US" altLang="zh-TW" dirty="0"/>
+          </a:p>
+          <a:p>
+            <a:r>
+              <a:rPr lang="en-US" altLang="zh-TW" dirty="0"/>
+              <a:t>http://127.0.0.1:8000/static/images/logo.png</a:t>
+            </a:r>
             <a:endParaRPr lang="zh-TW" altLang="en-US" dirty="0"/>
           </a:p>
         </p:txBody>
@@ -4961,7 +4977,7 @@
             <a:fld id="{027FE99C-3BAC-4305-ABBB-3890AB1B4510}" type="slidenum">
               <a:rPr lang="zh-TW" altLang="en-US" smtClean="0"/>
               <a:pPr/>
-              <a:t>41</a:t>
+              <a:t>40</a:t>
             </a:fld>
             <a:endParaRPr lang="zh-TW" altLang="en-US"/>
           </a:p>
@@ -4970,7 +4986,7 @@
     </p:spTree>
     <p:extLst>
       <p:ext uri="{BB962C8B-B14F-4D97-AF65-F5344CB8AC3E}">
-        <p14:creationId xmlns:p14="http://schemas.microsoft.com/office/powerpoint/2010/main" val="3123814273"/>
+        <p14:creationId xmlns:p14="http://schemas.microsoft.com/office/powerpoint/2010/main" val="1781074241"/>
       </p:ext>
     </p:extLst>
   </p:cSld>
@@ -5025,34 +5041,85 @@
           <a:lstStyle/>
           <a:p>
             <a:r>
-              <a:rPr lang="en-US" altLang="zh-TW" dirty="0"/>
-              <a:t>python manage.py </a:t>
+              <a:rPr lang="zh-TW" altLang="en-US" dirty="0"/>
+              <a:t>上述的設定完成之後</a:t>
+            </a:r>
+            <a:r>
+              <a:rPr lang="en-US" altLang="zh-TW" dirty="0"/>
+              <a:t>,</a:t>
+            </a:r>
+            <a:r>
+              <a:rPr lang="zh-TW" altLang="en-US" dirty="0"/>
+              <a:t>需要再執行</a:t>
             </a:r>
             <a:r>
               <a:rPr lang="en-US" altLang="zh-TW" dirty="0" err="1"/>
               <a:t>collectstatic</a:t>
             </a:r>
-            <a:endParaRPr lang="en-US" altLang="zh-TW" dirty="0"/>
-          </a:p>
-          <a:p>
             <a:r>
               <a:rPr lang="zh-TW" altLang="en-US" dirty="0"/>
-              <a:t>執行完上面指令後，就可直接用下面網址形式</a:t>
-            </a:r>
-            <a:r>
-              <a:rPr lang="en-US" altLang="zh-TW" dirty="0"/>
-              <a:t>load</a:t>
+              <a:t>的指令</a:t>
+            </a:r>
+            <a:r>
+              <a:rPr lang="en-US" altLang="zh-TW" dirty="0"/>
+              <a:t>,</a:t>
             </a:r>
             <a:r>
               <a:rPr lang="zh-TW" altLang="en-US" dirty="0"/>
-              <a:t>靜態檔案</a:t>
-            </a:r>
-            <a:endParaRPr lang="en-US" altLang="zh-TW" dirty="0"/>
-          </a:p>
-          <a:p>
-            <a:r>
-              <a:rPr lang="en-US" altLang="zh-TW" dirty="0"/>
-              <a:t>http://127.0.0.1:8000/static/images/logo.png</a:t>
+              <a:t>用來把靜態檔案從</a:t>
+            </a:r>
+            <a:r>
+              <a:rPr lang="en-US" altLang="zh-TW" dirty="0"/>
+              <a:t>static</a:t>
+            </a:r>
+            <a:r>
+              <a:rPr lang="zh-TW" altLang="en-US" dirty="0"/>
+              <a:t>的</a:t>
+            </a:r>
+          </a:p>
+          <a:p>
+            <a:r>
+              <a:rPr lang="zh-TW" altLang="en-US" dirty="0"/>
+              <a:t>資料夾中複製一份到</a:t>
+            </a:r>
+            <a:r>
+              <a:rPr lang="en-US" altLang="zh-TW" dirty="0" err="1"/>
+              <a:t>staticfles</a:t>
+            </a:r>
+            <a:r>
+              <a:rPr lang="zh-TW" altLang="en-US" dirty="0"/>
+              <a:t>資料夾中</a:t>
+            </a:r>
+            <a:r>
+              <a:rPr lang="en-US" altLang="zh-TW" dirty="0"/>
+              <a:t>,</a:t>
+            </a:r>
+          </a:p>
+          <a:p>
+            <a:pPr marL="0" marR="0" lvl="0" indent="0" algn="l" defTabSz="914400" rtl="0" eaLnBrk="1" fontAlgn="auto" latinLnBrk="0" hangingPunct="1">
+              <a:lnSpc>
+                <a:spcPct val="100000"/>
+              </a:lnSpc>
+              <a:spcBef>
+                <a:spcPts val="0"/>
+              </a:spcBef>
+              <a:spcAft>
+                <a:spcPts val="0"/>
+              </a:spcAft>
+              <a:buClrTx/>
+              <a:buSzTx/>
+              <a:buFontTx/>
+              <a:buNone/>
+              <a:tabLst/>
+              <a:defRPr/>
+            </a:pPr>
+            <a:r>
+              <a:rPr lang="en-US" altLang="zh-TW" dirty="0"/>
+              <a:t>python manage.py </a:t>
+            </a:r>
+            <a:r>
+              <a:rPr lang="en-US" altLang="zh-TW" dirty="0" err="1"/>
+              <a:t>collectstatic</a:t>
             </a:r>
             <a:endParaRPr lang="zh-TW" altLang="en-US" dirty="0"/>
           </a:p>
@@ -5079,7 +5146,7 @@
             <a:fld id="{027FE99C-3BAC-4305-ABBB-3890AB1B4510}" type="slidenum">
               <a:rPr lang="zh-TW" altLang="en-US" smtClean="0"/>
               <a:pPr/>
-              <a:t>42</a:t>
+              <a:t>41</a:t>
             </a:fld>
             <a:endParaRPr lang="zh-TW" altLang="en-US"/>
           </a:p>
@@ -5088,7 +5155,7 @@
     </p:spTree>
     <p:extLst>
       <p:ext uri="{BB962C8B-B14F-4D97-AF65-F5344CB8AC3E}">
-        <p14:creationId xmlns:p14="http://schemas.microsoft.com/office/powerpoint/2010/main" val="1110185384"/>
+        <p14:creationId xmlns:p14="http://schemas.microsoft.com/office/powerpoint/2010/main" val="3123814273"/>
       </p:ext>
     </p:extLst>
   </p:cSld>
@@ -5143,9 +5210,39 @@
           <a:lstStyle/>
           <a:p>
             <a:r>
+              <a:rPr lang="en-US" altLang="zh-TW" dirty="0"/>
+              <a:t>python manage.py </a:t>
+            </a:r>
+            <a:r>
+              <a:rPr lang="en-US" altLang="zh-TW" dirty="0" err="1"/>
+              <a:t>collectstatic</a:t>
+            </a:r>
+            <a:endParaRPr lang="en-US" altLang="zh-TW" dirty="0"/>
+          </a:p>
+          <a:p>
+            <a:r>
               <a:rPr lang="zh-TW" altLang="en-US" dirty="0"/>
-              <a:t>共通的部份可統一管理，也不會忘了改某一個檔案</a:t>
-            </a:r>
+              <a:t>執行完上面指令後，就可直接用下面網址形式</a:t>
+            </a:r>
+            <a:r>
+              <a:rPr lang="en-US" altLang="zh-TW" dirty="0"/>
+              <a:t>load</a:t>
+            </a:r>
+            <a:r>
+              <a:rPr lang="zh-TW" altLang="en-US" dirty="0"/>
+              <a:t>靜態檔案</a:t>
+            </a:r>
+            <a:endParaRPr lang="en-US" altLang="zh-TW" dirty="0"/>
+          </a:p>
+          <a:p>
+            <a:r>
+              <a:rPr lang="en-US" altLang="zh-TW" dirty="0"/>
+              <a:t>http://127.0.0.1:8000/static/images/logo.png</a:t>
+            </a:r>
+            <a:endParaRPr lang="zh-TW" altLang="en-US" dirty="0"/>
+          </a:p>
+          <a:p>
+            <a:endParaRPr lang="zh-TW" altLang="en-US" dirty="0"/>
           </a:p>
         </p:txBody>
       </p:sp>
@@ -5167,7 +5264,7 @@
             <a:fld id="{027FE99C-3BAC-4305-ABBB-3890AB1B4510}" type="slidenum">
               <a:rPr lang="zh-TW" altLang="en-US" smtClean="0"/>
               <a:pPr/>
-              <a:t>45</a:t>
+              <a:t>42</a:t>
             </a:fld>
             <a:endParaRPr lang="zh-TW" altLang="en-US"/>
           </a:p>
@@ -5176,7 +5273,7 @@
     </p:spTree>
     <p:extLst>
       <p:ext uri="{BB962C8B-B14F-4D97-AF65-F5344CB8AC3E}">
-        <p14:creationId xmlns:p14="http://schemas.microsoft.com/office/powerpoint/2010/main" val="1567046982"/>
+        <p14:creationId xmlns:p14="http://schemas.microsoft.com/office/powerpoint/2010/main" val="1110185384"/>
       </p:ext>
     </p:extLst>
   </p:cSld>
@@ -5232,147 +5329,7 @@
           <a:p>
             <a:r>
               <a:rPr lang="zh-TW" altLang="en-US" dirty="0"/>
-              <a:t>不同的頁面中還必須要有一致的頁首標頭</a:t>
-            </a:r>
-            <a:r>
-              <a:rPr lang="en-US" altLang="zh-TW" dirty="0"/>
-              <a:t>(header)</a:t>
-            </a:r>
-            <a:r>
-              <a:rPr lang="zh-TW" altLang="en-US" dirty="0"/>
-              <a:t>以及頁腳</a:t>
-            </a:r>
-            <a:r>
-              <a:rPr lang="en-US" altLang="zh-TW" dirty="0"/>
-              <a:t>(</a:t>
-            </a:r>
-            <a:r>
-              <a:rPr lang="zh-TW" altLang="en-US" dirty="0"/>
-              <a:t>或稱頁尾</a:t>
-            </a:r>
-            <a:r>
-              <a:rPr lang="en-US" altLang="zh-TW" dirty="0"/>
-              <a:t>,footer)</a:t>
-            </a:r>
-            <a:r>
-              <a:rPr lang="zh-TW" altLang="en-US" dirty="0"/>
-              <a:t>才行。</a:t>
-            </a:r>
-          </a:p>
-          <a:p>
-            <a:r>
-              <a:rPr lang="zh-TW" altLang="en-US" dirty="0"/>
-              <a:t>內容的部份可能還會切出許多的欄位。</a:t>
-            </a:r>
-            <a:r>
-              <a:rPr lang="en-US" altLang="zh-TW" dirty="0"/>
-              <a:t>HTML</a:t>
-            </a:r>
-            <a:r>
-              <a:rPr lang="zh-TW" altLang="en-US" dirty="0"/>
-              <a:t>檔案的最開頭</a:t>
-            </a:r>
-            <a:r>
-              <a:rPr lang="en-US" altLang="zh-TW" dirty="0"/>
-              <a:t>,</a:t>
-            </a:r>
-            <a:r>
-              <a:rPr lang="zh-TW" altLang="en-US" dirty="0"/>
-              <a:t>一定要有</a:t>
-            </a:r>
-            <a:r>
-              <a:rPr lang="en-US" altLang="zh-TW" dirty="0"/>
-              <a:t>&lt;</a:t>
-            </a:r>
-            <a:r>
-              <a:rPr lang="en-US" altLang="zh-TW" dirty="0" err="1"/>
-              <a:t>IDOCTYPEhtml</a:t>
-            </a:r>
-            <a:r>
-              <a:rPr lang="en-US" altLang="zh-TW" dirty="0"/>
-              <a:t>&gt;</a:t>
-            </a:r>
-            <a:r>
-              <a:rPr lang="zh-TW" altLang="en-US" dirty="0"/>
-              <a:t>、</a:t>
-            </a:r>
-          </a:p>
-          <a:p>
-            <a:r>
-              <a:rPr lang="en-US" altLang="zh-TW" dirty="0"/>
-              <a:t>&lt;head&gt;&lt;meta charset='utf-8"&gt;</a:t>
-            </a:r>
-            <a:r>
-              <a:rPr lang="zh-TW" altLang="en-US" dirty="0"/>
-              <a:t>等等一些制式的設定</a:t>
-            </a:r>
-            <a:r>
-              <a:rPr lang="en-US" altLang="zh-TW" dirty="0"/>
-              <a:t>,</a:t>
-            </a:r>
-            <a:r>
-              <a:rPr lang="zh-TW" altLang="en-US" dirty="0"/>
-              <a:t>此外</a:t>
-            </a:r>
-            <a:r>
-              <a:rPr lang="en-US" altLang="zh-TW" dirty="0"/>
-              <a:t>,</a:t>
-            </a:r>
-            <a:r>
-              <a:rPr lang="zh-TW" altLang="en-US" dirty="0"/>
-              <a:t>如果套用現有的程式庫的</a:t>
-            </a:r>
-          </a:p>
-          <a:p>
-            <a:r>
-              <a:rPr lang="zh-TW" altLang="en-US" dirty="0"/>
-              <a:t>話</a:t>
-            </a:r>
-            <a:r>
-              <a:rPr lang="en-US" altLang="zh-TW" dirty="0"/>
-              <a:t>,</a:t>
-            </a:r>
-            <a:r>
-              <a:rPr lang="zh-TW" altLang="en-US" dirty="0"/>
-              <a:t>還有之前一大串的 </a:t>
-            </a:r>
-            <a:r>
-              <a:rPr lang="en-US" altLang="zh-TW" dirty="0"/>
-              <a:t>Bootstrap </a:t>
-            </a:r>
-            <a:r>
-              <a:rPr lang="zh-TW" altLang="en-US" dirty="0"/>
-              <a:t>和</a:t>
-            </a:r>
-            <a:r>
-              <a:rPr lang="en-US" altLang="zh-TW" dirty="0"/>
-              <a:t>jQuery</a:t>
-            </a:r>
-            <a:r>
-              <a:rPr lang="zh-TW" altLang="en-US" dirty="0"/>
-              <a:t>等</a:t>
-            </a:r>
-            <a:r>
-              <a:rPr lang="en-US" altLang="zh-TW" dirty="0"/>
-              <a:t>CDN</a:t>
-            </a:r>
-            <a:r>
-              <a:rPr lang="zh-TW" altLang="en-US" dirty="0"/>
-              <a:t>連結等等</a:t>
-            </a:r>
-            <a:r>
-              <a:rPr lang="en-US" altLang="zh-TW" dirty="0"/>
-              <a:t>,</a:t>
-            </a:r>
-            <a:r>
-              <a:rPr lang="zh-TW" altLang="en-US" dirty="0"/>
-              <a:t>這些也希望能夠出現一次</a:t>
-            </a:r>
-          </a:p>
-          <a:p>
-            <a:r>
-              <a:rPr lang="zh-TW" altLang="en-US" dirty="0"/>
-              <a:t>就好。</a:t>
+              <a:t>共通的部份可統一管理，也不會忘了改某一個檔案</a:t>
             </a:r>
           </a:p>
         </p:txBody>
@@ -5395,7 +5352,7 @@
             <a:fld id="{027FE99C-3BAC-4305-ABBB-3890AB1B4510}" type="slidenum">
               <a:rPr lang="zh-TW" altLang="en-US" smtClean="0"/>
               <a:pPr/>
-              <a:t>46</a:t>
+              <a:t>45</a:t>
             </a:fld>
             <a:endParaRPr lang="zh-TW" altLang="en-US"/>
           </a:p>
@@ -5404,7 +5361,7 @@
     </p:spTree>
     <p:extLst>
       <p:ext uri="{BB962C8B-B14F-4D97-AF65-F5344CB8AC3E}">
-        <p14:creationId xmlns:p14="http://schemas.microsoft.com/office/powerpoint/2010/main" val="332601790"/>
+        <p14:creationId xmlns:p14="http://schemas.microsoft.com/office/powerpoint/2010/main" val="1567046982"/>
       </p:ext>
     </p:extLst>
   </p:cSld>
@@ -5458,173 +5415,150 @@
           <a:bodyPr/>
           <a:lstStyle/>
           <a:p>
-            <a:pPr marL="0" marR="0" lvl="0" indent="0" algn="l" defTabSz="914400" rtl="0" eaLnBrk="1" fontAlgn="auto" latinLnBrk="0" hangingPunct="1">
-              <a:lnSpc>
-                <a:spcPct val="100000"/>
-              </a:lnSpc>
-              <a:spcBef>
-                <a:spcPts val="0"/>
-              </a:spcBef>
-              <a:spcAft>
-                <a:spcPts val="0"/>
-              </a:spcAft>
-              <a:buClrTx/>
-              <a:buSzTx/>
-              <a:buFontTx/>
-              <a:buNone/>
-              <a:tabLst/>
-              <a:defRPr/>
-            </a:pPr>
-            <a:r>
-              <a:rPr lang="en-US" altLang="zh-TW" dirty="0">
-                <a:solidFill>
-                  <a:srgbClr val="FF0000"/>
-                </a:solidFill>
-              </a:rPr>
-              <a:t>{% block menu %}{% </a:t>
-            </a:r>
-            <a:r>
-              <a:rPr lang="en-US" altLang="zh-TW" dirty="0" err="1">
-                <a:solidFill>
-                  <a:srgbClr val="FF0000"/>
-                </a:solidFill>
-              </a:rPr>
-              <a:t>endblock</a:t>
-            </a:r>
-            <a:r>
-              <a:rPr lang="en-US" altLang="zh-TW" dirty="0">
-                <a:solidFill>
-                  <a:srgbClr val="FF0000"/>
-                </a:solidFill>
-              </a:rPr>
-              <a:t> %}</a:t>
-            </a:r>
-            <a:endParaRPr lang="en-US" altLang="zh-TW" b="0" dirty="0">
-              <a:solidFill>
-                <a:srgbClr val="808080"/>
-              </a:solidFill>
-              <a:effectLst/>
-              <a:latin typeface="Consolas" panose="020B0609020204030204" pitchFamily="49" charset="0"/>
-            </a:endParaRPr>
-          </a:p>
-          <a:p>
-            <a:pPr marL="0" marR="0" lvl="0" indent="0" algn="l" defTabSz="914400" rtl="0" eaLnBrk="1" fontAlgn="auto" latinLnBrk="0" hangingPunct="1">
-              <a:lnSpc>
-                <a:spcPct val="100000"/>
-              </a:lnSpc>
-              <a:spcBef>
-                <a:spcPts val="0"/>
-              </a:spcBef>
-              <a:spcAft>
-                <a:spcPts val="0"/>
-              </a:spcAft>
-              <a:buClrTx/>
-              <a:buSzTx/>
-              <a:buFontTx/>
-              <a:buNone/>
-              <a:tabLst/>
-              <a:defRPr/>
-            </a:pPr>
-            <a:r>
-              <a:rPr lang="zh-TW" altLang="en-US" b="0" dirty="0">
-                <a:solidFill>
-                  <a:srgbClr val="808080"/>
-                </a:solidFill>
-                <a:effectLst/>
-                <a:latin typeface="Consolas" panose="020B0609020204030204" pitchFamily="49" charset="0"/>
-              </a:rPr>
-              <a:t>從</a:t>
-            </a:r>
-            <a:r>
-              <a:rPr lang="en-US" altLang="zh-TW" b="0" dirty="0">
-                <a:solidFill>
-                  <a:srgbClr val="808080"/>
-                </a:solidFill>
-                <a:effectLst/>
-                <a:latin typeface="Consolas" panose="020B0609020204030204" pitchFamily="49" charset="0"/>
-              </a:rPr>
+            <a:r>
+              <a:rPr lang="zh-TW" altLang="en-US" dirty="0"/>
+              <a:t>不同的頁面中還必須要有一致的頁首標頭</a:t>
+            </a:r>
+            <a:r>
+              <a:rPr lang="en-US" altLang="zh-TW" dirty="0"/>
+              <a:t>(header)</a:t>
+            </a:r>
+            <a:r>
+              <a:rPr lang="zh-TW" altLang="en-US" dirty="0"/>
+              <a:t>以及頁腳</a:t>
+            </a:r>
+            <a:r>
+              <a:rPr lang="en-US" altLang="zh-TW" dirty="0"/>
+              <a:t>(</a:t>
+            </a:r>
+            <a:r>
+              <a:rPr lang="zh-TW" altLang="en-US" dirty="0"/>
+              <a:t>或稱頁尾</a:t>
+            </a:r>
+            <a:r>
+              <a:rPr lang="en-US" altLang="zh-TW" dirty="0"/>
+              <a:t>,footer)</a:t>
+            </a:r>
+            <a:r>
+              <a:rPr lang="zh-TW" altLang="en-US" dirty="0"/>
+              <a:t>才行。</a:t>
+            </a:r>
+          </a:p>
+          <a:p>
+            <a:r>
+              <a:rPr lang="zh-TW" altLang="en-US" dirty="0"/>
+              <a:t>內容的部份可能還會切出許多的欄位。</a:t>
+            </a:r>
+            <a:r>
+              <a:rPr lang="en-US" altLang="zh-TW" dirty="0"/>
+              <a:t>HTML</a:t>
+            </a:r>
+            <a:r>
+              <a:rPr lang="zh-TW" altLang="en-US" dirty="0"/>
+              <a:t>檔案的最開頭</a:t>
+            </a:r>
+            <a:r>
+              <a:rPr lang="en-US" altLang="zh-TW" dirty="0"/>
+              <a:t>,</a:t>
+            </a:r>
+            <a:r>
+              <a:rPr lang="zh-TW" altLang="en-US" dirty="0"/>
+              <a:t>一定要有</a:t>
+            </a:r>
+            <a:r>
+              <a:rPr lang="en-US" altLang="zh-TW" dirty="0"/>
               <a:t>&lt;</a:t>
             </a:r>
             <a:r>
-              <a:rPr lang="en-US" altLang="zh-TW" b="0" dirty="0">
-                <a:solidFill>
-                  <a:srgbClr val="569CD6"/>
-                </a:solidFill>
-                <a:effectLst/>
-                <a:latin typeface="Consolas" panose="020B0609020204030204" pitchFamily="49" charset="0"/>
-              </a:rPr>
-              <a:t>div</a:t>
-            </a:r>
-            <a:r>
-              <a:rPr lang="en-US" altLang="zh-TW" b="0" dirty="0">
-                <a:solidFill>
-                  <a:srgbClr val="CCCCCC"/>
-                </a:solidFill>
-                <a:effectLst/>
-                <a:latin typeface="Consolas" panose="020B0609020204030204" pitchFamily="49" charset="0"/>
-              </a:rPr>
-              <a:t> </a:t>
-            </a:r>
-            <a:r>
-              <a:rPr lang="en-US" altLang="zh-TW" b="0" dirty="0">
-                <a:solidFill>
-                  <a:srgbClr val="9CDCFE"/>
-                </a:solidFill>
-                <a:effectLst/>
-                <a:latin typeface="Consolas" panose="020B0609020204030204" pitchFamily="49" charset="0"/>
-              </a:rPr>
-              <a:t>class</a:t>
-            </a:r>
-            <a:r>
-              <a:rPr lang="en-US" altLang="zh-TW" b="0" dirty="0">
-                <a:solidFill>
-                  <a:srgbClr val="CCCCCC"/>
-                </a:solidFill>
-                <a:effectLst/>
-                <a:latin typeface="Consolas" panose="020B0609020204030204" pitchFamily="49" charset="0"/>
-              </a:rPr>
-              <a:t>=</a:t>
-            </a:r>
-            <a:r>
-              <a:rPr lang="en-US" altLang="zh-TW" b="0" dirty="0">
-                <a:solidFill>
-                  <a:srgbClr val="CE9178"/>
-                </a:solidFill>
-                <a:effectLst/>
-                <a:latin typeface="Consolas" panose="020B0609020204030204" pitchFamily="49" charset="0"/>
-              </a:rPr>
-              <a:t>“navbar-nav”</a:t>
-            </a:r>
-            <a:r>
-              <a:rPr lang="en-US" altLang="zh-TW" b="0" dirty="0">
-                <a:solidFill>
-                  <a:srgbClr val="808080"/>
-                </a:solidFill>
-                <a:effectLst/>
-                <a:latin typeface="Consolas" panose="020B0609020204030204" pitchFamily="49" charset="0"/>
-              </a:rPr>
+              <a:rPr lang="en-US" altLang="zh-TW" dirty="0" err="1"/>
+              <a:t>IDOCTYPEhtml</a:t>
+            </a:r>
+            <a:r>
+              <a:rPr lang="en-US" altLang="zh-TW" dirty="0"/>
               <a:t>&gt;</a:t>
             </a:r>
             <a:r>
-              <a:rPr lang="zh-TW" altLang="en-US" b="0" dirty="0">
-                <a:solidFill>
-                  <a:srgbClr val="808080"/>
-                </a:solidFill>
-                <a:effectLst/>
-                <a:latin typeface="Consolas" panose="020B0609020204030204" pitchFamily="49" charset="0"/>
-              </a:rPr>
-              <a:t>的上面開始切</a:t>
-            </a:r>
-            <a:endParaRPr lang="en-US" altLang="zh-TW" b="0" dirty="0">
-              <a:solidFill>
-                <a:srgbClr val="CCCCCC"/>
-              </a:solidFill>
-              <a:effectLst/>
-              <a:latin typeface="Consolas" panose="020B0609020204030204" pitchFamily="49" charset="0"/>
-            </a:endParaRPr>
-          </a:p>
-          <a:p>
-            <a:endParaRPr lang="zh-TW" altLang="en-US" dirty="0"/>
+              <a:rPr lang="zh-TW" altLang="en-US" dirty="0"/>
+              <a:t>、</a:t>
+            </a:r>
+          </a:p>
+          <a:p>
+            <a:r>
+              <a:rPr lang="en-US" altLang="zh-TW" dirty="0"/>
+              <a:t>&lt;head&gt;&lt;meta charset='utf-8"&gt;</a:t>
+            </a:r>
+            <a:r>
+              <a:rPr lang="zh-TW" altLang="en-US" dirty="0"/>
+              <a:t>等等一些制式的設定</a:t>
+            </a:r>
+            <a:r>
+              <a:rPr lang="en-US" altLang="zh-TW" dirty="0"/>
+              <a:t>,</a:t>
+            </a:r>
+            <a:r>
+              <a:rPr lang="zh-TW" altLang="en-US" dirty="0"/>
+              <a:t>此外</a:t>
+            </a:r>
+            <a:r>
+              <a:rPr lang="en-US" altLang="zh-TW" dirty="0"/>
+              <a:t>,</a:t>
+            </a:r>
+            <a:r>
+              <a:rPr lang="zh-TW" altLang="en-US" dirty="0"/>
+              <a:t>如果套用現有的程式庫的</a:t>
+            </a:r>
+          </a:p>
+          <a:p>
+            <a:r>
+              <a:rPr lang="zh-TW" altLang="en-US" dirty="0"/>
+              <a:t>話</a:t>
+            </a:r>
+            <a:r>
+              <a:rPr lang="en-US" altLang="zh-TW" dirty="0"/>
+              <a:t>,</a:t>
+            </a:r>
+            <a:r>
+              <a:rPr lang="zh-TW" altLang="en-US" dirty="0"/>
+              <a:t>還有之前一大串的 </a:t>
+            </a:r>
+            <a:r>
+              <a:rPr lang="en-US" altLang="zh-TW" dirty="0"/>
+              <a:t>Bootstrap </a:t>
+            </a:r>
+            <a:r>
+              <a:rPr lang="zh-TW" altLang="en-US" dirty="0"/>
+              <a:t>和</a:t>
+            </a:r>
+            <a:r>
+              <a:rPr lang="en-US" altLang="zh-TW" dirty="0"/>
+              <a:t>jQuery</a:t>
+            </a:r>
+            <a:r>
+              <a:rPr lang="zh-TW" altLang="en-US" dirty="0"/>
+              <a:t>等</a:t>
+            </a:r>
+            <a:r>
+              <a:rPr lang="en-US" altLang="zh-TW" dirty="0"/>
+              <a:t>CDN</a:t>
+            </a:r>
+            <a:r>
+              <a:rPr lang="zh-TW" altLang="en-US" dirty="0"/>
+              <a:t>連結等等</a:t>
+            </a:r>
+            <a:r>
+              <a:rPr lang="en-US" altLang="zh-TW" dirty="0"/>
+              <a:t>,</a:t>
+            </a:r>
+            <a:r>
+              <a:rPr lang="zh-TW" altLang="en-US" dirty="0"/>
+              <a:t>這些也希望能夠出現一次</a:t>
+            </a:r>
+          </a:p>
+          <a:p>
+            <a:r>
+              <a:rPr lang="zh-TW" altLang="en-US" dirty="0"/>
+              <a:t>就好。</a:t>
+            </a:r>
           </a:p>
         </p:txBody>
       </p:sp>
@@ -5646,7 +5580,7 @@
             <a:fld id="{027FE99C-3BAC-4305-ABBB-3890AB1B4510}" type="slidenum">
               <a:rPr lang="zh-TW" altLang="en-US" smtClean="0"/>
               <a:pPr/>
-              <a:t>49</a:t>
+              <a:t>46</a:t>
             </a:fld>
             <a:endParaRPr lang="zh-TW" altLang="en-US"/>
           </a:p>
@@ -5655,7 +5589,7 @@
     </p:spTree>
     <p:extLst>
       <p:ext uri="{BB962C8B-B14F-4D97-AF65-F5344CB8AC3E}">
-        <p14:creationId xmlns:p14="http://schemas.microsoft.com/office/powerpoint/2010/main" val="626067739"/>
+        <p14:creationId xmlns:p14="http://schemas.microsoft.com/office/powerpoint/2010/main" val="332601790"/>
       </p:ext>
     </p:extLst>
   </p:cSld>
@@ -5709,32 +5643,6 @@
           <a:bodyPr/>
           <a:lstStyle/>
           <a:p>
-            <a:r>
-              <a:rPr lang="en-US" altLang="zh-TW" sz="1200" kern="100" dirty="0">
-                <a:effectLst/>
-                <a:latin typeface="Courier New" panose="02070309020205020404" pitchFamily="49" charset="0"/>
-                <a:ea typeface="標楷體" panose="03000509000000000000" pitchFamily="65" charset="-120"/>
-              </a:rPr>
-              <a:t>&lt;div class='</a:t>
-            </a:r>
-            <a:r>
-              <a:rPr lang="en-US" altLang="zh-TW" sz="1200" kern="100" dirty="0" err="1">
-                <a:effectLst/>
-                <a:latin typeface="Courier New" panose="02070309020205020404" pitchFamily="49" charset="0"/>
-                <a:ea typeface="標楷體" panose="03000509000000000000" pitchFamily="65" charset="-120"/>
-              </a:rPr>
-              <a:t>conatiner</a:t>
-            </a:r>
-            <a:r>
-              <a:rPr lang="en-US" altLang="zh-TW" sz="1200" kern="100" dirty="0">
-                <a:effectLst/>
-                <a:latin typeface="Courier New" panose="02070309020205020404" pitchFamily="49" charset="0"/>
-                <a:ea typeface="標楷體" panose="03000509000000000000" pitchFamily="65" charset="-120"/>
-              </a:rPr>
-              <a:t>’&gt;</a:t>
-            </a:r>
-          </a:p>
-          <a:p>
             <a:pPr marL="0" marR="0" lvl="0" indent="0" algn="l" defTabSz="914400" rtl="0" eaLnBrk="1" fontAlgn="auto" latinLnBrk="0" hangingPunct="1">
               <a:lnSpc>
                 <a:spcPct val="100000"/>
@@ -5753,6 +5661,66 @@
               <a:defRPr/>
             </a:pPr>
             <a:r>
+              <a:rPr lang="en-US" altLang="zh-TW" dirty="0">
+                <a:solidFill>
+                  <a:srgbClr val="FF0000"/>
+                </a:solidFill>
+              </a:rPr>
+              <a:t>{% block menu %}{% </a:t>
+            </a:r>
+            <a:r>
+              <a:rPr lang="en-US" altLang="zh-TW" dirty="0" err="1">
+                <a:solidFill>
+                  <a:srgbClr val="FF0000"/>
+                </a:solidFill>
+              </a:rPr>
+              <a:t>endblock</a:t>
+            </a:r>
+            <a:r>
+              <a:rPr lang="en-US" altLang="zh-TW" dirty="0">
+                <a:solidFill>
+                  <a:srgbClr val="FF0000"/>
+                </a:solidFill>
+              </a:rPr>
+              <a:t> %}</a:t>
+            </a:r>
+            <a:endParaRPr lang="en-US" altLang="zh-TW" b="0" dirty="0">
+              <a:solidFill>
+                <a:srgbClr val="808080"/>
+              </a:solidFill>
+              <a:effectLst/>
+              <a:latin typeface="Consolas" panose="020B0609020204030204" pitchFamily="49" charset="0"/>
+            </a:endParaRPr>
+          </a:p>
+          <a:p>
+            <a:pPr marL="0" marR="0" lvl="0" indent="0" algn="l" defTabSz="914400" rtl="0" eaLnBrk="1" fontAlgn="auto" latinLnBrk="0" hangingPunct="1">
+              <a:lnSpc>
+                <a:spcPct val="100000"/>
+              </a:lnSpc>
+              <a:spcBef>
+                <a:spcPts val="0"/>
+              </a:spcBef>
+              <a:spcAft>
+                <a:spcPts val="0"/>
+              </a:spcAft>
+              <a:buClrTx/>
+              <a:buSzTx/>
+              <a:buFontTx/>
+              <a:buNone/>
+              <a:tabLst/>
+              <a:defRPr/>
+            </a:pPr>
+            <a:r>
+              <a:rPr lang="zh-TW" altLang="en-US" b="0" dirty="0">
+                <a:solidFill>
+                  <a:srgbClr val="808080"/>
+                </a:solidFill>
+                <a:effectLst/>
+                <a:latin typeface="Consolas" panose="020B0609020204030204" pitchFamily="49" charset="0"/>
+              </a:rPr>
+              <a:t>從</a:t>
+            </a:r>
+            <a:r>
               <a:rPr lang="en-US" altLang="zh-TW" b="0" dirty="0">
                 <a:solidFill>
                   <a:srgbClr val="808080"/>
@@ -5763,14 +5731,14 @@
               <a:t>&lt;</a:t>
             </a:r>
             <a:r>
-              <a:rPr lang="en-US" altLang="zh-TW" b="0" dirty="0" err="1">
+              <a:rPr lang="en-US" altLang="zh-TW" b="0" dirty="0">
                 <a:solidFill>
                   <a:srgbClr val="569CD6"/>
                 </a:solidFill>
                 <a:effectLst/>
                 <a:latin typeface="Consolas" panose="020B0609020204030204" pitchFamily="49" charset="0"/>
               </a:rPr>
-              <a:t>iframe</a:t>
+              <a:t>div</a:t>
             </a:r>
             <a:r>
               <a:rPr lang="en-US" altLang="zh-TW" b="0" dirty="0">
@@ -5790,7 +5758,7 @@
                 <a:effectLst/>
                 <a:latin typeface="Consolas" panose="020B0609020204030204" pitchFamily="49" charset="0"/>
               </a:rPr>
-              <a:t>width</a:t>
+              <a:t>class</a:t>
             </a:r>
             <a:r>
               <a:rPr lang="en-US" altLang="zh-TW" b="0" dirty="0">
@@ -5810,47 +5778,27 @@
                 <a:effectLst/>
                 <a:latin typeface="Consolas" panose="020B0609020204030204" pitchFamily="49" charset="0"/>
               </a:rPr>
-              <a:t>"560"</a:t>
+              <a:t>“navbar-nav”</a:t>
             </a:r>
             <a:r>
               <a:rPr lang="en-US" altLang="zh-TW" b="0" dirty="0">
                 <a:solidFill>
-                  <a:srgbClr val="CCCCCC"/>
+                  <a:srgbClr val="808080"/>
                 </a:solidFill>
                 <a:effectLst/>
                 <a:latin typeface="Consolas" panose="020B0609020204030204" pitchFamily="49" charset="0"/>
               </a:rPr>
-              <a:t> </a:t>
-            </a:r>
-            <a:r>
-              <a:rPr lang="en-US" altLang="zh-TW" b="0" dirty="0">
-                <a:solidFill>
-                  <a:srgbClr val="9CDCFE"/>
+              <a:t>&gt;</a:t>
+            </a:r>
+            <a:r>
+              <a:rPr lang="zh-TW" altLang="en-US" b="0" dirty="0">
+                <a:solidFill>
+                  <a:srgbClr val="808080"/>
                 </a:solidFill>
                 <a:effectLst/>
                 <a:latin typeface="Consolas" panose="020B0609020204030204" pitchFamily="49" charset="0"/>
               </a:rPr>
-              <a:t>height</a:t>
-            </a:r>
-            <a:r>
-              <a:rPr lang="en-US" altLang="zh-TW" b="0" dirty="0">
-                <a:solidFill>
-                  <a:srgbClr val="CCCCCC"/>
-                </a:solidFill>
-                <a:effectLst/>
-                <a:latin typeface="Consolas" panose="020B0609020204030204" pitchFamily="49" charset="0"/>
-              </a:rPr>
-              <a:t>=</a:t>
-            </a:r>
-            <a:r>
-              <a:rPr lang="en-US" altLang="zh-TW" b="0" dirty="0">
-                <a:solidFill>
-                  <a:srgbClr val="CE9178"/>
-                </a:solidFill>
-                <a:effectLst/>
-                <a:latin typeface="Consolas" panose="020B0609020204030204" pitchFamily="49" charset="0"/>
-              </a:rPr>
-              <a:t>"315"</a:t>
+              <a:t>的上面開始切</a:t>
             </a:r>
             <a:endParaRPr lang="en-US" altLang="zh-TW" b="0" dirty="0">
               <a:solidFill>
@@ -5883,7 +5831,7 @@
             <a:fld id="{027FE99C-3BAC-4305-ABBB-3890AB1B4510}" type="slidenum">
               <a:rPr lang="zh-TW" altLang="en-US" smtClean="0"/>
               <a:pPr/>
-              <a:t>50</a:t>
+              <a:t>49</a:t>
             </a:fld>
             <a:endParaRPr lang="zh-TW" altLang="en-US"/>
           </a:p>
@@ -5892,7 +5840,7 @@
     </p:spTree>
     <p:extLst>
       <p:ext uri="{BB962C8B-B14F-4D97-AF65-F5344CB8AC3E}">
-        <p14:creationId xmlns:p14="http://schemas.microsoft.com/office/powerpoint/2010/main" val="1949068779"/>
+        <p14:creationId xmlns:p14="http://schemas.microsoft.com/office/powerpoint/2010/main" val="626067739"/>
       </p:ext>
     </p:extLst>
   </p:cSld>
@@ -5947,37 +5895,157 @@
           <a:lstStyle/>
           <a:p>
             <a:r>
-              <a:rPr lang="zh-TW" altLang="en-US" dirty="0"/>
-              <a:t>原則：不同</a:t>
-            </a:r>
-            <a:r>
-              <a:rPr lang="en-US" altLang="zh-TW" dirty="0"/>
-              <a:t>block</a:t>
-            </a:r>
-            <a:r>
-              <a:rPr lang="zh-TW" altLang="en-US" dirty="0"/>
-              <a:t>之間不會有</a:t>
-            </a:r>
-            <a:r>
-              <a:rPr lang="en-US" altLang="zh-TW" dirty="0"/>
-              <a:t>html</a:t>
-            </a:r>
-            <a:r>
-              <a:rPr lang="zh-TW" altLang="en-US" dirty="0"/>
-              <a:t>元素，只有</a:t>
-            </a:r>
-            <a:r>
-              <a:rPr lang="en-US" altLang="zh-TW" dirty="0"/>
-              <a:t>block</a:t>
-            </a:r>
-            <a:r>
-              <a:rPr lang="zh-TW" altLang="en-US" dirty="0"/>
-              <a:t>內才有</a:t>
-            </a:r>
-            <a:r>
-              <a:rPr lang="en-US" altLang="zh-TW" dirty="0"/>
-              <a:t>html</a:t>
-            </a:r>
+              <a:rPr lang="en-US" altLang="zh-TW" sz="1200" kern="100" dirty="0">
+                <a:effectLst/>
+                <a:latin typeface="Courier New" panose="02070309020205020404" pitchFamily="49" charset="0"/>
+                <a:ea typeface="標楷體" panose="03000509000000000000" pitchFamily="65" charset="-120"/>
+              </a:rPr>
+              <a:t>&lt;div class='</a:t>
+            </a:r>
+            <a:r>
+              <a:rPr lang="en-US" altLang="zh-TW" sz="1200" kern="100" dirty="0" err="1">
+                <a:effectLst/>
+                <a:latin typeface="Courier New" panose="02070309020205020404" pitchFamily="49" charset="0"/>
+                <a:ea typeface="標楷體" panose="03000509000000000000" pitchFamily="65" charset="-120"/>
+              </a:rPr>
+              <a:t>conatiner</a:t>
+            </a:r>
+            <a:r>
+              <a:rPr lang="en-US" altLang="zh-TW" sz="1200" kern="100" dirty="0">
+                <a:effectLst/>
+                <a:latin typeface="Courier New" panose="02070309020205020404" pitchFamily="49" charset="0"/>
+                <a:ea typeface="標楷體" panose="03000509000000000000" pitchFamily="65" charset="-120"/>
+              </a:rPr>
+              <a:t>’&gt;</a:t>
+            </a:r>
+          </a:p>
+          <a:p>
+            <a:pPr marL="0" marR="0" lvl="0" indent="0" algn="l" defTabSz="914400" rtl="0" eaLnBrk="1" fontAlgn="auto" latinLnBrk="0" hangingPunct="1">
+              <a:lnSpc>
+                <a:spcPct val="100000"/>
+              </a:lnSpc>
+              <a:spcBef>
+                <a:spcPts val="0"/>
+              </a:spcBef>
+              <a:spcAft>
+                <a:spcPts val="0"/>
+              </a:spcAft>
+              <a:buClrTx/>
+              <a:buSzTx/>
+              <a:buFontTx/>
+              <a:buNone/>
+              <a:tabLst/>
+              <a:defRPr/>
+            </a:pPr>
+            <a:r>
+              <a:rPr lang="en-US" altLang="zh-TW" b="0" dirty="0">
+                <a:solidFill>
+                  <a:srgbClr val="808080"/>
+                </a:solidFill>
+                <a:effectLst/>
+                <a:latin typeface="Consolas" panose="020B0609020204030204" pitchFamily="49" charset="0"/>
+              </a:rPr>
+              <a:t>&lt;</a:t>
+            </a:r>
+            <a:r>
+              <a:rPr lang="en-US" altLang="zh-TW" b="0" dirty="0" err="1">
+                <a:solidFill>
+                  <a:srgbClr val="569CD6"/>
+                </a:solidFill>
+                <a:effectLst/>
+                <a:latin typeface="Consolas" panose="020B0609020204030204" pitchFamily="49" charset="0"/>
+              </a:rPr>
+              <a:t>iframe</a:t>
+            </a:r>
+            <a:r>
+              <a:rPr lang="en-US" altLang="zh-TW" b="0" dirty="0">
+                <a:solidFill>
+                  <a:srgbClr val="CCCCCC"/>
+                </a:solidFill>
+                <a:effectLst/>
+                <a:latin typeface="Consolas" panose="020B0609020204030204" pitchFamily="49" charset="0"/>
+              </a:rPr>
+              <a:t> </a:t>
+            </a:r>
+            <a:r>
+              <a:rPr lang="en-US" altLang="zh-TW" b="0" dirty="0">
+                <a:solidFill>
+                  <a:srgbClr val="9CDCFE"/>
+                </a:solidFill>
+                <a:effectLst/>
+                <a:latin typeface="Consolas" panose="020B0609020204030204" pitchFamily="49" charset="0"/>
+              </a:rPr>
+              <a:t>width</a:t>
+            </a:r>
+            <a:r>
+              <a:rPr lang="en-US" altLang="zh-TW" b="0" dirty="0">
+                <a:solidFill>
+                  <a:srgbClr val="CCCCCC"/>
+                </a:solidFill>
+                <a:effectLst/>
+                <a:latin typeface="Consolas" panose="020B0609020204030204" pitchFamily="49" charset="0"/>
+              </a:rPr>
+              <a:t>=</a:t>
+            </a:r>
+            <a:r>
+              <a:rPr lang="en-US" altLang="zh-TW" b="0" dirty="0">
+                <a:solidFill>
+                  <a:srgbClr val="CE9178"/>
+                </a:solidFill>
+                <a:effectLst/>
+                <a:latin typeface="Consolas" panose="020B0609020204030204" pitchFamily="49" charset="0"/>
+              </a:rPr>
+              <a:t>"560"</a:t>
+            </a:r>
+            <a:r>
+              <a:rPr lang="en-US" altLang="zh-TW" b="0" dirty="0">
+                <a:solidFill>
+                  <a:srgbClr val="CCCCCC"/>
+                </a:solidFill>
+                <a:effectLst/>
+                <a:latin typeface="Consolas" panose="020B0609020204030204" pitchFamily="49" charset="0"/>
+              </a:rPr>
+              <a:t> </a:t>
+            </a:r>
+            <a:r>
+              <a:rPr lang="en-US" altLang="zh-TW" b="0" dirty="0">
+                <a:solidFill>
+                  <a:srgbClr val="9CDCFE"/>
+                </a:solidFill>
+                <a:effectLst/>
+                <a:latin typeface="Consolas" panose="020B0609020204030204" pitchFamily="49" charset="0"/>
+              </a:rPr>
+              <a:t>height</a:t>
+            </a:r>
+            <a:r>
+              <a:rPr lang="en-US" altLang="zh-TW" b="0" dirty="0">
+                <a:solidFill>
+                  <a:srgbClr val="CCCCCC"/>
+                </a:solidFill>
+                <a:effectLst/>
+                <a:latin typeface="Consolas" panose="020B0609020204030204" pitchFamily="49" charset="0"/>
+              </a:rPr>
+              <a:t>=</a:t>
+            </a:r>
+            <a:r>
+              <a:rPr lang="en-US" altLang="zh-TW" b="0" dirty="0">
+                <a:solidFill>
+                  <a:srgbClr val="CE9178"/>
+                </a:solidFill>
+                <a:effectLst/>
+                <a:latin typeface="Consolas" panose="020B0609020204030204" pitchFamily="49" charset="0"/>
+              </a:rPr>
+              <a:t>"315"</a:t>
+            </a:r>
+            <a:endParaRPr lang="en-US" altLang="zh-TW" b="0" dirty="0">
+              <a:solidFill>
+                <a:srgbClr val="CCCCCC"/>
+              </a:solidFill>
+              <a:effectLst/>
+              <a:latin typeface="Consolas" panose="020B0609020204030204" pitchFamily="49" charset="0"/>
+            </a:endParaRPr>
+          </a:p>
+          <a:p>
             <a:endParaRPr lang="zh-TW" altLang="en-US" dirty="0"/>
           </a:p>
         </p:txBody>
@@ -6000,7 +6068,7 @@
             <a:fld id="{027FE99C-3BAC-4305-ABBB-3890AB1B4510}" type="slidenum">
               <a:rPr lang="zh-TW" altLang="en-US" smtClean="0"/>
               <a:pPr/>
-              <a:t>52</a:t>
+              <a:t>50</a:t>
             </a:fld>
             <a:endParaRPr lang="zh-TW" altLang="en-US"/>
           </a:p>
@@ -6009,7 +6077,7 @@
     </p:spTree>
     <p:extLst>
       <p:ext uri="{BB962C8B-B14F-4D97-AF65-F5344CB8AC3E}">
-        <p14:creationId xmlns:p14="http://schemas.microsoft.com/office/powerpoint/2010/main" val="3975987023"/>
+        <p14:creationId xmlns:p14="http://schemas.microsoft.com/office/powerpoint/2010/main" val="1949068779"/>
       </p:ext>
     </p:extLst>
   </p:cSld>
@@ -6065,7 +6133,7 @@
           <a:p>
             <a:r>
               <a:rPr lang="zh-TW" altLang="en-US" dirty="0"/>
-              <a:t>檢查口訣：</a:t>
+              <a:t>原則：不同</a:t>
             </a:r>
             <a:r>
               <a:rPr lang="en-US" altLang="zh-TW" dirty="0"/>
@@ -6073,7 +6141,7 @@
             </a:r>
             <a:r>
               <a:rPr lang="zh-TW" altLang="en-US" dirty="0"/>
-              <a:t>之間不應該有其他</a:t>
+              <a:t>之間不會有</a:t>
             </a:r>
             <a:r>
               <a:rPr lang="en-US" altLang="zh-TW" dirty="0"/>
@@ -6081,16 +6149,21 @@
             </a:r>
             <a:r>
               <a:rPr lang="zh-TW" altLang="en-US" dirty="0"/>
-              <a:t> </a:t>
-            </a:r>
-            <a:r>
-              <a:rPr lang="en-US" altLang="zh-TW" dirty="0"/>
-              <a:t>tag</a:t>
+              <a:t>元素，只有</a:t>
+            </a:r>
+            <a:r>
+              <a:rPr lang="en-US" altLang="zh-TW" dirty="0"/>
+              <a:t>block</a:t>
             </a:r>
             <a:r>
               <a:rPr lang="zh-TW" altLang="en-US" dirty="0"/>
-              <a:t>了</a:t>
-            </a:r>
+              <a:t>內才有</a:t>
+            </a:r>
+            <a:r>
+              <a:rPr lang="en-US" altLang="zh-TW" dirty="0"/>
+              <a:t>html</a:t>
+            </a:r>
+            <a:endParaRPr lang="zh-TW" altLang="en-US" dirty="0"/>
           </a:p>
         </p:txBody>
       </p:sp>
@@ -6112,7 +6185,7 @@
             <a:fld id="{027FE99C-3BAC-4305-ABBB-3890AB1B4510}" type="slidenum">
               <a:rPr lang="zh-TW" altLang="en-US" smtClean="0"/>
               <a:pPr/>
-              <a:t>53</a:t>
+              <a:t>52</a:t>
             </a:fld>
             <a:endParaRPr lang="zh-TW" altLang="en-US"/>
           </a:p>
@@ -6121,7 +6194,7 @@
     </p:spTree>
     <p:extLst>
       <p:ext uri="{BB962C8B-B14F-4D97-AF65-F5344CB8AC3E}">
-        <p14:creationId xmlns:p14="http://schemas.microsoft.com/office/powerpoint/2010/main" val="2915713891"/>
+        <p14:creationId xmlns:p14="http://schemas.microsoft.com/office/powerpoint/2010/main" val="3975987023"/>
       </p:ext>
     </p:extLst>
   </p:cSld>
@@ -6176,157 +6249,32 @@
           <a:lstStyle/>
           <a:p>
             <a:r>
-              <a:rPr lang="en-US" altLang="zh-TW" dirty="0"/>
-              <a:t>Python</a:t>
-            </a:r>
-            <a:r>
               <a:rPr lang="zh-TW" altLang="en-US" dirty="0"/>
-              <a:t>中這樣的格式的變數</a:t>
-            </a:r>
-            <a:r>
-              <a:rPr lang="en-US" altLang="zh-TW" dirty="0"/>
-              <a:t>(field:10)(</a:t>
+              <a:t>檢查口訣：</a:t>
+            </a:r>
+            <a:r>
+              <a:rPr lang="en-US" altLang="zh-TW" dirty="0"/>
+              <a:t>block</a:t>
             </a:r>
             <a:r>
               <a:rPr lang="zh-TW" altLang="en-US" dirty="0"/>
-              <a:t>此為字典型態變數</a:t>
-            </a:r>
-            <a:r>
-              <a:rPr lang="en-US" altLang="zh-TW" dirty="0"/>
-              <a:t>)</a:t>
+              <a:t>之間不應該有其他</a:t>
+            </a:r>
+            <a:r>
+              <a:rPr lang="en-US" altLang="zh-TW" dirty="0"/>
+              <a:t>html</a:t>
             </a:r>
             <a:r>
               <a:rPr lang="zh-TW" altLang="en-US" dirty="0"/>
-              <a:t>。</a:t>
-            </a:r>
-            <a:endParaRPr lang="en-US" altLang="zh-TW" dirty="0"/>
-          </a:p>
-          <a:p>
+              <a:t> </a:t>
+            </a:r>
+            <a:r>
+              <a:rPr lang="en-US" altLang="zh-TW" dirty="0"/>
+              <a:t>tag</a:t>
+            </a:r>
             <a:r>
               <a:rPr lang="zh-TW" altLang="en-US" dirty="0"/>
-              <a:t>那麼</a:t>
-            </a:r>
-            <a:r>
-              <a:rPr lang="en-US" altLang="zh-TW" dirty="0"/>
-              <a:t>,</a:t>
-            </a:r>
-            <a:r>
-              <a:rPr lang="zh-TW" altLang="en-US" dirty="0"/>
-              <a:t>如果要在</a:t>
-            </a:r>
-            <a:r>
-              <a:rPr lang="en-US" altLang="zh-TW" dirty="0"/>
-              <a:t>Template </a:t>
-            </a:r>
-            <a:r>
-              <a:rPr lang="zh-TW" altLang="en-US" dirty="0"/>
-              <a:t>中取出的資料是</a:t>
-            </a:r>
-            <a:r>
-              <a:rPr lang="zh-TW" altLang="en-US" b="1" dirty="0">
-                <a:solidFill>
-                  <a:srgbClr val="FF0000"/>
-                </a:solidFill>
-              </a:rPr>
-              <a:t>串列</a:t>
-            </a:r>
-            <a:r>
-              <a:rPr lang="zh-TW" altLang="en-US" dirty="0"/>
-              <a:t>型態變呢</a:t>
-            </a:r>
-            <a:r>
-              <a:rPr lang="en-US" altLang="zh-TW" dirty="0"/>
-              <a:t>?</a:t>
-            </a:r>
-            <a:r>
-              <a:rPr lang="zh-TW" altLang="en-US" dirty="0"/>
-              <a:t>因為串列是以索引值當做</a:t>
-            </a:r>
-          </a:p>
-          <a:p>
-            <a:r>
-              <a:rPr lang="zh-TW" altLang="en-US" dirty="0"/>
-              <a:t>是取出內容的依據</a:t>
-            </a:r>
-            <a:r>
-              <a:rPr lang="en-US" altLang="zh-TW" dirty="0"/>
-              <a:t>,</a:t>
-            </a:r>
-            <a:r>
-              <a:rPr lang="zh-TW" altLang="en-US" dirty="0"/>
-              <a:t>因此就如同之前取出字典變數內容一樣</a:t>
-            </a:r>
-            <a:r>
-              <a:rPr lang="en-US" altLang="zh-TW" dirty="0"/>
-              <a:t>,</a:t>
-            </a:r>
-            <a:r>
-              <a:rPr lang="zh-TW" altLang="en-US" dirty="0"/>
-              <a:t>只是</a:t>
-            </a:r>
-            <a:r>
-              <a:rPr lang="en-US" altLang="zh-TW" dirty="0" err="1"/>
-              <a:t>kev</a:t>
-            </a:r>
-            <a:r>
-              <a:rPr lang="zh-TW" altLang="en-US" dirty="0"/>
-              <a:t>值改為數字</a:t>
-            </a:r>
-            <a:r>
-              <a:rPr lang="en-US" altLang="zh-TW" dirty="0"/>
-              <a:t>,</a:t>
-            </a:r>
-            <a:r>
-              <a:rPr lang="zh-TW" altLang="en-US" dirty="0"/>
-              <a:t>像是</a:t>
-            </a:r>
-          </a:p>
-          <a:p>
-            <a:r>
-              <a:rPr lang="zh-TW" altLang="en-US" dirty="0"/>
-              <a:t>如果有一個串列</a:t>
-            </a:r>
-            <a:r>
-              <a:rPr lang="en-US" altLang="zh-TW" dirty="0"/>
-              <a:t>id=[Item1,item2],</a:t>
-            </a:r>
-            <a:r>
-              <a:rPr lang="zh-TW" altLang="en-US" dirty="0"/>
-              <a:t>則在</a:t>
-            </a:r>
-            <a:r>
-              <a:rPr lang="en-US" altLang="zh-TW" dirty="0"/>
-              <a:t>template </a:t>
-            </a:r>
-            <a:r>
-              <a:rPr lang="zh-TW" altLang="en-US" dirty="0"/>
-              <a:t>檔案中</a:t>
-            </a:r>
-            <a:r>
-              <a:rPr lang="en-US" altLang="zh-TW" dirty="0"/>
-              <a:t>,</a:t>
-            </a:r>
-            <a:r>
-              <a:rPr lang="zh-TW" altLang="en-US" dirty="0"/>
-              <a:t>可以使用</a:t>
-            </a:r>
-            <a:r>
-              <a:rPr lang="en-US" altLang="zh-TW" dirty="0"/>
-              <a:t>{{id.0}}</a:t>
-            </a:r>
-            <a:r>
-              <a:rPr lang="zh-TW" altLang="en-US" dirty="0"/>
-              <a:t>和</a:t>
-            </a:r>
-            <a:r>
-              <a:rPr lang="en-US" altLang="zh-TW" dirty="0"/>
-              <a:t>{{id.1}}</a:t>
-            </a:r>
-          </a:p>
-          <a:p>
-            <a:r>
-              <a:rPr lang="zh-TW" altLang="en-US" dirty="0"/>
-              <a:t>分別把這兩個資料項目取出。</a:t>
+              <a:t>了</a:t>
             </a:r>
           </a:p>
         </p:txBody>
@@ -6349,7 +6297,7 @@
             <a:fld id="{027FE99C-3BAC-4305-ABBB-3890AB1B4510}" type="slidenum">
               <a:rPr lang="zh-TW" altLang="en-US" smtClean="0"/>
               <a:pPr/>
-              <a:t>57</a:t>
+              <a:t>53</a:t>
             </a:fld>
             <a:endParaRPr lang="zh-TW" altLang="en-US"/>
           </a:p>
@@ -6358,7 +6306,7 @@
     </p:spTree>
     <p:extLst>
       <p:ext uri="{BB962C8B-B14F-4D97-AF65-F5344CB8AC3E}">
-        <p14:creationId xmlns:p14="http://schemas.microsoft.com/office/powerpoint/2010/main" val="1257607293"/>
+        <p14:creationId xmlns:p14="http://schemas.microsoft.com/office/powerpoint/2010/main" val="2915713891"/>
       </p:ext>
     </p:extLst>
   </p:cSld>
@@ -6413,28 +6361,143 @@
           <a:lstStyle/>
           <a:p>
             <a:r>
+              <a:rPr lang="en-US" altLang="zh-TW" dirty="0"/>
+              <a:t>Python</a:t>
+            </a:r>
+            <a:r>
               <a:rPr lang="zh-TW" altLang="en-US" dirty="0"/>
-              <a:t>請留意</a:t>
-            </a:r>
-            <a:r>
-              <a:rPr lang="en-US" altLang="zh-TW" dirty="0"/>
-              <a:t>,endif</a:t>
+              <a:t>中這樣的格式的變數</a:t>
+            </a:r>
+            <a:r>
+              <a:rPr lang="en-US" altLang="zh-TW" dirty="0"/>
+              <a:t>(field:10)(</a:t>
             </a:r>
             <a:r>
               <a:rPr lang="zh-TW" altLang="en-US" dirty="0"/>
-              <a:t>和 </a:t>
-            </a:r>
-            <a:r>
-              <a:rPr lang="en-US" altLang="zh-TW" dirty="0"/>
-              <a:t>elf</a:t>
+              <a:t>此為字典型態變數</a:t>
+            </a:r>
+            <a:r>
+              <a:rPr lang="en-US" altLang="zh-TW" dirty="0"/>
+              <a:t>)</a:t>
             </a:r>
             <a:r>
               <a:rPr lang="zh-TW" altLang="en-US" dirty="0"/>
-              <a:t>這兩個關鍵字的</a:t>
-            </a:r>
-            <a:r>
-              <a:rPr lang="en-US" altLang="zh-TW" dirty="0"/>
-              <a:t>end </a:t>
+              <a:t>。</a:t>
+            </a:r>
+            <a:endParaRPr lang="en-US" altLang="zh-TW" dirty="0"/>
+          </a:p>
+          <a:p>
+            <a:r>
+              <a:rPr lang="zh-TW" altLang="en-US" dirty="0"/>
+              <a:t>那麼</a:t>
+            </a:r>
+            <a:r>
+              <a:rPr lang="en-US" altLang="zh-TW" dirty="0"/>
+              <a:t>,</a:t>
+            </a:r>
+            <a:r>
+              <a:rPr lang="zh-TW" altLang="en-US" dirty="0"/>
+              <a:t>如果要在</a:t>
+            </a:r>
+            <a:r>
+              <a:rPr lang="en-US" altLang="zh-TW" dirty="0"/>
+              <a:t>Template </a:t>
+            </a:r>
+            <a:r>
+              <a:rPr lang="zh-TW" altLang="en-US" dirty="0"/>
+              <a:t>中取出的資料是</a:t>
+            </a:r>
+            <a:r>
+              <a:rPr lang="zh-TW" altLang="en-US" b="1" dirty="0">
+                <a:solidFill>
+                  <a:srgbClr val="FF0000"/>
+                </a:solidFill>
+              </a:rPr>
+              <a:t>串列</a:t>
+            </a:r>
+            <a:r>
+              <a:rPr lang="zh-TW" altLang="en-US" dirty="0"/>
+              <a:t>型態變呢</a:t>
+            </a:r>
+            <a:r>
+              <a:rPr lang="en-US" altLang="zh-TW" dirty="0"/>
+              <a:t>?</a:t>
+            </a:r>
+            <a:r>
+              <a:rPr lang="zh-TW" altLang="en-US" dirty="0"/>
+              <a:t>因為串列是以索引值當做</a:t>
+            </a:r>
+          </a:p>
+          <a:p>
+            <a:r>
+              <a:rPr lang="zh-TW" altLang="en-US" dirty="0"/>
+              <a:t>是取出內容的依據</a:t>
+            </a:r>
+            <a:r>
+              <a:rPr lang="en-US" altLang="zh-TW" dirty="0"/>
+              <a:t>,</a:t>
+            </a:r>
+            <a:r>
+              <a:rPr lang="zh-TW" altLang="en-US" dirty="0"/>
+              <a:t>因此就如同之前取出字典變數內容一樣</a:t>
+            </a:r>
+            <a:r>
+              <a:rPr lang="en-US" altLang="zh-TW" dirty="0"/>
+              <a:t>,</a:t>
+            </a:r>
+            <a:r>
+              <a:rPr lang="zh-TW" altLang="en-US" dirty="0"/>
+              <a:t>只是</a:t>
+            </a:r>
+            <a:r>
+              <a:rPr lang="en-US" altLang="zh-TW" dirty="0" err="1"/>
+              <a:t>kev</a:t>
+            </a:r>
+            <a:r>
+              <a:rPr lang="zh-TW" altLang="en-US" dirty="0"/>
+              <a:t>值改為數字</a:t>
+            </a:r>
+            <a:r>
+              <a:rPr lang="en-US" altLang="zh-TW" dirty="0"/>
+              <a:t>,</a:t>
+            </a:r>
+            <a:r>
+              <a:rPr lang="zh-TW" altLang="en-US" dirty="0"/>
+              <a:t>像是</a:t>
+            </a:r>
+          </a:p>
+          <a:p>
+            <a:r>
+              <a:rPr lang="zh-TW" altLang="en-US" dirty="0"/>
+              <a:t>如果有一個串列</a:t>
+            </a:r>
+            <a:r>
+              <a:rPr lang="en-US" altLang="zh-TW" dirty="0"/>
+              <a:t>id=[Item1,item2],</a:t>
+            </a:r>
+            <a:r>
+              <a:rPr lang="zh-TW" altLang="en-US" dirty="0"/>
+              <a:t>則在</a:t>
+            </a:r>
+            <a:r>
+              <a:rPr lang="en-US" altLang="zh-TW" dirty="0"/>
+              <a:t>template </a:t>
+            </a:r>
+            <a:r>
+              <a:rPr lang="zh-TW" altLang="en-US" dirty="0"/>
+              <a:t>檔案中</a:t>
+            </a:r>
+            <a:r>
+              <a:rPr lang="en-US" altLang="zh-TW" dirty="0"/>
+              <a:t>,</a:t>
+            </a:r>
+            <a:r>
+              <a:rPr lang="zh-TW" altLang="en-US" dirty="0"/>
+              <a:t>可以使用</a:t>
+            </a:r>
+            <a:r>
+              <a:rPr lang="en-US" altLang="zh-TW" dirty="0"/>
+              <a:t>{{id.0}}</a:t>
             </a:r>
             <a:r>
               <a:rPr lang="zh-TW" altLang="en-US" dirty="0"/>
@@ -6442,124 +6505,14 @@
             </a:r>
             <a:r>
               <a:rPr lang="en-US" altLang="zh-TW" dirty="0"/>
-              <a:t>if</a:t>
-            </a:r>
+              <a:t>{{id.1}}</a:t>
+            </a:r>
+          </a:p>
+          <a:p>
             <a:r>
               <a:rPr lang="zh-TW" altLang="en-US" dirty="0"/>
-              <a:t>以及</a:t>
-            </a:r>
-            <a:r>
-              <a:rPr lang="en-US" altLang="zh-TW" dirty="0" err="1"/>
-              <a:t>el</a:t>
-            </a:r>
-            <a:r>
-              <a:rPr lang="zh-TW" altLang="en-US" dirty="0"/>
-              <a:t>和</a:t>
-            </a:r>
-            <a:r>
-              <a:rPr lang="en-US" altLang="zh-TW" dirty="0"/>
-              <a:t>if</a:t>
-            </a:r>
-            <a:r>
-              <a:rPr lang="zh-TW" altLang="en-US" dirty="0"/>
-              <a:t>之間並沒有空格</a:t>
-            </a:r>
-            <a:r>
-              <a:rPr lang="en-US" altLang="zh-TW" dirty="0"/>
-              <a:t>,</a:t>
-            </a:r>
-            <a:r>
-              <a:rPr lang="zh-TW" altLang="en-US" dirty="0"/>
-              <a:t>上述法</a:t>
-            </a:r>
-          </a:p>
-          <a:p>
-            <a:r>
-              <a:rPr lang="zh-TW" altLang="en-US" dirty="0"/>
-              <a:t>敘述中</a:t>
-            </a:r>
-            <a:r>
-              <a:rPr lang="en-US" altLang="zh-TW" dirty="0"/>
-              <a:t>,</a:t>
-            </a:r>
-            <a:r>
-              <a:rPr lang="zh-TW" altLang="en-US" dirty="0"/>
-              <a:t>「⋯」這個符號可以使用任意數量的</a:t>
-            </a:r>
-            <a:r>
-              <a:rPr lang="en-US" altLang="zh-TW" dirty="0"/>
-              <a:t>HTML/CSS/JavaScript </a:t>
-            </a:r>
-            <a:r>
-              <a:rPr lang="zh-TW" altLang="en-US" dirty="0"/>
-              <a:t>或是其他的</a:t>
-            </a:r>
-            <a:r>
-              <a:rPr lang="en-US" altLang="zh-TW" dirty="0"/>
-              <a:t>(%%)</a:t>
-            </a:r>
-            <a:r>
-              <a:rPr lang="zh-TW" altLang="en-US" dirty="0"/>
-              <a:t>命</a:t>
-            </a:r>
-          </a:p>
-          <a:p>
-            <a:r>
-              <a:rPr lang="zh-TW" altLang="en-US" dirty="0"/>
-              <a:t>令取代</a:t>
-            </a:r>
-            <a:r>
-              <a:rPr lang="en-US" altLang="zh-TW" dirty="0"/>
-              <a:t>,</a:t>
-            </a:r>
-            <a:r>
-              <a:rPr lang="zh-TW" altLang="en-US" dirty="0"/>
-              <a:t>當然也可以是很多行的</a:t>
-            </a:r>
-            <a:r>
-              <a:rPr lang="en-US" altLang="zh-TW" dirty="0"/>
-              <a:t>HTML/CSS/JavaScript </a:t>
-            </a:r>
-            <a:r>
-              <a:rPr lang="zh-TW" altLang="en-US" dirty="0"/>
-              <a:t>程式碼。</a:t>
-            </a:r>
-            <a:endParaRPr lang="en-US" altLang="zh-TW" dirty="0"/>
-          </a:p>
-          <a:p>
-            <a:r>
-              <a:rPr lang="en-US" altLang="zh-TW" dirty="0"/>
-              <a:t>{% if car in cars %}</a:t>
-            </a:r>
-            <a:r>
-              <a:rPr lang="en-US" altLang="ko-KR" dirty="0"/>
-              <a:t> ... {% </a:t>
-            </a:r>
-            <a:r>
-              <a:rPr lang="en-US" altLang="zh-TW" dirty="0"/>
-              <a:t>endif %}</a:t>
-            </a:r>
-          </a:p>
-          <a:p>
-            <a:r>
-              <a:rPr lang="zh-TW" altLang="en-US" dirty="0"/>
-              <a:t>或是</a:t>
-            </a:r>
-          </a:p>
-          <a:p>
-            <a:r>
-              <a:rPr lang="en-US" altLang="zh-TW" dirty="0"/>
-              <a:t>{% if 'a' in '</a:t>
-            </a:r>
-            <a:r>
-              <a:rPr lang="en-US" altLang="zh-TW" dirty="0" err="1"/>
-              <a:t>abcdef</a:t>
-            </a:r>
-            <a:r>
-              <a:rPr lang="en-US" altLang="zh-TW" dirty="0"/>
-              <a:t>’ %} ... {% endif %}</a:t>
-            </a:r>
-            <a:endParaRPr lang="zh-TW" altLang="en-US" dirty="0"/>
+              <a:t>分別把這兩個資料項目取出。</a:t>
+            </a:r>
           </a:p>
         </p:txBody>
       </p:sp>
@@ -6581,7 +6534,7 @@
             <a:fld id="{027FE99C-3BAC-4305-ABBB-3890AB1B4510}" type="slidenum">
               <a:rPr lang="zh-TW" altLang="en-US" smtClean="0"/>
               <a:pPr/>
-              <a:t>58</a:t>
+              <a:t>57</a:t>
             </a:fld>
             <a:endParaRPr lang="zh-TW" altLang="en-US"/>
           </a:p>
@@ -6590,7 +6543,7 @@
     </p:spTree>
     <p:extLst>
       <p:ext uri="{BB962C8B-B14F-4D97-AF65-F5344CB8AC3E}">
-        <p14:creationId xmlns:p14="http://schemas.microsoft.com/office/powerpoint/2010/main" val="1797854883"/>
+        <p14:creationId xmlns:p14="http://schemas.microsoft.com/office/powerpoint/2010/main" val="1257607293"/>
       </p:ext>
     </p:extLst>
   </p:cSld>
@@ -7128,557 +7081,153 @@
           <a:bodyPr/>
           <a:lstStyle/>
           <a:p>
-            <a:pPr marL="0" marR="0" lvl="0" indent="0" algn="l" defTabSz="914400" rtl="0" eaLnBrk="1" fontAlgn="auto" latinLnBrk="0" hangingPunct="1">
-              <a:lnSpc>
-                <a:spcPts val="1425"/>
-              </a:lnSpc>
-              <a:spcBef>
-                <a:spcPts val="0"/>
-              </a:spcBef>
-              <a:spcAft>
-                <a:spcPts val="0"/>
-              </a:spcAft>
-              <a:buClrTx/>
-              <a:buSzTx/>
-              <a:buFontTx/>
-              <a:buNone/>
-              <a:tabLst/>
-              <a:defRPr/>
-            </a:pPr>
-            <a:r>
-              <a:rPr lang="zh-TW" altLang="en-US" b="0" dirty="0">
-                <a:solidFill>
-                  <a:srgbClr val="CDD3DE"/>
-                </a:solidFill>
-                <a:effectLst/>
-                <a:latin typeface="Consolas" panose="020B0609020204030204" pitchFamily="49" charset="0"/>
-              </a:rPr>
-              <a:t>以下放在</a:t>
-            </a:r>
-            <a:r>
-              <a:rPr lang="en-US" altLang="zh-TW" b="0" dirty="0">
-                <a:solidFill>
-                  <a:srgbClr val="5FB3B3"/>
-                </a:solidFill>
-                <a:effectLst/>
-                <a:latin typeface="Consolas" panose="020B0609020204030204" pitchFamily="49" charset="0"/>
-              </a:rPr>
-              <a:t>&lt;</a:t>
-            </a:r>
-            <a:r>
-              <a:rPr lang="en-US" altLang="zh-TW" b="0" dirty="0" err="1">
-                <a:solidFill>
-                  <a:srgbClr val="EB606B"/>
-                </a:solidFill>
-                <a:effectLst/>
-                <a:latin typeface="Consolas" panose="020B0609020204030204" pitchFamily="49" charset="0"/>
-              </a:rPr>
-              <a:t>iframe</a:t>
-            </a:r>
-            <a:r>
-              <a:rPr lang="en-US" altLang="zh-TW" b="0" dirty="0">
-                <a:solidFill>
-                  <a:srgbClr val="5FB3B3"/>
-                </a:solidFill>
-                <a:effectLst/>
-                <a:latin typeface="Consolas" panose="020B0609020204030204" pitchFamily="49" charset="0"/>
-              </a:rPr>
-              <a:t> </a:t>
-            </a:r>
-            <a:r>
-              <a:rPr lang="en-US" altLang="zh-TW" b="0" dirty="0">
-                <a:solidFill>
-                  <a:srgbClr val="BB80B3"/>
-                </a:solidFill>
-                <a:effectLst/>
-                <a:latin typeface="Consolas" panose="020B0609020204030204" pitchFamily="49" charset="0"/>
-              </a:rPr>
-              <a:t>width</a:t>
-            </a:r>
-            <a:r>
-              <a:rPr lang="en-US" altLang="zh-TW" b="0" dirty="0">
-                <a:solidFill>
-                  <a:srgbClr val="5FB3B3"/>
-                </a:solidFill>
-                <a:effectLst/>
-                <a:latin typeface="Consolas" panose="020B0609020204030204" pitchFamily="49" charset="0"/>
-              </a:rPr>
-              <a:t>=“</a:t>
-            </a:r>
-            <a:r>
-              <a:rPr lang="en-US" altLang="zh-TW" b="0" dirty="0">
-                <a:solidFill>
-                  <a:srgbClr val="99C794"/>
-                </a:solidFill>
-                <a:effectLst/>
-                <a:latin typeface="Consolas" panose="020B0609020204030204" pitchFamily="49" charset="0"/>
-              </a:rPr>
-              <a:t>560</a:t>
-            </a:r>
-            <a:r>
-              <a:rPr lang="en-US" altLang="zh-TW" b="0" dirty="0">
-                <a:solidFill>
-                  <a:srgbClr val="5FB3B3"/>
-                </a:solidFill>
-                <a:effectLst/>
-                <a:latin typeface="Consolas" panose="020B0609020204030204" pitchFamily="49" charset="0"/>
-              </a:rPr>
-              <a:t>“…</a:t>
-            </a:r>
-            <a:r>
-              <a:rPr lang="zh-TW" altLang="en-US" b="0" dirty="0">
-                <a:solidFill>
-                  <a:srgbClr val="5FB3B3"/>
-                </a:solidFill>
-                <a:effectLst/>
-                <a:latin typeface="Consolas" panose="020B0609020204030204" pitchFamily="49" charset="0"/>
-              </a:rPr>
-              <a:t>的</a:t>
-            </a:r>
-            <a:r>
-              <a:rPr lang="en-US" altLang="zh-TW" b="0" dirty="0">
-                <a:solidFill>
-                  <a:srgbClr val="5FB3B3"/>
-                </a:solidFill>
-                <a:effectLst/>
-                <a:latin typeface="Consolas" panose="020B0609020204030204" pitchFamily="49" charset="0"/>
-              </a:rPr>
-              <a:t>div</a:t>
-            </a:r>
-            <a:r>
-              <a:rPr lang="zh-TW" altLang="en-US" b="0" dirty="0">
-                <a:solidFill>
-                  <a:srgbClr val="5FB3B3"/>
-                </a:solidFill>
-                <a:effectLst/>
-                <a:latin typeface="Consolas" panose="020B0609020204030204" pitchFamily="49" charset="0"/>
-              </a:rPr>
-              <a:t>上方</a:t>
-            </a:r>
-            <a:endParaRPr lang="en-US" altLang="zh-TW" b="0" dirty="0">
-              <a:solidFill>
-                <a:srgbClr val="CDD3DE"/>
-              </a:solidFill>
-              <a:effectLst/>
-              <a:latin typeface="Consolas" panose="020B0609020204030204" pitchFamily="49" charset="0"/>
-            </a:endParaRPr>
-          </a:p>
-          <a:p>
-            <a:pPr>
-              <a:lnSpc>
-                <a:spcPts val="1425"/>
-              </a:lnSpc>
-            </a:pPr>
-            <a:r>
-              <a:rPr lang="en-US" altLang="zh-TW" b="0" dirty="0">
-                <a:solidFill>
-                  <a:srgbClr val="C594C5"/>
-                </a:solidFill>
-                <a:effectLst/>
-                <a:latin typeface="Consolas" panose="020B0609020204030204" pitchFamily="49" charset="0"/>
-              </a:rPr>
-              <a:t>{% if </a:t>
-            </a:r>
-            <a:r>
-              <a:rPr lang="en-US" altLang="zh-TW" b="0" dirty="0">
-                <a:solidFill>
-                  <a:srgbClr val="99C794"/>
-                </a:solidFill>
-                <a:effectLst/>
-                <a:latin typeface="Consolas" panose="020B0609020204030204" pitchFamily="49" charset="0"/>
-              </a:rPr>
-              <a:t>hour</a:t>
-            </a:r>
-            <a:r>
-              <a:rPr lang="en-US" altLang="zh-TW" b="0" dirty="0">
-                <a:solidFill>
-                  <a:srgbClr val="C594C5"/>
-                </a:solidFill>
-                <a:effectLst/>
-                <a:latin typeface="Consolas" panose="020B0609020204030204" pitchFamily="49" charset="0"/>
-              </a:rPr>
-              <a:t> </a:t>
-            </a:r>
-            <a:r>
-              <a:rPr lang="en-US" altLang="zh-TW" b="0" dirty="0">
-                <a:solidFill>
-                  <a:srgbClr val="5FB3B3"/>
-                </a:solidFill>
-                <a:effectLst/>
-                <a:latin typeface="Consolas" panose="020B0609020204030204" pitchFamily="49" charset="0"/>
-              </a:rPr>
-              <a:t>&gt;</a:t>
-            </a:r>
-            <a:r>
-              <a:rPr lang="en-US" altLang="zh-TW" b="0" dirty="0">
-                <a:solidFill>
-                  <a:srgbClr val="C594C5"/>
-                </a:solidFill>
-                <a:effectLst/>
-                <a:latin typeface="Consolas" panose="020B0609020204030204" pitchFamily="49" charset="0"/>
-              </a:rPr>
-              <a:t> </a:t>
-            </a:r>
-            <a:r>
-              <a:rPr lang="en-US" altLang="zh-TW" b="0" dirty="0">
-                <a:solidFill>
-                  <a:srgbClr val="99C794"/>
-                </a:solidFill>
-                <a:effectLst/>
-                <a:latin typeface="Consolas" panose="020B0609020204030204" pitchFamily="49" charset="0"/>
-              </a:rPr>
-              <a:t>18</a:t>
-            </a:r>
-            <a:r>
-              <a:rPr lang="en-US" altLang="zh-TW" b="0" dirty="0">
-                <a:solidFill>
-                  <a:srgbClr val="C594C5"/>
-                </a:solidFill>
-                <a:effectLst/>
-                <a:latin typeface="Consolas" panose="020B0609020204030204" pitchFamily="49" charset="0"/>
-              </a:rPr>
-              <a:t> %}</a:t>
-            </a:r>
-            <a:endParaRPr lang="en-US" altLang="zh-TW" b="0" dirty="0">
-              <a:solidFill>
-                <a:srgbClr val="CDD3DE"/>
-              </a:solidFill>
-              <a:effectLst/>
-              <a:latin typeface="Consolas" panose="020B0609020204030204" pitchFamily="49" charset="0"/>
-            </a:endParaRPr>
-          </a:p>
-          <a:p>
-            <a:pPr>
-              <a:lnSpc>
-                <a:spcPts val="1425"/>
-              </a:lnSpc>
-            </a:pPr>
-            <a:r>
-              <a:rPr lang="en-US" altLang="zh-TW" b="0" dirty="0">
-                <a:solidFill>
-                  <a:srgbClr val="CDD3DE"/>
-                </a:solidFill>
-                <a:effectLst/>
-                <a:latin typeface="Consolas" panose="020B0609020204030204" pitchFamily="49" charset="0"/>
-              </a:rPr>
-              <a:t>        </a:t>
-            </a:r>
-            <a:r>
-              <a:rPr lang="zh-TW" altLang="en-US" b="0" dirty="0">
-                <a:solidFill>
-                  <a:srgbClr val="CDD3DE"/>
-                </a:solidFill>
-                <a:effectLst/>
-                <a:latin typeface="Consolas" panose="020B0609020204030204" pitchFamily="49" charset="0"/>
-              </a:rPr>
-              <a:t>晚安 </a:t>
-            </a:r>
-          </a:p>
-          <a:p>
-            <a:pPr>
-              <a:lnSpc>
-                <a:spcPts val="1425"/>
-              </a:lnSpc>
-            </a:pPr>
-            <a:r>
-              <a:rPr lang="en-US" altLang="zh-TW" b="0" dirty="0">
-                <a:solidFill>
-                  <a:srgbClr val="C594C5"/>
-                </a:solidFill>
-                <a:effectLst/>
-                <a:latin typeface="Consolas" panose="020B0609020204030204" pitchFamily="49" charset="0"/>
-              </a:rPr>
-              <a:t>{% </a:t>
-            </a:r>
-            <a:r>
-              <a:rPr lang="en-US" altLang="zh-TW" b="0" dirty="0" err="1">
-                <a:solidFill>
-                  <a:srgbClr val="C594C5"/>
-                </a:solidFill>
-                <a:effectLst/>
-                <a:latin typeface="Consolas" panose="020B0609020204030204" pitchFamily="49" charset="0"/>
-              </a:rPr>
-              <a:t>elif</a:t>
-            </a:r>
-            <a:r>
-              <a:rPr lang="en-US" altLang="zh-TW" b="0" dirty="0">
-                <a:solidFill>
-                  <a:srgbClr val="C594C5"/>
-                </a:solidFill>
-                <a:effectLst/>
-                <a:latin typeface="Consolas" panose="020B0609020204030204" pitchFamily="49" charset="0"/>
-              </a:rPr>
-              <a:t> </a:t>
-            </a:r>
-            <a:r>
-              <a:rPr lang="en-US" altLang="zh-TW" b="0" dirty="0">
-                <a:solidFill>
-                  <a:srgbClr val="99C794"/>
-                </a:solidFill>
-                <a:effectLst/>
-                <a:latin typeface="Consolas" panose="020B0609020204030204" pitchFamily="49" charset="0"/>
-              </a:rPr>
-              <a:t>hour</a:t>
-            </a:r>
-            <a:r>
-              <a:rPr lang="en-US" altLang="zh-TW" b="0" dirty="0">
-                <a:solidFill>
-                  <a:srgbClr val="C594C5"/>
-                </a:solidFill>
-                <a:effectLst/>
-                <a:latin typeface="Consolas" panose="020B0609020204030204" pitchFamily="49" charset="0"/>
-              </a:rPr>
-              <a:t> </a:t>
-            </a:r>
-            <a:r>
-              <a:rPr lang="en-US" altLang="zh-TW" b="0" dirty="0">
-                <a:solidFill>
-                  <a:srgbClr val="5FB3B3"/>
-                </a:solidFill>
-                <a:effectLst/>
-                <a:latin typeface="Consolas" panose="020B0609020204030204" pitchFamily="49" charset="0"/>
-              </a:rPr>
-              <a:t>&lt;</a:t>
-            </a:r>
-            <a:r>
-              <a:rPr lang="en-US" altLang="zh-TW" b="0" dirty="0">
-                <a:solidFill>
-                  <a:srgbClr val="C594C5"/>
-                </a:solidFill>
-                <a:effectLst/>
-                <a:latin typeface="Consolas" panose="020B0609020204030204" pitchFamily="49" charset="0"/>
-              </a:rPr>
-              <a:t> </a:t>
-            </a:r>
-            <a:r>
-              <a:rPr lang="en-US" altLang="zh-TW" b="0" dirty="0">
-                <a:solidFill>
-                  <a:srgbClr val="99C794"/>
-                </a:solidFill>
-                <a:effectLst/>
-                <a:latin typeface="Consolas" panose="020B0609020204030204" pitchFamily="49" charset="0"/>
-              </a:rPr>
-              <a:t>10</a:t>
-            </a:r>
-            <a:r>
-              <a:rPr lang="en-US" altLang="zh-TW" b="0" dirty="0">
-                <a:solidFill>
-                  <a:srgbClr val="C594C5"/>
-                </a:solidFill>
-                <a:effectLst/>
-                <a:latin typeface="Consolas" panose="020B0609020204030204" pitchFamily="49" charset="0"/>
-              </a:rPr>
-              <a:t> %}</a:t>
-            </a:r>
-            <a:endParaRPr lang="en-US" altLang="zh-TW" b="0" dirty="0">
-              <a:solidFill>
-                <a:srgbClr val="CDD3DE"/>
-              </a:solidFill>
-              <a:effectLst/>
-              <a:latin typeface="Consolas" panose="020B0609020204030204" pitchFamily="49" charset="0"/>
-            </a:endParaRPr>
-          </a:p>
-          <a:p>
-            <a:pPr>
-              <a:lnSpc>
-                <a:spcPts val="1425"/>
-              </a:lnSpc>
-            </a:pPr>
-            <a:r>
-              <a:rPr lang="en-US" altLang="zh-TW" b="0" dirty="0">
-                <a:solidFill>
-                  <a:srgbClr val="CDD3DE"/>
-                </a:solidFill>
-                <a:effectLst/>
-                <a:latin typeface="Consolas" panose="020B0609020204030204" pitchFamily="49" charset="0"/>
-              </a:rPr>
-              <a:t>        </a:t>
-            </a:r>
-            <a:r>
-              <a:rPr lang="zh-TW" altLang="en-US" b="0" dirty="0">
-                <a:solidFill>
-                  <a:srgbClr val="CDD3DE"/>
-                </a:solidFill>
-                <a:effectLst/>
-                <a:latin typeface="Consolas" panose="020B0609020204030204" pitchFamily="49" charset="0"/>
-              </a:rPr>
-              <a:t>早安</a:t>
-            </a:r>
-          </a:p>
-          <a:p>
-            <a:pPr>
-              <a:lnSpc>
-                <a:spcPts val="1425"/>
-              </a:lnSpc>
-            </a:pPr>
-            <a:r>
-              <a:rPr lang="en-US" altLang="zh-TW" b="0" dirty="0">
-                <a:solidFill>
-                  <a:srgbClr val="C594C5"/>
-                </a:solidFill>
-                <a:effectLst/>
-                <a:latin typeface="Consolas" panose="020B0609020204030204" pitchFamily="49" charset="0"/>
-              </a:rPr>
-              <a:t>{% else %}</a:t>
-            </a:r>
-            <a:endParaRPr lang="en-US" altLang="zh-TW" b="0" dirty="0">
-              <a:solidFill>
-                <a:srgbClr val="CDD3DE"/>
-              </a:solidFill>
-              <a:effectLst/>
-              <a:latin typeface="Consolas" panose="020B0609020204030204" pitchFamily="49" charset="0"/>
-            </a:endParaRPr>
-          </a:p>
-          <a:p>
-            <a:pPr>
-              <a:lnSpc>
-                <a:spcPts val="1425"/>
-              </a:lnSpc>
-            </a:pPr>
-            <a:r>
-              <a:rPr lang="en-US" altLang="zh-TW" b="0" dirty="0">
-                <a:solidFill>
-                  <a:srgbClr val="CDD3DE"/>
-                </a:solidFill>
-                <a:effectLst/>
-                <a:latin typeface="Consolas" panose="020B0609020204030204" pitchFamily="49" charset="0"/>
-              </a:rPr>
-              <a:t>        </a:t>
-            </a:r>
-            <a:r>
-              <a:rPr lang="zh-TW" altLang="en-US" b="0" dirty="0">
-                <a:solidFill>
-                  <a:srgbClr val="CDD3DE"/>
-                </a:solidFill>
-                <a:effectLst/>
-                <a:latin typeface="Consolas" panose="020B0609020204030204" pitchFamily="49" charset="0"/>
-              </a:rPr>
-              <a:t>午安        </a:t>
-            </a:r>
-          </a:p>
-          <a:p>
-            <a:pPr>
-              <a:lnSpc>
-                <a:spcPts val="1425"/>
-              </a:lnSpc>
-            </a:pPr>
-            <a:r>
-              <a:rPr lang="en-US" altLang="zh-TW" b="0" dirty="0">
-                <a:solidFill>
-                  <a:srgbClr val="C594C5"/>
-                </a:solidFill>
-                <a:effectLst/>
-                <a:latin typeface="Consolas" panose="020B0609020204030204" pitchFamily="49" charset="0"/>
-              </a:rPr>
-              <a:t>{% endif %}</a:t>
-            </a:r>
-            <a:endParaRPr lang="en-US" altLang="zh-TW" b="0" dirty="0">
-              <a:solidFill>
-                <a:srgbClr val="CDD3DE"/>
-              </a:solidFill>
-              <a:effectLst/>
-              <a:latin typeface="Consolas" panose="020B0609020204030204" pitchFamily="49" charset="0"/>
-            </a:endParaRPr>
-          </a:p>
-          <a:p>
-            <a:pPr>
-              <a:lnSpc>
-                <a:spcPts val="1425"/>
-              </a:lnSpc>
-            </a:pPr>
-            <a:r>
-              <a:rPr lang="en-US" altLang="zh-TW" b="0" dirty="0">
-                <a:solidFill>
-                  <a:srgbClr val="5FB3B3"/>
-                </a:solidFill>
-                <a:effectLst/>
-                <a:latin typeface="Consolas" panose="020B0609020204030204" pitchFamily="49" charset="0"/>
-              </a:rPr>
-              <a:t>&lt;</a:t>
-            </a:r>
-            <a:r>
-              <a:rPr lang="en-US" altLang="zh-TW" b="0" dirty="0" err="1">
-                <a:solidFill>
-                  <a:srgbClr val="EB606B"/>
-                </a:solidFill>
-                <a:effectLst/>
-                <a:latin typeface="Consolas" panose="020B0609020204030204" pitchFamily="49" charset="0"/>
-              </a:rPr>
-              <a:t>br</a:t>
-            </a:r>
-            <a:r>
-              <a:rPr lang="en-US" altLang="zh-TW" b="0" dirty="0">
-                <a:solidFill>
-                  <a:srgbClr val="5FB3B3"/>
-                </a:solidFill>
-                <a:effectLst/>
-                <a:latin typeface="Consolas" panose="020B0609020204030204" pitchFamily="49" charset="0"/>
-              </a:rPr>
-              <a:t>&gt;</a:t>
-            </a:r>
-            <a:endParaRPr lang="en-US" altLang="zh-TW" b="0" dirty="0">
-              <a:solidFill>
-                <a:srgbClr val="CDD3DE"/>
-              </a:solidFill>
-              <a:effectLst/>
-              <a:latin typeface="Consolas" panose="020B0609020204030204" pitchFamily="49" charset="0"/>
-            </a:endParaRPr>
-          </a:p>
-          <a:p>
-            <a:pPr>
-              <a:lnSpc>
-                <a:spcPts val="1425"/>
-              </a:lnSpc>
-            </a:pPr>
-            <a:r>
-              <a:rPr lang="en-US" altLang="zh-TW" b="0" dirty="0">
-                <a:solidFill>
-                  <a:srgbClr val="CDD3DE"/>
-                </a:solidFill>
-                <a:effectLst/>
-                <a:latin typeface="Consolas" panose="020B0609020204030204" pitchFamily="49" charset="0"/>
-              </a:rPr>
-              <a:t> </a:t>
-            </a:r>
-            <a:r>
-              <a:rPr lang="en-US" altLang="zh-TW" b="0" dirty="0">
-                <a:solidFill>
-                  <a:srgbClr val="C594C5"/>
-                </a:solidFill>
-                <a:effectLst/>
-                <a:latin typeface="Consolas" panose="020B0609020204030204" pitchFamily="49" charset="0"/>
-              </a:rPr>
-              <a:t>{% </a:t>
-            </a:r>
-            <a:r>
-              <a:rPr lang="en-US" altLang="zh-TW" b="0" dirty="0" err="1">
-                <a:solidFill>
-                  <a:srgbClr val="C594C5"/>
-                </a:solidFill>
-                <a:effectLst/>
-                <a:latin typeface="Consolas" panose="020B0609020204030204" pitchFamily="49" charset="0"/>
-              </a:rPr>
-              <a:t>endblock</a:t>
-            </a:r>
-            <a:r>
-              <a:rPr lang="en-US" altLang="zh-TW" b="0" dirty="0">
-                <a:solidFill>
-                  <a:srgbClr val="C594C5"/>
-                </a:solidFill>
-                <a:effectLst/>
-                <a:latin typeface="Consolas" panose="020B0609020204030204" pitchFamily="49" charset="0"/>
-              </a:rPr>
-              <a:t> %}</a:t>
-            </a:r>
-            <a:endParaRPr lang="en-US" altLang="zh-TW" b="0" dirty="0">
-              <a:solidFill>
-                <a:srgbClr val="CDD3DE"/>
-              </a:solidFill>
-              <a:effectLst/>
-              <a:latin typeface="Consolas" panose="020B0609020204030204" pitchFamily="49" charset="0"/>
-            </a:endParaRPr>
-          </a:p>
-          <a:p>
+            <a:r>
+              <a:rPr lang="zh-TW" altLang="en-US" dirty="0"/>
+              <a:t>請留意</a:t>
+            </a:r>
+            <a:r>
+              <a:rPr lang="en-US" altLang="zh-TW" dirty="0"/>
+              <a:t>,endif</a:t>
+            </a:r>
+            <a:r>
+              <a:rPr lang="zh-TW" altLang="en-US" dirty="0"/>
+              <a:t>和 </a:t>
+            </a:r>
+            <a:r>
+              <a:rPr lang="en-US" altLang="zh-TW" dirty="0"/>
+              <a:t>elf</a:t>
+            </a:r>
+            <a:r>
+              <a:rPr lang="zh-TW" altLang="en-US" dirty="0"/>
+              <a:t>這兩個關鍵字的</a:t>
+            </a:r>
+            <a:r>
+              <a:rPr lang="en-US" altLang="zh-TW" dirty="0"/>
+              <a:t>end </a:t>
+            </a:r>
+            <a:r>
+              <a:rPr lang="zh-TW" altLang="en-US" dirty="0"/>
+              <a:t>和</a:t>
+            </a:r>
+            <a:r>
+              <a:rPr lang="en-US" altLang="zh-TW" dirty="0"/>
+              <a:t>if</a:t>
+            </a:r>
+            <a:r>
+              <a:rPr lang="zh-TW" altLang="en-US" dirty="0"/>
+              <a:t>以及</a:t>
+            </a:r>
+            <a:r>
+              <a:rPr lang="en-US" altLang="zh-TW" dirty="0" err="1"/>
+              <a:t>el</a:t>
+            </a:r>
+            <a:r>
+              <a:rPr lang="zh-TW" altLang="en-US" dirty="0"/>
+              <a:t>和</a:t>
+            </a:r>
+            <a:r>
+              <a:rPr lang="en-US" altLang="zh-TW" dirty="0"/>
+              <a:t>if</a:t>
+            </a:r>
+            <a:r>
+              <a:rPr lang="zh-TW" altLang="en-US" dirty="0"/>
+              <a:t>之間並沒有空格</a:t>
+            </a:r>
+            <a:r>
+              <a:rPr lang="en-US" altLang="zh-TW" dirty="0"/>
+              <a:t>,</a:t>
+            </a:r>
+            <a:r>
+              <a:rPr lang="zh-TW" altLang="en-US" dirty="0"/>
+              <a:t>上述法</a:t>
+            </a:r>
+          </a:p>
+          <a:p>
+            <a:r>
+              <a:rPr lang="zh-TW" altLang="en-US" dirty="0"/>
+              <a:t>敘述中</a:t>
+            </a:r>
+            <a:r>
+              <a:rPr lang="en-US" altLang="zh-TW" dirty="0"/>
+              <a:t>,</a:t>
+            </a:r>
+            <a:r>
+              <a:rPr lang="zh-TW" altLang="en-US" dirty="0"/>
+              <a:t>「⋯」這個符號可以使用任意數量的</a:t>
+            </a:r>
+            <a:r>
+              <a:rPr lang="en-US" altLang="zh-TW" dirty="0"/>
+              <a:t>HTML/CSS/JavaScript </a:t>
+            </a:r>
+            <a:r>
+              <a:rPr lang="zh-TW" altLang="en-US" dirty="0"/>
+              <a:t>或是其他的</a:t>
+            </a:r>
+            <a:r>
+              <a:rPr lang="en-US" altLang="zh-TW" dirty="0"/>
+              <a:t>(%%)</a:t>
+            </a:r>
+            <a:r>
+              <a:rPr lang="zh-TW" altLang="en-US" dirty="0"/>
+              <a:t>命</a:t>
+            </a:r>
+          </a:p>
+          <a:p>
+            <a:r>
+              <a:rPr lang="zh-TW" altLang="en-US" dirty="0"/>
+              <a:t>令取代</a:t>
+            </a:r>
+            <a:r>
+              <a:rPr lang="en-US" altLang="zh-TW" dirty="0"/>
+              <a:t>,</a:t>
+            </a:r>
+            <a:r>
+              <a:rPr lang="zh-TW" altLang="en-US" dirty="0"/>
+              <a:t>當然也可以是很多行的</a:t>
+            </a:r>
+            <a:r>
+              <a:rPr lang="en-US" altLang="zh-TW" dirty="0"/>
+              <a:t>HTML/CSS/JavaScript </a:t>
+            </a:r>
+            <a:r>
+              <a:rPr lang="zh-TW" altLang="en-US" dirty="0"/>
+              <a:t>程式碼。</a:t>
+            </a:r>
+            <a:endParaRPr lang="en-US" altLang="zh-TW" dirty="0"/>
+          </a:p>
+          <a:p>
+            <a:r>
+              <a:rPr lang="en-US" altLang="zh-TW" dirty="0"/>
+              <a:t>{% if car in cars %}</a:t>
+            </a:r>
+            <a:r>
+              <a:rPr lang="en-US" altLang="ko-KR" dirty="0"/>
+              <a:t> ... {% </a:t>
+            </a:r>
+            <a:r>
+              <a:rPr lang="en-US" altLang="zh-TW" dirty="0"/>
+              <a:t>endif %}</a:t>
+            </a:r>
+          </a:p>
+          <a:p>
+            <a:r>
+              <a:rPr lang="zh-TW" altLang="en-US" dirty="0"/>
+              <a:t>或是</a:t>
+            </a:r>
+          </a:p>
+          <a:p>
+            <a:r>
+              <a:rPr lang="en-US" altLang="zh-TW" dirty="0"/>
+              <a:t>{% if 'a' in '</a:t>
+            </a:r>
+            <a:r>
+              <a:rPr lang="en-US" altLang="zh-TW" dirty="0" err="1"/>
+              <a:t>abcdef</a:t>
+            </a:r>
+            <a:r>
+              <a:rPr lang="en-US" altLang="zh-TW" dirty="0"/>
+              <a:t>’ %} ... {% endif %}</a:t>
+            </a:r>
             <a:endParaRPr lang="zh-TW" altLang="en-US" dirty="0"/>
           </a:p>
         </p:txBody>
@@ -7701,7 +7250,7 @@
             <a:fld id="{027FE99C-3BAC-4305-ABBB-3890AB1B4510}" type="slidenum">
               <a:rPr lang="zh-TW" altLang="en-US" smtClean="0"/>
               <a:pPr/>
-              <a:t>59</a:t>
+              <a:t>58</a:t>
             </a:fld>
             <a:endParaRPr lang="zh-TW" altLang="en-US"/>
           </a:p>
@@ -7710,7 +7259,7 @@
     </p:spTree>
     <p:extLst>
       <p:ext uri="{BB962C8B-B14F-4D97-AF65-F5344CB8AC3E}">
-        <p14:creationId xmlns:p14="http://schemas.microsoft.com/office/powerpoint/2010/main" val="3567211556"/>
+        <p14:creationId xmlns:p14="http://schemas.microsoft.com/office/powerpoint/2010/main" val="1797854883"/>
       </p:ext>
     </p:extLst>
   </p:cSld>
@@ -7764,37 +7313,558 @@
           <a:bodyPr/>
           <a:lstStyle/>
           <a:p>
-            <a:r>
-              <a:rPr lang="en-US" altLang="zh-TW" dirty="0" err="1"/>
-              <a:t>bgcolor</a:t>
-            </a:r>
-            <a:r>
-              <a:rPr lang="zh-TW" altLang="en-US" dirty="0"/>
-              <a:t>可不加引號，就可直接看到顏色，網頁顯示結果相同</a:t>
-            </a:r>
-            <a:endParaRPr lang="en-US" altLang="zh-TW" dirty="0"/>
-          </a:p>
-          <a:p>
-            <a:r>
-              <a:rPr lang="zh-TW" altLang="en-US" dirty="0"/>
-              <a:t>先</a:t>
-            </a:r>
-            <a:r>
-              <a:rPr lang="en-US" altLang="zh-TW" dirty="0"/>
-              <a:t>show</a:t>
-            </a:r>
-            <a:r>
-              <a:rPr lang="zh-TW" altLang="en-US" dirty="0"/>
-              <a:t>結果，若</a:t>
-            </a:r>
-            <a:r>
-              <a:rPr lang="en-US" altLang="zh-TW" dirty="0"/>
-              <a:t>ok</a:t>
-            </a:r>
-            <a:r>
-              <a:rPr lang="zh-TW" altLang="en-US" dirty="0"/>
-              <a:t>再往下頁</a:t>
-            </a:r>
+            <a:pPr marL="0" marR="0" lvl="0" indent="0" algn="l" defTabSz="914400" rtl="0" eaLnBrk="1" fontAlgn="auto" latinLnBrk="0" hangingPunct="1">
+              <a:lnSpc>
+                <a:spcPts val="1425"/>
+              </a:lnSpc>
+              <a:spcBef>
+                <a:spcPts val="0"/>
+              </a:spcBef>
+              <a:spcAft>
+                <a:spcPts val="0"/>
+              </a:spcAft>
+              <a:buClrTx/>
+              <a:buSzTx/>
+              <a:buFontTx/>
+              <a:buNone/>
+              <a:tabLst/>
+              <a:defRPr/>
+            </a:pPr>
+            <a:r>
+              <a:rPr lang="zh-TW" altLang="en-US" b="0" dirty="0">
+                <a:solidFill>
+                  <a:srgbClr val="CDD3DE"/>
+                </a:solidFill>
+                <a:effectLst/>
+                <a:latin typeface="Consolas" panose="020B0609020204030204" pitchFamily="49" charset="0"/>
+              </a:rPr>
+              <a:t>以下放在</a:t>
+            </a:r>
+            <a:r>
+              <a:rPr lang="en-US" altLang="zh-TW" b="0" dirty="0">
+                <a:solidFill>
+                  <a:srgbClr val="5FB3B3"/>
+                </a:solidFill>
+                <a:effectLst/>
+                <a:latin typeface="Consolas" panose="020B0609020204030204" pitchFamily="49" charset="0"/>
+              </a:rPr>
+              <a:t>&lt;</a:t>
+            </a:r>
+            <a:r>
+              <a:rPr lang="en-US" altLang="zh-TW" b="0" dirty="0" err="1">
+                <a:solidFill>
+                  <a:srgbClr val="EB606B"/>
+                </a:solidFill>
+                <a:effectLst/>
+                <a:latin typeface="Consolas" panose="020B0609020204030204" pitchFamily="49" charset="0"/>
+              </a:rPr>
+              <a:t>iframe</a:t>
+            </a:r>
+            <a:r>
+              <a:rPr lang="en-US" altLang="zh-TW" b="0" dirty="0">
+                <a:solidFill>
+                  <a:srgbClr val="5FB3B3"/>
+                </a:solidFill>
+                <a:effectLst/>
+                <a:latin typeface="Consolas" panose="020B0609020204030204" pitchFamily="49" charset="0"/>
+              </a:rPr>
+              <a:t> </a:t>
+            </a:r>
+            <a:r>
+              <a:rPr lang="en-US" altLang="zh-TW" b="0" dirty="0">
+                <a:solidFill>
+                  <a:srgbClr val="BB80B3"/>
+                </a:solidFill>
+                <a:effectLst/>
+                <a:latin typeface="Consolas" panose="020B0609020204030204" pitchFamily="49" charset="0"/>
+              </a:rPr>
+              <a:t>width</a:t>
+            </a:r>
+            <a:r>
+              <a:rPr lang="en-US" altLang="zh-TW" b="0" dirty="0">
+                <a:solidFill>
+                  <a:srgbClr val="5FB3B3"/>
+                </a:solidFill>
+                <a:effectLst/>
+                <a:latin typeface="Consolas" panose="020B0609020204030204" pitchFamily="49" charset="0"/>
+              </a:rPr>
+              <a:t>=“</a:t>
+            </a:r>
+            <a:r>
+              <a:rPr lang="en-US" altLang="zh-TW" b="0" dirty="0">
+                <a:solidFill>
+                  <a:srgbClr val="99C794"/>
+                </a:solidFill>
+                <a:effectLst/>
+                <a:latin typeface="Consolas" panose="020B0609020204030204" pitchFamily="49" charset="0"/>
+              </a:rPr>
+              <a:t>560</a:t>
+            </a:r>
+            <a:r>
+              <a:rPr lang="en-US" altLang="zh-TW" b="0" dirty="0">
+                <a:solidFill>
+                  <a:srgbClr val="5FB3B3"/>
+                </a:solidFill>
+                <a:effectLst/>
+                <a:latin typeface="Consolas" panose="020B0609020204030204" pitchFamily="49" charset="0"/>
+              </a:rPr>
+              <a:t>“…</a:t>
+            </a:r>
+            <a:r>
+              <a:rPr lang="zh-TW" altLang="en-US" b="0" dirty="0">
+                <a:solidFill>
+                  <a:srgbClr val="5FB3B3"/>
+                </a:solidFill>
+                <a:effectLst/>
+                <a:latin typeface="Consolas" panose="020B0609020204030204" pitchFamily="49" charset="0"/>
+              </a:rPr>
+              <a:t>的</a:t>
+            </a:r>
+            <a:r>
+              <a:rPr lang="en-US" altLang="zh-TW" b="0" dirty="0">
+                <a:solidFill>
+                  <a:srgbClr val="5FB3B3"/>
+                </a:solidFill>
+                <a:effectLst/>
+                <a:latin typeface="Consolas" panose="020B0609020204030204" pitchFamily="49" charset="0"/>
+              </a:rPr>
+              <a:t>div</a:t>
+            </a:r>
+            <a:r>
+              <a:rPr lang="zh-TW" altLang="en-US" b="0" dirty="0">
+                <a:solidFill>
+                  <a:srgbClr val="5FB3B3"/>
+                </a:solidFill>
+                <a:effectLst/>
+                <a:latin typeface="Consolas" panose="020B0609020204030204" pitchFamily="49" charset="0"/>
+              </a:rPr>
+              <a:t>上方</a:t>
+            </a:r>
+            <a:endParaRPr lang="en-US" altLang="zh-TW" b="0" dirty="0">
+              <a:solidFill>
+                <a:srgbClr val="CDD3DE"/>
+              </a:solidFill>
+              <a:effectLst/>
+              <a:latin typeface="Consolas" panose="020B0609020204030204" pitchFamily="49" charset="0"/>
+            </a:endParaRPr>
+          </a:p>
+          <a:p>
+            <a:pPr>
+              <a:lnSpc>
+                <a:spcPts val="1425"/>
+              </a:lnSpc>
+            </a:pPr>
+            <a:r>
+              <a:rPr lang="en-US" altLang="zh-TW" b="0" dirty="0">
+                <a:solidFill>
+                  <a:srgbClr val="C594C5"/>
+                </a:solidFill>
+                <a:effectLst/>
+                <a:latin typeface="Consolas" panose="020B0609020204030204" pitchFamily="49" charset="0"/>
+              </a:rPr>
+              <a:t>{% if </a:t>
+            </a:r>
+            <a:r>
+              <a:rPr lang="en-US" altLang="zh-TW" b="0" dirty="0">
+                <a:solidFill>
+                  <a:srgbClr val="99C794"/>
+                </a:solidFill>
+                <a:effectLst/>
+                <a:latin typeface="Consolas" panose="020B0609020204030204" pitchFamily="49" charset="0"/>
+              </a:rPr>
+              <a:t>hour</a:t>
+            </a:r>
+            <a:r>
+              <a:rPr lang="en-US" altLang="zh-TW" b="0" dirty="0">
+                <a:solidFill>
+                  <a:srgbClr val="C594C5"/>
+                </a:solidFill>
+                <a:effectLst/>
+                <a:latin typeface="Consolas" panose="020B0609020204030204" pitchFamily="49" charset="0"/>
+              </a:rPr>
+              <a:t> </a:t>
+            </a:r>
+            <a:r>
+              <a:rPr lang="en-US" altLang="zh-TW" b="0" dirty="0">
+                <a:solidFill>
+                  <a:srgbClr val="5FB3B3"/>
+                </a:solidFill>
+                <a:effectLst/>
+                <a:latin typeface="Consolas" panose="020B0609020204030204" pitchFamily="49" charset="0"/>
+              </a:rPr>
+              <a:t>&gt;</a:t>
+            </a:r>
+            <a:r>
+              <a:rPr lang="en-US" altLang="zh-TW" b="0" dirty="0">
+                <a:solidFill>
+                  <a:srgbClr val="C594C5"/>
+                </a:solidFill>
+                <a:effectLst/>
+                <a:latin typeface="Consolas" panose="020B0609020204030204" pitchFamily="49" charset="0"/>
+              </a:rPr>
+              <a:t> </a:t>
+            </a:r>
+            <a:r>
+              <a:rPr lang="en-US" altLang="zh-TW" b="0" dirty="0">
+                <a:solidFill>
+                  <a:srgbClr val="99C794"/>
+                </a:solidFill>
+                <a:effectLst/>
+                <a:latin typeface="Consolas" panose="020B0609020204030204" pitchFamily="49" charset="0"/>
+              </a:rPr>
+              <a:t>18</a:t>
+            </a:r>
+            <a:r>
+              <a:rPr lang="en-US" altLang="zh-TW" b="0" dirty="0">
+                <a:solidFill>
+                  <a:srgbClr val="C594C5"/>
+                </a:solidFill>
+                <a:effectLst/>
+                <a:latin typeface="Consolas" panose="020B0609020204030204" pitchFamily="49" charset="0"/>
+              </a:rPr>
+              <a:t> %}</a:t>
+            </a:r>
+            <a:endParaRPr lang="en-US" altLang="zh-TW" b="0" dirty="0">
+              <a:solidFill>
+                <a:srgbClr val="CDD3DE"/>
+              </a:solidFill>
+              <a:effectLst/>
+              <a:latin typeface="Consolas" panose="020B0609020204030204" pitchFamily="49" charset="0"/>
+            </a:endParaRPr>
+          </a:p>
+          <a:p>
+            <a:pPr>
+              <a:lnSpc>
+                <a:spcPts val="1425"/>
+              </a:lnSpc>
+            </a:pPr>
+            <a:r>
+              <a:rPr lang="en-US" altLang="zh-TW" b="0" dirty="0">
+                <a:solidFill>
+                  <a:srgbClr val="CDD3DE"/>
+                </a:solidFill>
+                <a:effectLst/>
+                <a:latin typeface="Consolas" panose="020B0609020204030204" pitchFamily="49" charset="0"/>
+              </a:rPr>
+              <a:t>        </a:t>
+            </a:r>
+            <a:r>
+              <a:rPr lang="zh-TW" altLang="en-US" b="0" dirty="0">
+                <a:solidFill>
+                  <a:srgbClr val="CDD3DE"/>
+                </a:solidFill>
+                <a:effectLst/>
+                <a:latin typeface="Consolas" panose="020B0609020204030204" pitchFamily="49" charset="0"/>
+              </a:rPr>
+              <a:t>晚安 </a:t>
+            </a:r>
+          </a:p>
+          <a:p>
+            <a:pPr>
+              <a:lnSpc>
+                <a:spcPts val="1425"/>
+              </a:lnSpc>
+            </a:pPr>
+            <a:r>
+              <a:rPr lang="en-US" altLang="zh-TW" b="0" dirty="0">
+                <a:solidFill>
+                  <a:srgbClr val="C594C5"/>
+                </a:solidFill>
+                <a:effectLst/>
+                <a:latin typeface="Consolas" panose="020B0609020204030204" pitchFamily="49" charset="0"/>
+              </a:rPr>
+              <a:t>{% </a:t>
+            </a:r>
+            <a:r>
+              <a:rPr lang="en-US" altLang="zh-TW" b="0" dirty="0" err="1">
+                <a:solidFill>
+                  <a:srgbClr val="C594C5"/>
+                </a:solidFill>
+                <a:effectLst/>
+                <a:latin typeface="Consolas" panose="020B0609020204030204" pitchFamily="49" charset="0"/>
+              </a:rPr>
+              <a:t>elif</a:t>
+            </a:r>
+            <a:r>
+              <a:rPr lang="en-US" altLang="zh-TW" b="0" dirty="0">
+                <a:solidFill>
+                  <a:srgbClr val="C594C5"/>
+                </a:solidFill>
+                <a:effectLst/>
+                <a:latin typeface="Consolas" panose="020B0609020204030204" pitchFamily="49" charset="0"/>
+              </a:rPr>
+              <a:t> </a:t>
+            </a:r>
+            <a:r>
+              <a:rPr lang="en-US" altLang="zh-TW" b="0" dirty="0">
+                <a:solidFill>
+                  <a:srgbClr val="99C794"/>
+                </a:solidFill>
+                <a:effectLst/>
+                <a:latin typeface="Consolas" panose="020B0609020204030204" pitchFamily="49" charset="0"/>
+              </a:rPr>
+              <a:t>hour</a:t>
+            </a:r>
+            <a:r>
+              <a:rPr lang="en-US" altLang="zh-TW" b="0" dirty="0">
+                <a:solidFill>
+                  <a:srgbClr val="C594C5"/>
+                </a:solidFill>
+                <a:effectLst/>
+                <a:latin typeface="Consolas" panose="020B0609020204030204" pitchFamily="49" charset="0"/>
+              </a:rPr>
+              <a:t> </a:t>
+            </a:r>
+            <a:r>
+              <a:rPr lang="en-US" altLang="zh-TW" b="0" dirty="0">
+                <a:solidFill>
+                  <a:srgbClr val="5FB3B3"/>
+                </a:solidFill>
+                <a:effectLst/>
+                <a:latin typeface="Consolas" panose="020B0609020204030204" pitchFamily="49" charset="0"/>
+              </a:rPr>
+              <a:t>&lt;</a:t>
+            </a:r>
+            <a:r>
+              <a:rPr lang="en-US" altLang="zh-TW" b="0" dirty="0">
+                <a:solidFill>
+                  <a:srgbClr val="C594C5"/>
+                </a:solidFill>
+                <a:effectLst/>
+                <a:latin typeface="Consolas" panose="020B0609020204030204" pitchFamily="49" charset="0"/>
+              </a:rPr>
+              <a:t> </a:t>
+            </a:r>
+            <a:r>
+              <a:rPr lang="en-US" altLang="zh-TW" b="0" dirty="0">
+                <a:solidFill>
+                  <a:srgbClr val="99C794"/>
+                </a:solidFill>
+                <a:effectLst/>
+                <a:latin typeface="Consolas" panose="020B0609020204030204" pitchFamily="49" charset="0"/>
+              </a:rPr>
+              <a:t>10</a:t>
+            </a:r>
+            <a:r>
+              <a:rPr lang="en-US" altLang="zh-TW" b="0" dirty="0">
+                <a:solidFill>
+                  <a:srgbClr val="C594C5"/>
+                </a:solidFill>
+                <a:effectLst/>
+                <a:latin typeface="Consolas" panose="020B0609020204030204" pitchFamily="49" charset="0"/>
+              </a:rPr>
+              <a:t> %}</a:t>
+            </a:r>
+            <a:endParaRPr lang="en-US" altLang="zh-TW" b="0" dirty="0">
+              <a:solidFill>
+                <a:srgbClr val="CDD3DE"/>
+              </a:solidFill>
+              <a:effectLst/>
+              <a:latin typeface="Consolas" panose="020B0609020204030204" pitchFamily="49" charset="0"/>
+            </a:endParaRPr>
+          </a:p>
+          <a:p>
+            <a:pPr>
+              <a:lnSpc>
+                <a:spcPts val="1425"/>
+              </a:lnSpc>
+            </a:pPr>
+            <a:r>
+              <a:rPr lang="en-US" altLang="zh-TW" b="0" dirty="0">
+                <a:solidFill>
+                  <a:srgbClr val="CDD3DE"/>
+                </a:solidFill>
+                <a:effectLst/>
+                <a:latin typeface="Consolas" panose="020B0609020204030204" pitchFamily="49" charset="0"/>
+              </a:rPr>
+              <a:t>        </a:t>
+            </a:r>
+            <a:r>
+              <a:rPr lang="zh-TW" altLang="en-US" b="0" dirty="0">
+                <a:solidFill>
+                  <a:srgbClr val="CDD3DE"/>
+                </a:solidFill>
+                <a:effectLst/>
+                <a:latin typeface="Consolas" panose="020B0609020204030204" pitchFamily="49" charset="0"/>
+              </a:rPr>
+              <a:t>早安</a:t>
+            </a:r>
+          </a:p>
+          <a:p>
+            <a:pPr>
+              <a:lnSpc>
+                <a:spcPts val="1425"/>
+              </a:lnSpc>
+            </a:pPr>
+            <a:r>
+              <a:rPr lang="en-US" altLang="zh-TW" b="0" dirty="0">
+                <a:solidFill>
+                  <a:srgbClr val="C594C5"/>
+                </a:solidFill>
+                <a:effectLst/>
+                <a:latin typeface="Consolas" panose="020B0609020204030204" pitchFamily="49" charset="0"/>
+              </a:rPr>
+              <a:t>{% else %}</a:t>
+            </a:r>
+            <a:endParaRPr lang="en-US" altLang="zh-TW" b="0" dirty="0">
+              <a:solidFill>
+                <a:srgbClr val="CDD3DE"/>
+              </a:solidFill>
+              <a:effectLst/>
+              <a:latin typeface="Consolas" panose="020B0609020204030204" pitchFamily="49" charset="0"/>
+            </a:endParaRPr>
+          </a:p>
+          <a:p>
+            <a:pPr>
+              <a:lnSpc>
+                <a:spcPts val="1425"/>
+              </a:lnSpc>
+            </a:pPr>
+            <a:r>
+              <a:rPr lang="en-US" altLang="zh-TW" b="0" dirty="0">
+                <a:solidFill>
+                  <a:srgbClr val="CDD3DE"/>
+                </a:solidFill>
+                <a:effectLst/>
+                <a:latin typeface="Consolas" panose="020B0609020204030204" pitchFamily="49" charset="0"/>
+              </a:rPr>
+              <a:t>        </a:t>
+            </a:r>
+            <a:r>
+              <a:rPr lang="zh-TW" altLang="en-US" b="0" dirty="0">
+                <a:solidFill>
+                  <a:srgbClr val="CDD3DE"/>
+                </a:solidFill>
+                <a:effectLst/>
+                <a:latin typeface="Consolas" panose="020B0609020204030204" pitchFamily="49" charset="0"/>
+              </a:rPr>
+              <a:t>午安        </a:t>
+            </a:r>
+          </a:p>
+          <a:p>
+            <a:pPr>
+              <a:lnSpc>
+                <a:spcPts val="1425"/>
+              </a:lnSpc>
+            </a:pPr>
+            <a:r>
+              <a:rPr lang="en-US" altLang="zh-TW" b="0" dirty="0">
+                <a:solidFill>
+                  <a:srgbClr val="C594C5"/>
+                </a:solidFill>
+                <a:effectLst/>
+                <a:latin typeface="Consolas" panose="020B0609020204030204" pitchFamily="49" charset="0"/>
+              </a:rPr>
+              <a:t>{% endif %}</a:t>
+            </a:r>
+            <a:endParaRPr lang="en-US" altLang="zh-TW" b="0" dirty="0">
+              <a:solidFill>
+                <a:srgbClr val="CDD3DE"/>
+              </a:solidFill>
+              <a:effectLst/>
+              <a:latin typeface="Consolas" panose="020B0609020204030204" pitchFamily="49" charset="0"/>
+            </a:endParaRPr>
+          </a:p>
+          <a:p>
+            <a:pPr>
+              <a:lnSpc>
+                <a:spcPts val="1425"/>
+              </a:lnSpc>
+            </a:pPr>
+            <a:r>
+              <a:rPr lang="en-US" altLang="zh-TW" b="0" dirty="0">
+                <a:solidFill>
+                  <a:srgbClr val="5FB3B3"/>
+                </a:solidFill>
+                <a:effectLst/>
+                <a:latin typeface="Consolas" panose="020B0609020204030204" pitchFamily="49" charset="0"/>
+              </a:rPr>
+              <a:t>&lt;</a:t>
+            </a:r>
+            <a:r>
+              <a:rPr lang="en-US" altLang="zh-TW" b="0" dirty="0" err="1">
+                <a:solidFill>
+                  <a:srgbClr val="EB606B"/>
+                </a:solidFill>
+                <a:effectLst/>
+                <a:latin typeface="Consolas" panose="020B0609020204030204" pitchFamily="49" charset="0"/>
+              </a:rPr>
+              <a:t>br</a:t>
+            </a:r>
+            <a:r>
+              <a:rPr lang="en-US" altLang="zh-TW" b="0" dirty="0">
+                <a:solidFill>
+                  <a:srgbClr val="5FB3B3"/>
+                </a:solidFill>
+                <a:effectLst/>
+                <a:latin typeface="Consolas" panose="020B0609020204030204" pitchFamily="49" charset="0"/>
+              </a:rPr>
+              <a:t>&gt;</a:t>
+            </a:r>
+            <a:endParaRPr lang="en-US" altLang="zh-TW" b="0" dirty="0">
+              <a:solidFill>
+                <a:srgbClr val="CDD3DE"/>
+              </a:solidFill>
+              <a:effectLst/>
+              <a:latin typeface="Consolas" panose="020B0609020204030204" pitchFamily="49" charset="0"/>
+            </a:endParaRPr>
+          </a:p>
+          <a:p>
+            <a:pPr>
+              <a:lnSpc>
+                <a:spcPts val="1425"/>
+              </a:lnSpc>
+            </a:pPr>
+            <a:r>
+              <a:rPr lang="en-US" altLang="zh-TW" b="0" dirty="0">
+                <a:solidFill>
+                  <a:srgbClr val="CDD3DE"/>
+                </a:solidFill>
+                <a:effectLst/>
+                <a:latin typeface="Consolas" panose="020B0609020204030204" pitchFamily="49" charset="0"/>
+              </a:rPr>
+              <a:t> </a:t>
+            </a:r>
+            <a:r>
+              <a:rPr lang="en-US" altLang="zh-TW" b="0" dirty="0">
+                <a:solidFill>
+                  <a:srgbClr val="C594C5"/>
+                </a:solidFill>
+                <a:effectLst/>
+                <a:latin typeface="Consolas" panose="020B0609020204030204" pitchFamily="49" charset="0"/>
+              </a:rPr>
+              <a:t>{% </a:t>
+            </a:r>
+            <a:r>
+              <a:rPr lang="en-US" altLang="zh-TW" b="0" dirty="0" err="1">
+                <a:solidFill>
+                  <a:srgbClr val="C594C5"/>
+                </a:solidFill>
+                <a:effectLst/>
+                <a:latin typeface="Consolas" panose="020B0609020204030204" pitchFamily="49" charset="0"/>
+              </a:rPr>
+              <a:t>endblock</a:t>
+            </a:r>
+            <a:r>
+              <a:rPr lang="en-US" altLang="zh-TW" b="0" dirty="0">
+                <a:solidFill>
+                  <a:srgbClr val="C594C5"/>
+                </a:solidFill>
+                <a:effectLst/>
+                <a:latin typeface="Consolas" panose="020B0609020204030204" pitchFamily="49" charset="0"/>
+              </a:rPr>
+              <a:t> %}</a:t>
+            </a:r>
+            <a:endParaRPr lang="en-US" altLang="zh-TW" b="0" dirty="0">
+              <a:solidFill>
+                <a:srgbClr val="CDD3DE"/>
+              </a:solidFill>
+              <a:effectLst/>
+              <a:latin typeface="Consolas" panose="020B0609020204030204" pitchFamily="49" charset="0"/>
+            </a:endParaRPr>
+          </a:p>
+          <a:p>
+            <a:endParaRPr lang="zh-TW" altLang="en-US" dirty="0"/>
           </a:p>
         </p:txBody>
       </p:sp>
@@ -7816,7 +7886,7 @@
             <a:fld id="{027FE99C-3BAC-4305-ABBB-3890AB1B4510}" type="slidenum">
               <a:rPr lang="zh-TW" altLang="en-US" smtClean="0"/>
               <a:pPr/>
-              <a:t>63</a:t>
+              <a:t>59</a:t>
             </a:fld>
             <a:endParaRPr lang="zh-TW" altLang="en-US"/>
           </a:p>
@@ -7825,7 +7895,7 @@
     </p:spTree>
     <p:extLst>
       <p:ext uri="{BB962C8B-B14F-4D97-AF65-F5344CB8AC3E}">
-        <p14:creationId xmlns:p14="http://schemas.microsoft.com/office/powerpoint/2010/main" val="2879091551"/>
+        <p14:creationId xmlns:p14="http://schemas.microsoft.com/office/powerpoint/2010/main" val="3567211556"/>
       </p:ext>
     </p:extLst>
   </p:cSld>
@@ -7879,36 +7949,37 @@
           <a:bodyPr/>
           <a:lstStyle/>
           <a:p>
-            <a:pPr marL="0" marR="0" lvl="0" indent="0" algn="l" defTabSz="914400" rtl="0" eaLnBrk="1" fontAlgn="auto" latinLnBrk="0" hangingPunct="1">
-              <a:lnSpc>
-                <a:spcPct val="100000"/>
-              </a:lnSpc>
-              <a:spcBef>
-                <a:spcPts val="0"/>
-              </a:spcBef>
-              <a:spcAft>
-                <a:spcPts val="0"/>
-              </a:spcAft>
-              <a:buClrTx/>
-              <a:buSzTx/>
-              <a:buFontTx/>
-              <a:buNone/>
-              <a:tabLst/>
-              <a:defRPr/>
-            </a:pPr>
-            <a:r>
-              <a:rPr lang="en-US" altLang="zh-TW" b="0" dirty="0">
-                <a:solidFill>
-                  <a:srgbClr val="CCCCCC"/>
-                </a:solidFill>
-                <a:effectLst/>
-                <a:latin typeface="Consolas" panose="020B0609020204030204" pitchFamily="49" charset="0"/>
-              </a:rPr>
-              <a:t>tr&gt;td*2</a:t>
-            </a:r>
-          </a:p>
-          <a:p>
-            <a:endParaRPr lang="zh-TW" altLang="en-US" dirty="0"/>
+            <a:r>
+              <a:rPr lang="en-US" altLang="zh-TW" dirty="0" err="1"/>
+              <a:t>bgcolor</a:t>
+            </a:r>
+            <a:r>
+              <a:rPr lang="zh-TW" altLang="en-US" dirty="0"/>
+              <a:t>可不加引號，就可直接看到顏色，網頁顯示結果相同</a:t>
+            </a:r>
+            <a:endParaRPr lang="en-US" altLang="zh-TW" dirty="0"/>
+          </a:p>
+          <a:p>
+            <a:r>
+              <a:rPr lang="zh-TW" altLang="en-US" dirty="0"/>
+              <a:t>先</a:t>
+            </a:r>
+            <a:r>
+              <a:rPr lang="en-US" altLang="zh-TW" dirty="0"/>
+              <a:t>show</a:t>
+            </a:r>
+            <a:r>
+              <a:rPr lang="zh-TW" altLang="en-US" dirty="0"/>
+              <a:t>結果，若</a:t>
+            </a:r>
+            <a:r>
+              <a:rPr lang="en-US" altLang="zh-TW" dirty="0"/>
+              <a:t>ok</a:t>
+            </a:r>
+            <a:r>
+              <a:rPr lang="zh-TW" altLang="en-US" dirty="0"/>
+              <a:t>再往下頁</a:t>
+            </a:r>
           </a:p>
         </p:txBody>
       </p:sp>
@@ -7930,7 +8001,7 @@
             <a:fld id="{027FE99C-3BAC-4305-ABBB-3890AB1B4510}" type="slidenum">
               <a:rPr lang="zh-TW" altLang="en-US" smtClean="0"/>
               <a:pPr/>
-              <a:t>64</a:t>
+              <a:t>63</a:t>
             </a:fld>
             <a:endParaRPr lang="zh-TW" altLang="en-US"/>
           </a:p>
@@ -7939,7 +8010,7 @@
     </p:spTree>
     <p:extLst>
       <p:ext uri="{BB962C8B-B14F-4D97-AF65-F5344CB8AC3E}">
-        <p14:creationId xmlns:p14="http://schemas.microsoft.com/office/powerpoint/2010/main" val="3174356365"/>
+        <p14:creationId xmlns:p14="http://schemas.microsoft.com/office/powerpoint/2010/main" val="2879091551"/>
       </p:ext>
     </p:extLst>
   </p:cSld>
@@ -7993,22 +8064,35 @@
           <a:bodyPr/>
           <a:lstStyle/>
           <a:p>
-            <a:r>
-              <a:rPr lang="zh-TW" altLang="en-US" dirty="0"/>
-              <a:t>練習：可試看看套用</a:t>
-            </a:r>
-            <a:r>
-              <a:rPr lang="en-US" altLang="zh-TW" dirty="0"/>
-              <a:t>base-html</a:t>
-            </a:r>
-            <a:r>
-              <a:rPr lang="zh-TW" altLang="en-US" dirty="0"/>
-              <a:t>的</a:t>
-            </a:r>
-            <a:r>
-              <a:rPr lang="en-US" altLang="zh-TW" dirty="0"/>
-              <a:t>bs</a:t>
-            </a:r>
+            <a:pPr marL="0" marR="0" lvl="0" indent="0" algn="l" defTabSz="914400" rtl="0" eaLnBrk="1" fontAlgn="auto" latinLnBrk="0" hangingPunct="1">
+              <a:lnSpc>
+                <a:spcPct val="100000"/>
+              </a:lnSpc>
+              <a:spcBef>
+                <a:spcPts val="0"/>
+              </a:spcBef>
+              <a:spcAft>
+                <a:spcPts val="0"/>
+              </a:spcAft>
+              <a:buClrTx/>
+              <a:buSzTx/>
+              <a:buFontTx/>
+              <a:buNone/>
+              <a:tabLst/>
+              <a:defRPr/>
+            </a:pPr>
+            <a:r>
+              <a:rPr lang="en-US" altLang="zh-TW" b="0" dirty="0">
+                <a:solidFill>
+                  <a:srgbClr val="CCCCCC"/>
+                </a:solidFill>
+                <a:effectLst/>
+                <a:latin typeface="Consolas" panose="020B0609020204030204" pitchFamily="49" charset="0"/>
+              </a:rPr>
+              <a:t>tr&gt;td*2</a:t>
+            </a:r>
+          </a:p>
+          <a:p>
             <a:endParaRPr lang="zh-TW" altLang="en-US" dirty="0"/>
           </a:p>
         </p:txBody>
@@ -8031,7 +8115,7 @@
             <a:fld id="{027FE99C-3BAC-4305-ABBB-3890AB1B4510}" type="slidenum">
               <a:rPr lang="zh-TW" altLang="en-US" smtClean="0"/>
               <a:pPr/>
-              <a:t>65</a:t>
+              <a:t>64</a:t>
             </a:fld>
             <a:endParaRPr lang="zh-TW" altLang="en-US"/>
           </a:p>
@@ -8040,7 +8124,7 @@
     </p:spTree>
     <p:extLst>
       <p:ext uri="{BB962C8B-B14F-4D97-AF65-F5344CB8AC3E}">
-        <p14:creationId xmlns:p14="http://schemas.microsoft.com/office/powerpoint/2010/main" val="1613649891"/>
+        <p14:creationId xmlns:p14="http://schemas.microsoft.com/office/powerpoint/2010/main" val="3174356365"/>
       </p:ext>
     </p:extLst>
   </p:cSld>
@@ -8094,6 +8178,107 @@
           <a:bodyPr/>
           <a:lstStyle/>
           <a:p>
+            <a:r>
+              <a:rPr lang="zh-TW" altLang="en-US" dirty="0"/>
+              <a:t>練習：可試看看套用</a:t>
+            </a:r>
+            <a:r>
+              <a:rPr lang="en-US" altLang="zh-TW" dirty="0"/>
+              <a:t>base-html</a:t>
+            </a:r>
+            <a:r>
+              <a:rPr lang="zh-TW" altLang="en-US" dirty="0"/>
+              <a:t>的</a:t>
+            </a:r>
+            <a:r>
+              <a:rPr lang="en-US" altLang="zh-TW" dirty="0"/>
+              <a:t>bs</a:t>
+            </a:r>
+            <a:endParaRPr lang="zh-TW" altLang="en-US" dirty="0"/>
+          </a:p>
+        </p:txBody>
+      </p:sp>
+      <p:sp>
+        <p:nvSpPr>
+          <p:cNvPr id="4" name="投影片編號版面配置區 3"/>
+          <p:cNvSpPr>
+            <a:spLocks noGrp="1"/>
+          </p:cNvSpPr>
+          <p:nvPr>
+            <p:ph type="sldNum" sz="quarter" idx="5"/>
+          </p:nvPr>
+        </p:nvSpPr>
+        <p:spPr/>
+        <p:txBody>
+          <a:bodyPr/>
+          <a:lstStyle/>
+          <a:p>
+            <a:fld id="{027FE99C-3BAC-4305-ABBB-3890AB1B4510}" type="slidenum">
+              <a:rPr lang="zh-TW" altLang="en-US" smtClean="0"/>
+              <a:pPr/>
+              <a:t>65</a:t>
+            </a:fld>
+            <a:endParaRPr lang="zh-TW" altLang="en-US"/>
+          </a:p>
+        </p:txBody>
+      </p:sp>
+    </p:spTree>
+    <p:extLst>
+      <p:ext uri="{BB962C8B-B14F-4D97-AF65-F5344CB8AC3E}">
+        <p14:creationId xmlns:p14="http://schemas.microsoft.com/office/powerpoint/2010/main" val="1613649891"/>
+      </p:ext>
+    </p:extLst>
+  </p:cSld>
+  <p:clrMapOvr>
+    <a:masterClrMapping/>
+  </p:clrMapOvr>
+</p:notes>
+</file>
+
+<file path=ppt/notesSlides/notesSlide35.xml><?xml version="1.0" encoding="utf-8"?>
+<p:notes xmlns:a="http://schemas.openxmlformats.org/drawingml/2006/main" xmlns:r="http://schemas.openxmlformats.org/officeDocument/2006/relationships" xmlns:p="http://schemas.openxmlformats.org/presentationml/2006/main">
+  <p:cSld>
+    <p:spTree>
+      <p:nvGrpSpPr>
+        <p:cNvPr id="1" name=""/>
+        <p:cNvGrpSpPr/>
+        <p:nvPr/>
+      </p:nvGrpSpPr>
+      <p:grpSpPr>
+        <a:xfrm>
+          <a:off x="0" y="0"/>
+          <a:ext cx="0" cy="0"/>
+          <a:chOff x="0" y="0"/>
+          <a:chExt cx="0" cy="0"/>
+        </a:xfrm>
+      </p:grpSpPr>
+      <p:sp>
+        <p:nvSpPr>
+          <p:cNvPr id="2" name="投影片影像版面配置區 1"/>
+          <p:cNvSpPr>
+            <a:spLocks noGrp="1" noRot="1" noChangeAspect="1"/>
+          </p:cNvSpPr>
+          <p:nvPr>
+            <p:ph type="sldImg"/>
+          </p:nvPr>
+        </p:nvSpPr>
+        <p:spPr/>
+      </p:sp>
+      <p:sp>
+        <p:nvSpPr>
+          <p:cNvPr id="3" name="備忘稿版面配置區 2"/>
+          <p:cNvSpPr>
+            <a:spLocks noGrp="1"/>
+          </p:cNvSpPr>
+          <p:nvPr>
+            <p:ph type="body" idx="1"/>
+          </p:nvPr>
+        </p:nvSpPr>
+        <p:spPr/>
+        <p:txBody>
+          <a:bodyPr/>
+          <a:lstStyle/>
+          <a:p>
             <a:pPr>
               <a:lnSpc>
                 <a:spcPts val="1425"/>
@@ -8417,7 +8602,7 @@
 </p:notes>
 </file>
 
-<file path=ppt/notesSlides/notesSlide35.xml><?xml version="1.0" encoding="utf-8"?>
+<file path=ppt/notesSlides/notesSlide36.xml><?xml version="1.0" encoding="utf-8"?>
 <p:notes xmlns:a="http://schemas.openxmlformats.org/drawingml/2006/main" xmlns:r="http://schemas.openxmlformats.org/officeDocument/2006/relationships" xmlns:p="http://schemas.openxmlformats.org/presentationml/2006/main">
   <p:cSld>
     <p:spTree>
@@ -8808,7 +8993,7 @@
             </a:r>
             <a:r>
               <a:rPr lang="zh-TW" altLang="en-US" dirty="0"/>
-              <a:t>留在</a:t>
+              <a:t>標籤留在</a:t>
             </a:r>
             <a:r>
               <a:rPr lang="en-US" altLang="zh-TW" dirty="0"/>
@@ -8816,7 +9001,7 @@
             </a:r>
             <a:r>
               <a:rPr lang="zh-TW" altLang="en-US" dirty="0"/>
-              <a:t>以方便做全局設計，只有會變的內容拿出去外面的子樣板</a:t>
+              <a:t>以方便做全局設計，只有標籤內會變的內容拿出去外面的子樣板</a:t>
             </a:r>
           </a:p>
         </p:txBody>
@@ -8991,7 +9176,7 @@
             </a:r>
             <a:r>
               <a:rPr lang="zh-TW" altLang="en-US" dirty="0"/>
-              <a:t>的文章內容，不要改</a:t>
+              <a:t>的文章內容，先不要改</a:t>
             </a:r>
             <a:r>
               <a:rPr lang="en-US" altLang="zh-TW" dirty="0"/>
@@ -9238,6 +9423,134 @@
           <a:p>
             <a:r>
               <a:rPr lang="zh-TW" altLang="en-US" dirty="0"/>
+              <a:t>原則上：</a:t>
+            </a:r>
+            <a:r>
+              <a:rPr lang="en-US" altLang="zh-TW" dirty="0"/>
+              <a:t>block</a:t>
+            </a:r>
+            <a:r>
+              <a:rPr lang="zh-TW" altLang="en-US" dirty="0"/>
+              <a:t>的外面沒有標籤</a:t>
+            </a:r>
+            <a:r>
+              <a:rPr lang="en-US" altLang="zh-TW" dirty="0"/>
+              <a:t>(</a:t>
+            </a:r>
+            <a:r>
+              <a:rPr lang="zh-TW" altLang="en-US" dirty="0"/>
+              <a:t>因為由</a:t>
+            </a:r>
+            <a:r>
+              <a:rPr lang="en-US" altLang="zh-TW" dirty="0"/>
+              <a:t>base</a:t>
+            </a:r>
+            <a:r>
+              <a:rPr lang="zh-TW" altLang="en-US" dirty="0"/>
+              <a:t>來決定整個網頁結構</a:t>
+            </a:r>
+            <a:r>
+              <a:rPr lang="en-US" altLang="zh-TW" dirty="0"/>
+              <a:t>)</a:t>
+            </a:r>
+            <a:r>
+              <a:rPr lang="zh-TW" altLang="en-US" dirty="0"/>
+              <a:t>，只有</a:t>
+            </a:r>
+            <a:r>
+              <a:rPr lang="en-US" altLang="zh-TW" dirty="0"/>
+              <a:t>block</a:t>
+            </a:r>
+            <a:r>
+              <a:rPr lang="zh-TW" altLang="en-US" dirty="0"/>
+              <a:t>內才會有標籤</a:t>
+            </a:r>
+          </a:p>
+        </p:txBody>
+      </p:sp>
+      <p:sp>
+        <p:nvSpPr>
+          <p:cNvPr id="4" name="投影片編號版面配置區 3"/>
+          <p:cNvSpPr>
+            <a:spLocks noGrp="1"/>
+          </p:cNvSpPr>
+          <p:nvPr>
+            <p:ph type="sldNum" sz="quarter" idx="5"/>
+          </p:nvPr>
+        </p:nvSpPr>
+        <p:spPr/>
+        <p:txBody>
+          <a:bodyPr/>
+          <a:lstStyle/>
+          <a:p>
+            <a:fld id="{027FE99C-3BAC-4305-ABBB-3890AB1B4510}" type="slidenum">
+              <a:rPr lang="zh-TW" altLang="en-US" smtClean="0"/>
+              <a:pPr/>
+              <a:t>18</a:t>
+            </a:fld>
+            <a:endParaRPr lang="zh-TW" altLang="en-US"/>
+          </a:p>
+        </p:txBody>
+      </p:sp>
+    </p:spTree>
+    <p:extLst>
+      <p:ext uri="{BB962C8B-B14F-4D97-AF65-F5344CB8AC3E}">
+        <p14:creationId xmlns:p14="http://schemas.microsoft.com/office/powerpoint/2010/main" val="3043243098"/>
+      </p:ext>
+    </p:extLst>
+  </p:cSld>
+  <p:clrMapOvr>
+    <a:masterClrMapping/>
+  </p:clrMapOvr>
+</p:notes>
+</file>
+
+<file path=ppt/notesSlides/notesSlide7.xml><?xml version="1.0" encoding="utf-8"?>
+<p:notes xmlns:a="http://schemas.openxmlformats.org/drawingml/2006/main" xmlns:r="http://schemas.openxmlformats.org/officeDocument/2006/relationships" xmlns:p="http://schemas.openxmlformats.org/presentationml/2006/main">
+  <p:cSld>
+    <p:spTree>
+      <p:nvGrpSpPr>
+        <p:cNvPr id="1" name=""/>
+        <p:cNvGrpSpPr/>
+        <p:nvPr/>
+      </p:nvGrpSpPr>
+      <p:grpSpPr>
+        <a:xfrm>
+          <a:off x="0" y="0"/>
+          <a:ext cx="0" cy="0"/>
+          <a:chOff x="0" y="0"/>
+          <a:chExt cx="0" cy="0"/>
+        </a:xfrm>
+      </p:grpSpPr>
+      <p:sp>
+        <p:nvSpPr>
+          <p:cNvPr id="2" name="投影片影像版面配置區 1"/>
+          <p:cNvSpPr>
+            <a:spLocks noGrp="1" noRot="1" noChangeAspect="1"/>
+          </p:cNvSpPr>
+          <p:nvPr>
+            <p:ph type="sldImg"/>
+          </p:nvPr>
+        </p:nvSpPr>
+        <p:spPr/>
+      </p:sp>
+      <p:sp>
+        <p:nvSpPr>
+          <p:cNvPr id="3" name="備忘稿版面配置區 2"/>
+          <p:cNvSpPr>
+            <a:spLocks noGrp="1"/>
+          </p:cNvSpPr>
+          <p:nvPr>
+            <p:ph type="body" idx="1"/>
+          </p:nvPr>
+        </p:nvSpPr>
+        <p:spPr/>
+        <p:txBody>
+          <a:bodyPr/>
+          <a:lstStyle/>
+          <a:p>
+            <a:r>
+              <a:rPr lang="zh-TW" altLang="en-US" dirty="0"/>
               <a:t>給學生練習</a:t>
             </a:r>
           </a:p>
@@ -9339,7 +9652,7 @@
 </p:notes>
 </file>
 
-<file path=ppt/notesSlides/notesSlide7.xml><?xml version="1.0" encoding="utf-8"?>
+<file path=ppt/notesSlides/notesSlide8.xml><?xml version="1.0" encoding="utf-8"?>
 <p:notes xmlns:a="http://schemas.openxmlformats.org/drawingml/2006/main" xmlns:r="http://schemas.openxmlformats.org/officeDocument/2006/relationships" xmlns:p="http://schemas.openxmlformats.org/presentationml/2006/main">
   <p:cSld>
     <p:spTree>
@@ -9518,7 +9831,7 @@
 </p:notes>
 </file>
 
-<file path=ppt/notesSlides/notesSlide8.xml><?xml version="1.0" encoding="utf-8"?>
+<file path=ppt/notesSlides/notesSlide9.xml><?xml version="1.0" encoding="utf-8"?>
 <p:notes xmlns:a="http://schemas.openxmlformats.org/drawingml/2006/main" xmlns:r="http://schemas.openxmlformats.org/officeDocument/2006/relationships" xmlns:p="http://schemas.openxmlformats.org/presentationml/2006/main">
   <p:cSld>
     <p:spTree>
@@ -9665,191 +9978,6 @@
 </p:notes>
 </file>
 
-<file path=ppt/notesSlides/notesSlide9.xml><?xml version="1.0" encoding="utf-8"?>
-<p:notes xmlns:a="http://schemas.openxmlformats.org/drawingml/2006/main" xmlns:r="http://schemas.openxmlformats.org/officeDocument/2006/relationships" xmlns:p="http://schemas.openxmlformats.org/presentationml/2006/main">
-  <p:cSld>
-    <p:spTree>
-      <p:nvGrpSpPr>
-        <p:cNvPr id="1" name=""/>
-        <p:cNvGrpSpPr/>
-        <p:nvPr/>
-      </p:nvGrpSpPr>
-      <p:grpSpPr>
-        <a:xfrm>
-          <a:off x="0" y="0"/>
-          <a:ext cx="0" cy="0"/>
-          <a:chOff x="0" y="0"/>
-          <a:chExt cx="0" cy="0"/>
-        </a:xfrm>
-      </p:grpSpPr>
-      <p:sp>
-        <p:nvSpPr>
-          <p:cNvPr id="2" name="投影片影像版面配置區 1"/>
-          <p:cNvSpPr>
-            <a:spLocks noGrp="1" noRot="1" noChangeAspect="1"/>
-          </p:cNvSpPr>
-          <p:nvPr>
-            <p:ph type="sldImg"/>
-          </p:nvPr>
-        </p:nvSpPr>
-        <p:spPr/>
-      </p:sp>
-      <p:sp>
-        <p:nvSpPr>
-          <p:cNvPr id="3" name="備忘稿版面配置區 2"/>
-          <p:cNvSpPr>
-            <a:spLocks noGrp="1"/>
-          </p:cNvSpPr>
-          <p:nvPr>
-            <p:ph type="body" idx="1"/>
-          </p:nvPr>
-        </p:nvSpPr>
-        <p:spPr/>
-        <p:txBody>
-          <a:bodyPr/>
-          <a:lstStyle/>
-          <a:p>
-            <a:r>
-              <a:rPr lang="en-US" altLang="zh-TW" dirty="0" err="1"/>
-              <a:t>BootS</a:t>
-            </a:r>
-            <a:r>
-              <a:rPr lang="zh-TW" altLang="en-US" dirty="0"/>
-              <a:t>把這一段程式碼放在</a:t>
-            </a:r>
-            <a:r>
-              <a:rPr lang="en-US" altLang="zh-TW" dirty="0"/>
-              <a:t>index.html </a:t>
-            </a:r>
-            <a:r>
-              <a:rPr lang="zh-TW" altLang="en-US" dirty="0"/>
-              <a:t>的 </a:t>
-            </a:r>
-            <a:r>
-              <a:rPr lang="en-US" altLang="zh-TW" dirty="0"/>
-              <a:t>&lt;head&gt;&lt;/head&gt;</a:t>
-            </a:r>
-            <a:r>
-              <a:rPr lang="zh-TW" altLang="en-US" dirty="0"/>
-              <a:t>之間</a:t>
-            </a:r>
-            <a:r>
-              <a:rPr lang="en-US" altLang="zh-TW" dirty="0"/>
-              <a:t>,</a:t>
-            </a:r>
-            <a:r>
-              <a:rPr lang="zh-TW" altLang="en-US" dirty="0"/>
-              <a:t>一般是放在</a:t>
-            </a:r>
-            <a:r>
-              <a:rPr lang="en-US" altLang="zh-TW" dirty="0"/>
-              <a:t>&lt;/head&gt;</a:t>
-            </a:r>
-            <a:r>
-              <a:rPr lang="zh-TW" altLang="en-US" dirty="0"/>
-              <a:t>這一行的前面。</a:t>
-            </a:r>
-            <a:endParaRPr lang="en-US" altLang="zh-TW" dirty="0"/>
-          </a:p>
-          <a:p>
-            <a:r>
-              <a:rPr lang="en-US" altLang="zh-TW" dirty="0"/>
-              <a:t>JavaScript</a:t>
-            </a:r>
-            <a:r>
-              <a:rPr lang="zh-TW" altLang="en-US" dirty="0"/>
-              <a:t>的連結則是放在</a:t>
-            </a:r>
-            <a:r>
-              <a:rPr lang="en-US" altLang="zh-TW" dirty="0"/>
-              <a:t>&lt;/body&gt;</a:t>
-            </a:r>
-            <a:r>
-              <a:rPr lang="zh-TW" altLang="en-US" dirty="0"/>
-              <a:t>的前面</a:t>
-            </a:r>
-            <a:r>
-              <a:rPr lang="en-US" altLang="zh-TW" dirty="0"/>
-              <a:t>:</a:t>
-            </a:r>
-          </a:p>
-          <a:p>
-            <a:r>
-              <a:rPr lang="en-US" altLang="zh-TW" dirty="0"/>
-              <a:t>Bundle = min + Popper</a:t>
-            </a:r>
-            <a:r>
-              <a:rPr lang="zh-TW" altLang="en-US" dirty="0"/>
-              <a:t>，所以上面</a:t>
-            </a:r>
-            <a:r>
-              <a:rPr lang="en-US" altLang="zh-TW" dirty="0"/>
-              <a:t>script</a:t>
-            </a:r>
-            <a:r>
-              <a:rPr lang="zh-TW" altLang="en-US" dirty="0"/>
-              <a:t>選一個即可</a:t>
-            </a:r>
-            <a:endParaRPr lang="en-US" altLang="zh-TW" dirty="0"/>
-          </a:p>
-          <a:p>
-            <a:r>
-              <a:rPr lang="zh-TW" altLang="en-US" dirty="0"/>
-              <a:t>說明</a:t>
-            </a:r>
-            <a:r>
-              <a:rPr lang="en-US" altLang="zh-TW" dirty="0"/>
-              <a:t>From</a:t>
-            </a:r>
-            <a:r>
-              <a:rPr lang="zh-TW" altLang="en-US" dirty="0"/>
-              <a:t>六角：</a:t>
-            </a:r>
-            <a:r>
-              <a:rPr lang="en-US" altLang="zh-TW" dirty="0"/>
-              <a:t>https://bootstrap5.hexschool.com/docs/5.0/getting-started/introduction/</a:t>
-            </a:r>
-            <a:endParaRPr lang="zh-TW" altLang="en-US" dirty="0"/>
-          </a:p>
-        </p:txBody>
-      </p:sp>
-      <p:sp>
-        <p:nvSpPr>
-          <p:cNvPr id="4" name="投影片編號版面配置區 3"/>
-          <p:cNvSpPr>
-            <a:spLocks noGrp="1"/>
-          </p:cNvSpPr>
-          <p:nvPr>
-            <p:ph type="sldNum" sz="quarter" idx="5"/>
-          </p:nvPr>
-        </p:nvSpPr>
-        <p:spPr/>
-        <p:txBody>
-          <a:bodyPr/>
-          <a:lstStyle/>
-          <a:p>
-            <a:fld id="{027FE99C-3BAC-4305-ABBB-3890AB1B4510}" type="slidenum">
-              <a:rPr lang="zh-TW" altLang="en-US" smtClean="0"/>
-              <a:pPr/>
-              <a:t>22</a:t>
-            </a:fld>
-            <a:endParaRPr lang="zh-TW" altLang="en-US"/>
-          </a:p>
-        </p:txBody>
-      </p:sp>
-    </p:spTree>
-    <p:extLst>
-      <p:ext uri="{BB962C8B-B14F-4D97-AF65-F5344CB8AC3E}">
-        <p14:creationId xmlns:p14="http://schemas.microsoft.com/office/powerpoint/2010/main" val="1807161063"/>
-      </p:ext>
-    </p:extLst>
-  </p:cSld>
-  <p:clrMapOvr>
-    <a:masterClrMapping/>
-  </p:clrMapOvr>
-</p:notes>
-</file>
-
 <file path=ppt/slideLayouts/slideLayout1.xml><?xml version="1.0" encoding="utf-8"?>
 <p:sldLayout xmlns:a="http://schemas.openxmlformats.org/drawingml/2006/main" xmlns:r="http://schemas.openxmlformats.org/officeDocument/2006/relationships" xmlns:p="http://schemas.openxmlformats.org/presentationml/2006/main" showMasterSp="0" type="title" preserve="1">
   <p:cSld name="標題投影片">
@@ -10126,7 +10254,7 @@
             <a:fld id="{DF19C816-D38B-498E-804E-00D02760FC7A}" type="datetime1">
               <a:rPr lang="zh-TW" altLang="en-US" smtClean="0"/>
               <a:pPr/>
-              <a:t>2026/5/21</a:t>
+              <a:t>2026/5/27</a:t>
             </a:fld>
             <a:endParaRPr lang="zh-TW" altLang="en-US"/>
           </a:p>
@@ -10516,7 +10644,7 @@
             <a:fld id="{BFF116A9-7278-4674-BCA0-66C5F066EB15}" type="datetime1">
               <a:rPr lang="zh-TW" altLang="en-US" smtClean="0"/>
               <a:pPr/>
-              <a:t>2026/5/21</a:t>
+              <a:t>2026/5/27</a:t>
             </a:fld>
             <a:endParaRPr lang="zh-TW" altLang="en-US"/>
           </a:p>
@@ -11046,7 +11174,7 @@
             <a:fld id="{97D0AF00-ACBD-4185-8358-D82955DAF0D3}" type="datetime1">
               <a:rPr lang="zh-TW" altLang="en-US" smtClean="0"/>
               <a:pPr/>
-              <a:t>2026/5/21</a:t>
+              <a:t>2026/5/27</a:t>
             </a:fld>
             <a:endParaRPr lang="zh-TW" altLang="en-US"/>
           </a:p>
@@ -11383,7 +11511,7 @@
             <a:fld id="{DF19C816-D38B-498E-804E-00D02760FC7A}" type="datetime1">
               <a:rPr lang="zh-TW" altLang="en-US" smtClean="0"/>
               <a:pPr/>
-              <a:t>2026/5/21</a:t>
+              <a:t>2026/5/27</a:t>
             </a:fld>
             <a:endParaRPr lang="zh-TW" altLang="en-US"/>
           </a:p>
@@ -11736,7 +11864,7 @@
             <a:fld id="{E16BAABA-C288-41C0-9D8E-87773CE9488B}" type="datetime1">
               <a:rPr lang="zh-TW" altLang="en-US" smtClean="0"/>
               <a:pPr/>
-              <a:t>2026/5/21</a:t>
+              <a:t>2026/5/27</a:t>
             </a:fld>
             <a:endParaRPr lang="zh-TW" altLang="en-US"/>
           </a:p>
@@ -12281,7 +12409,7 @@
             <a:fld id="{E6F79EFE-5102-4BAD-A377-702F02C2814E}" type="datetime1">
               <a:rPr lang="zh-TW" altLang="en-US" smtClean="0"/>
               <a:pPr/>
-              <a:t>2026/5/21</a:t>
+              <a:t>2026/5/27</a:t>
             </a:fld>
             <a:endParaRPr lang="zh-TW" altLang="en-US"/>
           </a:p>
@@ -12578,7 +12706,7 @@
             <a:fld id="{240F5BD8-68CC-49A6-B769-229D3FACB86C}" type="datetime1">
               <a:rPr lang="zh-TW" altLang="en-US" smtClean="0"/>
               <a:pPr/>
-              <a:t>2026/5/21</a:t>
+              <a:t>2026/5/27</a:t>
             </a:fld>
             <a:endParaRPr lang="zh-TW" altLang="en-US"/>
           </a:p>
@@ -13239,7 +13367,7 @@
             <a:fld id="{C95C3C99-9A5D-4B12-8519-BF3493FEA3BD}" type="datetime1">
               <a:rPr lang="zh-TW" altLang="en-US" smtClean="0"/>
               <a:pPr/>
-              <a:t>2026/5/21</a:t>
+              <a:t>2026/5/27</a:t>
             </a:fld>
             <a:endParaRPr lang="zh-TW" altLang="en-US"/>
           </a:p>
@@ -13682,7 +13810,7 @@
             <a:fld id="{C0C1B973-9C4C-43B9-BBC9-7D038B5E66BB}" type="datetime1">
               <a:rPr lang="zh-TW" altLang="en-US" smtClean="0"/>
               <a:pPr/>
-              <a:t>2026/5/21</a:t>
+              <a:t>2026/5/27</a:t>
             </a:fld>
             <a:endParaRPr lang="zh-TW" altLang="en-US"/>
           </a:p>
@@ -14002,7 +14130,7 @@
             <a:fld id="{E3A2E384-56FB-46D9-B267-C20E836A8212}" type="datetime1">
               <a:rPr lang="zh-TW" altLang="en-US" smtClean="0"/>
               <a:pPr/>
-              <a:t>2026/5/21</a:t>
+              <a:t>2026/5/27</a:t>
             </a:fld>
             <a:endParaRPr lang="zh-TW" altLang="en-US"/>
           </a:p>
@@ -14737,7 +14865,7 @@
             <a:fld id="{33A25C06-3635-48B4-9326-561BB1229EEB}" type="datetime1">
               <a:rPr lang="zh-TW" altLang="en-US" smtClean="0"/>
               <a:pPr/>
-              <a:t>2026/5/21</a:t>
+              <a:t>2026/5/27</a:t>
             </a:fld>
             <a:endParaRPr lang="zh-TW" altLang="en-US"/>
           </a:p>
@@ -14848,7 +14976,7 @@
             <a:fld id="{E16BAABA-C288-41C0-9D8E-87773CE9488B}" type="datetime1">
               <a:rPr lang="zh-TW" altLang="en-US" smtClean="0"/>
               <a:pPr/>
-              <a:t>2026/5/21</a:t>
+              <a:t>2026/5/27</a:t>
             </a:fld>
             <a:endParaRPr lang="zh-TW" altLang="en-US"/>
           </a:p>
@@ -15595,7 +15723,7 @@
             <a:fld id="{BA9F43BE-0941-4E88-B57D-D38DECBCB997}" type="datetime1">
               <a:rPr lang="zh-TW" altLang="en-US" smtClean="0"/>
               <a:pPr/>
-              <a:t>2026/5/21</a:t>
+              <a:t>2026/5/27</a:t>
             </a:fld>
             <a:endParaRPr lang="zh-TW" altLang="en-US"/>
           </a:p>
@@ -15748,7 +15876,7 @@
             <a:fld id="{BFF116A9-7278-4674-BCA0-66C5F066EB15}" type="datetime1">
               <a:rPr lang="zh-TW" altLang="en-US" smtClean="0"/>
               <a:pPr/>
-              <a:t>2026/5/21</a:t>
+              <a:t>2026/5/27</a:t>
             </a:fld>
             <a:endParaRPr lang="zh-TW" altLang="en-US"/>
           </a:p>
@@ -16283,7 +16411,7 @@
             <a:fld id="{97D0AF00-ACBD-4185-8358-D82955DAF0D3}" type="datetime1">
               <a:rPr lang="zh-TW" altLang="en-US" smtClean="0"/>
               <a:pPr/>
-              <a:t>2026/5/21</a:t>
+              <a:t>2026/5/27</a:t>
             </a:fld>
             <a:endParaRPr lang="zh-TW" altLang="en-US"/>
           </a:p>
@@ -16770,7 +16898,7 @@
             <a:fld id="{E6F79EFE-5102-4BAD-A377-702F02C2814E}" type="datetime1">
               <a:rPr lang="zh-TW" altLang="en-US" smtClean="0"/>
               <a:pPr/>
-              <a:t>2026/5/21</a:t>
+              <a:t>2026/5/27</a:t>
             </a:fld>
             <a:endParaRPr lang="zh-TW" altLang="en-US"/>
           </a:p>
@@ -17062,7 +17190,7 @@
             <a:fld id="{240F5BD8-68CC-49A6-B769-229D3FACB86C}" type="datetime1">
               <a:rPr lang="zh-TW" altLang="en-US" smtClean="0"/>
               <a:pPr/>
-              <a:t>2026/5/21</a:t>
+              <a:t>2026/5/27</a:t>
             </a:fld>
             <a:endParaRPr lang="zh-TW" altLang="en-US"/>
           </a:p>
@@ -17718,7 +17846,7 @@
             <a:fld id="{C95C3C99-9A5D-4B12-8519-BF3493FEA3BD}" type="datetime1">
               <a:rPr lang="zh-TW" altLang="en-US" smtClean="0"/>
               <a:pPr/>
-              <a:t>2026/5/21</a:t>
+              <a:t>2026/5/27</a:t>
             </a:fld>
             <a:endParaRPr lang="zh-TW" altLang="en-US"/>
           </a:p>
@@ -18156,7 +18284,7 @@
             <a:fld id="{C0C1B973-9C4C-43B9-BBC9-7D038B5E66BB}" type="datetime1">
               <a:rPr lang="zh-TW" altLang="en-US" smtClean="0"/>
               <a:pPr/>
-              <a:t>2026/5/21</a:t>
+              <a:t>2026/5/27</a:t>
             </a:fld>
             <a:endParaRPr lang="zh-TW" altLang="en-US"/>
           </a:p>
@@ -18471,7 +18599,7 @@
             <a:fld id="{E3A2E384-56FB-46D9-B267-C20E836A8212}" type="datetime1">
               <a:rPr lang="zh-TW" altLang="en-US" smtClean="0"/>
               <a:pPr/>
-              <a:t>2026/5/21</a:t>
+              <a:t>2026/5/27</a:t>
             </a:fld>
             <a:endParaRPr lang="zh-TW" altLang="en-US"/>
           </a:p>
@@ -19201,7 +19329,7 @@
             <a:fld id="{33A25C06-3635-48B4-9326-561BB1229EEB}" type="datetime1">
               <a:rPr lang="zh-TW" altLang="en-US" smtClean="0"/>
               <a:pPr/>
-              <a:t>2026/5/21</a:t>
+              <a:t>2026/5/27</a:t>
             </a:fld>
             <a:endParaRPr lang="zh-TW" altLang="en-US"/>
           </a:p>
@@ -19867,7 +19995,7 @@
             <a:fld id="{BA9F43BE-0941-4E88-B57D-D38DECBCB997}" type="datetime1">
               <a:rPr lang="zh-TW" altLang="en-US" smtClean="0"/>
               <a:pPr/>
-              <a:t>2026/5/21</a:t>
+              <a:t>2026/5/27</a:t>
             </a:fld>
             <a:endParaRPr lang="zh-TW" altLang="en-US"/>
           </a:p>
@@ -20141,7 +20269,7 @@
             <a:fld id="{73E7C058-3467-44CD-AC53-31F205DF3CA0}" type="datetime1">
               <a:rPr lang="zh-TW" altLang="en-US" smtClean="0"/>
               <a:pPr/>
-              <a:t>2026/5/21</a:t>
+              <a:t>2026/5/27</a:t>
             </a:fld>
             <a:endParaRPr lang="zh-TW" altLang="en-US"/>
           </a:p>
@@ -21038,7 +21166,7 @@
             <a:fld id="{73E7C058-3467-44CD-AC53-31F205DF3CA0}" type="datetime1">
               <a:rPr lang="zh-TW" altLang="en-US" smtClean="0"/>
               <a:pPr/>
-              <a:t>2026/5/21</a:t>
+              <a:t>2026/5/27</a:t>
             </a:fld>
             <a:endParaRPr lang="zh-TW" altLang="en-US"/>
           </a:p>
@@ -23779,6 +23907,34 @@
           <a:chExt cx="0" cy="0"/>
         </a:xfrm>
       </p:grpSpPr>
+      <p:pic>
+        <p:nvPicPr>
+          <p:cNvPr id="5" name="圖片 4"/>
+          <p:cNvPicPr/>
+          <p:nvPr/>
+        </p:nvPicPr>
+        <p:blipFill>
+          <a:blip r:embed="rId3">
+            <a:extLst>
+              <a:ext uri="{28A0092B-C50C-407E-A947-70E740481C1C}">
+                <a14:useLocalDpi xmlns:a14="http://schemas.microsoft.com/office/drawing/2010/main" val="0"/>
+              </a:ext>
+            </a:extLst>
+          </a:blip>
+          <a:stretch>
+            <a:fillRect/>
+          </a:stretch>
+        </p:blipFill>
+        <p:spPr>
+          <a:xfrm>
+            <a:off x="271272" y="1196753"/>
+            <a:ext cx="8534400" cy="5616624"/>
+          </a:xfrm>
+          <a:prstGeom prst="rect">
+            <a:avLst/>
+          </a:prstGeom>
+        </p:spPr>
+      </p:pic>
       <p:sp>
         <p:nvSpPr>
           <p:cNvPr id="2" name="標題 1"/>
@@ -23899,7 +24055,12 @@
             <p:ph sz="quarter" idx="1"/>
           </p:nvPr>
         </p:nvSpPr>
-        <p:spPr/>
+        <p:spPr>
+          <a:xfrm>
+            <a:off x="301752" y="908720"/>
+            <a:ext cx="8503920" cy="4572000"/>
+          </a:xfrm>
+        </p:spPr>
         <p:txBody>
           <a:bodyPr/>
           <a:lstStyle/>
@@ -23912,34 +24073,6 @@
           </a:p>
         </p:txBody>
       </p:sp>
-      <p:pic>
-        <p:nvPicPr>
-          <p:cNvPr id="5" name="圖片 4"/>
-          <p:cNvPicPr/>
-          <p:nvPr/>
-        </p:nvPicPr>
-        <p:blipFill>
-          <a:blip r:embed="rId3">
-            <a:extLst>
-              <a:ext uri="{28A0092B-C50C-407E-A947-70E740481C1C}">
-                <a14:useLocalDpi xmlns:a14="http://schemas.microsoft.com/office/drawing/2010/main" val="0"/>
-              </a:ext>
-            </a:extLst>
-          </a:blip>
-          <a:stretch>
-            <a:fillRect/>
-          </a:stretch>
-        </p:blipFill>
-        <p:spPr>
-          <a:xfrm>
-            <a:off x="1547664" y="2033449"/>
-            <a:ext cx="6048672" cy="4596303"/>
-          </a:xfrm>
-          <a:prstGeom prst="rect">
-            <a:avLst/>
-          </a:prstGeom>
-        </p:spPr>
-      </p:pic>
     </p:spTree>
     <p:extLst>
       <p:ext uri="{BB962C8B-B14F-4D97-AF65-F5344CB8AC3E}">
@@ -23980,7 +24113,12 @@
             <p:ph type="title"/>
           </p:nvPr>
         </p:nvSpPr>
-        <p:spPr/>
+        <p:spPr>
+          <a:xfrm>
+            <a:off x="301752" y="581816"/>
+            <a:ext cx="8534400" cy="758952"/>
+          </a:xfrm>
+        </p:spPr>
         <p:txBody>
           <a:bodyPr>
             <a:normAutofit fontScale="90000"/>
@@ -24030,8 +24168,20 @@
               <a:t>\templates</a:t>
             </a:r>
             <a:r>
-              <a:rPr lang="zh-TW" altLang="en-US"/>
+              <a:rPr lang="zh-TW" altLang="en-US" dirty="0"/>
               <a:t>也有</a:t>
+            </a:r>
+            <a:r>
+              <a:rPr lang="en-US" altLang="zh-TW" dirty="0"/>
+              <a:t>(</a:t>
+            </a:r>
+            <a:r>
+              <a:rPr lang="zh-TW" altLang="en-US" dirty="0"/>
+              <a:t>可用這個</a:t>
+            </a:r>
+            <a:r>
+              <a:rPr lang="en-US" altLang="zh-TW" dirty="0"/>
+              <a:t>)</a:t>
             </a:r>
             <a:endParaRPr lang="zh-TW" altLang="en-US" dirty="0"/>
           </a:p>
@@ -24206,7 +24356,11 @@
             </a:pPr>
             <a:r>
               <a:rPr lang="en-US" altLang="zh-TW" dirty="0"/>
-              <a:t>    &lt;title&gt;</a:t>
+              <a:t>    </a:t>
+            </a:r>
+            <a:r>
+              <a:rPr lang="en-US" altLang="zh-TW" b="1" dirty="0"/>
+              <a:t>&lt;title&gt;</a:t>
             </a:r>
           </a:p>
           <a:p>
@@ -24247,7 +24401,7 @@
               <a:buNone/>
             </a:pPr>
             <a:r>
-              <a:rPr lang="en-US" altLang="zh-TW" dirty="0"/>
+              <a:rPr lang="en-US" altLang="zh-TW" b="1" dirty="0"/>
               <a:t>    &lt;/title&gt;</a:t>
             </a:r>
           </a:p>
@@ -24286,8 +24440,12 @@
               <a:t>include </a:t>
             </a:r>
             <a:r>
-              <a:rPr lang="en-US" altLang="zh-TW" dirty="0"/>
-              <a:t>'header.html' %}</a:t>
+              <a:rPr lang="en-US" altLang="zh-TW" b="1" dirty="0"/>
+              <a:t>'header.html</a:t>
+            </a:r>
+            <a:r>
+              <a:rPr lang="en-US" altLang="zh-TW" dirty="0"/>
+              <a:t>' %}</a:t>
             </a:r>
           </a:p>
           <a:p>
@@ -24424,7 +24582,15 @@
             </a:r>
             <a:r>
               <a:rPr lang="en-US" altLang="zh-TW" dirty="0"/>
-              <a:t> 'footer.html' %}</a:t>
+              <a:t> </a:t>
+            </a:r>
+            <a:r>
+              <a:rPr lang="en-US" altLang="zh-TW" b="1" dirty="0"/>
+              <a:t>'footer.html</a:t>
+            </a:r>
+            <a:r>
+              <a:rPr lang="en-US" altLang="zh-TW" dirty="0"/>
+              <a:t>' %}</a:t>
             </a:r>
           </a:p>
           <a:p>
@@ -24637,8 +24803,31 @@
                   <a:srgbClr val="FF0000"/>
                 </a:solidFill>
               </a:rPr>
-              <a:t>{% extends 'base.html' %}</a:t>
-            </a:r>
+              <a:t>{% extends ‘base.html’ %} </a:t>
+            </a:r>
+            <a:r>
+              <a:rPr lang="en-US" altLang="zh-TW" dirty="0">
+                <a:solidFill>
+                  <a:srgbClr val="FF0000"/>
+                </a:solidFill>
+                <a:sym typeface="Wingdings" panose="05000000000000000000" pitchFamily="2" charset="2"/>
+              </a:rPr>
+              <a:t></a:t>
+            </a:r>
+            <a:r>
+              <a:rPr lang="zh-TW" altLang="en-US" dirty="0">
+                <a:solidFill>
+                  <a:srgbClr val="FF0000"/>
+                </a:solidFill>
+                <a:sym typeface="Wingdings" panose="05000000000000000000" pitchFamily="2" charset="2"/>
+              </a:rPr>
+              <a:t>決定用哪個骨架</a:t>
+            </a:r>
+            <a:endParaRPr lang="en-US" altLang="zh-TW" dirty="0">
+              <a:solidFill>
+                <a:srgbClr val="FF0000"/>
+              </a:solidFill>
+            </a:endParaRPr>
           </a:p>
           <a:p>
             <a:pPr marL="274320" lvl="1" indent="0">
@@ -25027,7 +25216,12 @@
             <p:ph sz="quarter" idx="1"/>
           </p:nvPr>
         </p:nvSpPr>
-        <p:spPr/>
+        <p:spPr>
+          <a:xfrm>
+            <a:off x="107504" y="1527048"/>
+            <a:ext cx="8698168" cy="4572000"/>
+          </a:xfrm>
+        </p:spPr>
         <p:txBody>
           <a:bodyPr>
             <a:normAutofit fontScale="92500" lnSpcReduction="20000"/>
@@ -25066,8 +25260,12 @@
               <a:buNone/>
             </a:pPr>
             <a:r>
-              <a:rPr lang="en-US" altLang="zh-TW" dirty="0"/>
-              <a:t>{% block title %} {{ </a:t>
+              <a:rPr lang="en-US" altLang="zh-TW" b="1" dirty="0"/>
+              <a:t>{% block title %} </a:t>
+            </a:r>
+            <a:r>
+              <a:rPr lang="en-US" altLang="zh-TW" dirty="0"/>
+              <a:t>{{ </a:t>
             </a:r>
             <a:r>
               <a:rPr lang="en-US" altLang="zh-TW" dirty="0" err="1"/>
@@ -25099,15 +25297,15 @@
               <a:buNone/>
             </a:pPr>
             <a:r>
-              <a:rPr lang="en-US" altLang="zh-TW" dirty="0"/>
+              <a:rPr lang="en-US" altLang="zh-TW" b="1" dirty="0"/>
               <a:t>{% block </a:t>
             </a:r>
             <a:r>
-              <a:rPr lang="en-US" altLang="zh-TW" dirty="0" err="1"/>
+              <a:rPr lang="en-US" altLang="zh-TW" b="1" dirty="0" err="1"/>
               <a:t>headmessage</a:t>
             </a:r>
             <a:r>
-              <a:rPr lang="en-US" altLang="zh-TW" dirty="0"/>
+              <a:rPr lang="en-US" altLang="zh-TW" b="1" dirty="0"/>
               <a:t> %}</a:t>
             </a:r>
           </a:p>
@@ -25191,7 +25389,7 @@
               <a:buNone/>
             </a:pPr>
             <a:r>
-              <a:rPr lang="en-US" altLang="zh-TW" dirty="0"/>
+              <a:rPr lang="en-US" altLang="zh-TW" b="1" dirty="0"/>
               <a:t>{% block content %} </a:t>
             </a:r>
           </a:p>
@@ -25684,16 +25882,94 @@
             <p:ph type="title"/>
           </p:nvPr>
         </p:nvSpPr>
-        <p:spPr/>
-        <p:txBody>
-          <a:bodyPr/>
+        <p:spPr>
+          <a:xfrm>
+            <a:off x="301752" y="653824"/>
+            <a:ext cx="8534400" cy="758952"/>
+          </a:xfrm>
+        </p:spPr>
+        <p:txBody>
+          <a:bodyPr>
+            <a:normAutofit fontScale="90000"/>
+          </a:bodyPr>
           <a:lstStyle/>
           <a:p>
             <a:r>
               <a:rPr lang="zh-TW" altLang="zh-TW" dirty="0"/>
               <a:t>共用模版的使用</a:t>
             </a:r>
-            <a:endParaRPr lang="zh-TW" altLang="en-US" dirty="0"/>
+            <a:br>
+              <a:rPr lang="en-US" altLang="zh-TW" dirty="0"/>
+            </a:br>
+            <a:r>
+              <a:rPr lang="zh-TW" altLang="en-US" dirty="0">
+                <a:solidFill>
+                  <a:srgbClr val="FF0000"/>
+                </a:solidFill>
+              </a:rPr>
+              <a:t>以下這段內容會無條件出現在所有引用</a:t>
+            </a:r>
+            <a:r>
+              <a:rPr lang="en-US" altLang="zh-TW" dirty="0">
+                <a:solidFill>
+                  <a:srgbClr val="FF0000"/>
+                </a:solidFill>
+              </a:rPr>
+              <a:t>footer.html</a:t>
+            </a:r>
+            <a:r>
+              <a:rPr lang="zh-TW" altLang="en-US" dirty="0">
+                <a:solidFill>
+                  <a:srgbClr val="FF0000"/>
+                </a:solidFill>
+              </a:rPr>
+              <a:t>的頁面中</a:t>
+            </a:r>
+            <a:r>
+              <a:rPr lang="en-US" altLang="zh-TW" dirty="0">
+                <a:solidFill>
+                  <a:srgbClr val="FF0000"/>
+                </a:solidFill>
+              </a:rPr>
+              <a:t>(</a:t>
+            </a:r>
+            <a:r>
+              <a:rPr lang="zh-TW" altLang="en-US" dirty="0">
+                <a:solidFill>
+                  <a:srgbClr val="FF0000"/>
+                </a:solidFill>
+              </a:rPr>
+              <a:t>雖然有加</a:t>
+            </a:r>
+            <a:r>
+              <a:rPr lang="en-US" altLang="zh-TW" dirty="0">
+                <a:solidFill>
+                  <a:srgbClr val="FF0000"/>
+                </a:solidFill>
+              </a:rPr>
+              <a:t>block)</a:t>
+            </a:r>
+            <a:r>
+              <a:rPr lang="zh-TW" altLang="en-US" dirty="0">
+                <a:solidFill>
+                  <a:srgbClr val="FF0000"/>
+                </a:solidFill>
+              </a:rPr>
+              <a:t>未解</a:t>
+            </a:r>
+            <a:r>
+              <a:rPr lang="en-US" altLang="zh-TW">
+                <a:solidFill>
+                  <a:srgbClr val="FF0000"/>
+                </a:solidFill>
+              </a:rPr>
+              <a:t>??</a:t>
+            </a:r>
+            <a:endParaRPr lang="zh-TW" altLang="en-US" dirty="0">
+              <a:solidFill>
+                <a:srgbClr val="FF0000"/>
+              </a:solidFill>
+            </a:endParaRPr>
           </a:p>
         </p:txBody>
       </p:sp>

--- a/ch06/Django4-ch06.pptx
+++ b/ch06/Django4-ch06.pptx
@@ -295,7 +295,7 @@
             <a:fld id="{FBFE2433-649F-42E5-AECB-94990831C40A}" type="datetimeFigureOut">
               <a:rPr lang="zh-TW" altLang="en-US" smtClean="0"/>
               <a:pPr/>
-              <a:t>2026/5/27</a:t>
+              <a:t>2026/5/28</a:t>
             </a:fld>
             <a:endParaRPr lang="zh-TW" altLang="en-US"/>
           </a:p>
@@ -10254,7 +10254,7 @@
             <a:fld id="{DF19C816-D38B-498E-804E-00D02760FC7A}" type="datetime1">
               <a:rPr lang="zh-TW" altLang="en-US" smtClean="0"/>
               <a:pPr/>
-              <a:t>2026/5/27</a:t>
+              <a:t>2026/5/28</a:t>
             </a:fld>
             <a:endParaRPr lang="zh-TW" altLang="en-US"/>
           </a:p>
@@ -10644,7 +10644,7 @@
             <a:fld id="{BFF116A9-7278-4674-BCA0-66C5F066EB15}" type="datetime1">
               <a:rPr lang="zh-TW" altLang="en-US" smtClean="0"/>
               <a:pPr/>
-              <a:t>2026/5/27</a:t>
+              <a:t>2026/5/28</a:t>
             </a:fld>
             <a:endParaRPr lang="zh-TW" altLang="en-US"/>
           </a:p>
@@ -11174,7 +11174,7 @@
             <a:fld id="{97D0AF00-ACBD-4185-8358-D82955DAF0D3}" type="datetime1">
               <a:rPr lang="zh-TW" altLang="en-US" smtClean="0"/>
               <a:pPr/>
-              <a:t>2026/5/27</a:t>
+              <a:t>2026/5/28</a:t>
             </a:fld>
             <a:endParaRPr lang="zh-TW" altLang="en-US"/>
           </a:p>
@@ -11511,7 +11511,7 @@
             <a:fld id="{DF19C816-D38B-498E-804E-00D02760FC7A}" type="datetime1">
               <a:rPr lang="zh-TW" altLang="en-US" smtClean="0"/>
               <a:pPr/>
-              <a:t>2026/5/27</a:t>
+              <a:t>2026/5/28</a:t>
             </a:fld>
             <a:endParaRPr lang="zh-TW" altLang="en-US"/>
           </a:p>
@@ -11864,7 +11864,7 @@
             <a:fld id="{E16BAABA-C288-41C0-9D8E-87773CE9488B}" type="datetime1">
               <a:rPr lang="zh-TW" altLang="en-US" smtClean="0"/>
               <a:pPr/>
-              <a:t>2026/5/27</a:t>
+              <a:t>2026/5/28</a:t>
             </a:fld>
             <a:endParaRPr lang="zh-TW" altLang="en-US"/>
           </a:p>
@@ -12409,7 +12409,7 @@
             <a:fld id="{E6F79EFE-5102-4BAD-A377-702F02C2814E}" type="datetime1">
               <a:rPr lang="zh-TW" altLang="en-US" smtClean="0"/>
               <a:pPr/>
-              <a:t>2026/5/27</a:t>
+              <a:t>2026/5/28</a:t>
             </a:fld>
             <a:endParaRPr lang="zh-TW" altLang="en-US"/>
           </a:p>
@@ -12706,7 +12706,7 @@
             <a:fld id="{240F5BD8-68CC-49A6-B769-229D3FACB86C}" type="datetime1">
               <a:rPr lang="zh-TW" altLang="en-US" smtClean="0"/>
               <a:pPr/>
-              <a:t>2026/5/27</a:t>
+              <a:t>2026/5/28</a:t>
             </a:fld>
             <a:endParaRPr lang="zh-TW" altLang="en-US"/>
           </a:p>
@@ -13367,7 +13367,7 @@
             <a:fld id="{C95C3C99-9A5D-4B12-8519-BF3493FEA3BD}" type="datetime1">
               <a:rPr lang="zh-TW" altLang="en-US" smtClean="0"/>
               <a:pPr/>
-              <a:t>2026/5/27</a:t>
+              <a:t>2026/5/28</a:t>
             </a:fld>
             <a:endParaRPr lang="zh-TW" altLang="en-US"/>
           </a:p>
@@ -13810,7 +13810,7 @@
             <a:fld id="{C0C1B973-9C4C-43B9-BBC9-7D038B5E66BB}" type="datetime1">
               <a:rPr lang="zh-TW" altLang="en-US" smtClean="0"/>
               <a:pPr/>
-              <a:t>2026/5/27</a:t>
+              <a:t>2026/5/28</a:t>
             </a:fld>
             <a:endParaRPr lang="zh-TW" altLang="en-US"/>
           </a:p>
@@ -14130,7 +14130,7 @@
             <a:fld id="{E3A2E384-56FB-46D9-B267-C20E836A8212}" type="datetime1">
               <a:rPr lang="zh-TW" altLang="en-US" smtClean="0"/>
               <a:pPr/>
-              <a:t>2026/5/27</a:t>
+              <a:t>2026/5/28</a:t>
             </a:fld>
             <a:endParaRPr lang="zh-TW" altLang="en-US"/>
           </a:p>
@@ -14865,7 +14865,7 @@
             <a:fld id="{33A25C06-3635-48B4-9326-561BB1229EEB}" type="datetime1">
               <a:rPr lang="zh-TW" altLang="en-US" smtClean="0"/>
               <a:pPr/>
-              <a:t>2026/5/27</a:t>
+              <a:t>2026/5/28</a:t>
             </a:fld>
             <a:endParaRPr lang="zh-TW" altLang="en-US"/>
           </a:p>
@@ -14976,7 +14976,7 @@
             <a:fld id="{E16BAABA-C288-41C0-9D8E-87773CE9488B}" type="datetime1">
               <a:rPr lang="zh-TW" altLang="en-US" smtClean="0"/>
               <a:pPr/>
-              <a:t>2026/5/27</a:t>
+              <a:t>2026/5/28</a:t>
             </a:fld>
             <a:endParaRPr lang="zh-TW" altLang="en-US"/>
           </a:p>
@@ -15723,7 +15723,7 @@
             <a:fld id="{BA9F43BE-0941-4E88-B57D-D38DECBCB997}" type="datetime1">
               <a:rPr lang="zh-TW" altLang="en-US" smtClean="0"/>
               <a:pPr/>
-              <a:t>2026/5/27</a:t>
+              <a:t>2026/5/28</a:t>
             </a:fld>
             <a:endParaRPr lang="zh-TW" altLang="en-US"/>
           </a:p>
@@ -15876,7 +15876,7 @@
             <a:fld id="{BFF116A9-7278-4674-BCA0-66C5F066EB15}" type="datetime1">
               <a:rPr lang="zh-TW" altLang="en-US" smtClean="0"/>
               <a:pPr/>
-              <a:t>2026/5/27</a:t>
+              <a:t>2026/5/28</a:t>
             </a:fld>
             <a:endParaRPr lang="zh-TW" altLang="en-US"/>
           </a:p>
@@ -16411,7 +16411,7 @@
             <a:fld id="{97D0AF00-ACBD-4185-8358-D82955DAF0D3}" type="datetime1">
               <a:rPr lang="zh-TW" altLang="en-US" smtClean="0"/>
               <a:pPr/>
-              <a:t>2026/5/27</a:t>
+              <a:t>2026/5/28</a:t>
             </a:fld>
             <a:endParaRPr lang="zh-TW" altLang="en-US"/>
           </a:p>
@@ -16898,7 +16898,7 @@
             <a:fld id="{E6F79EFE-5102-4BAD-A377-702F02C2814E}" type="datetime1">
               <a:rPr lang="zh-TW" altLang="en-US" smtClean="0"/>
               <a:pPr/>
-              <a:t>2026/5/27</a:t>
+              <a:t>2026/5/28</a:t>
             </a:fld>
             <a:endParaRPr lang="zh-TW" altLang="en-US"/>
           </a:p>
@@ -17190,7 +17190,7 @@
             <a:fld id="{240F5BD8-68CC-49A6-B769-229D3FACB86C}" type="datetime1">
               <a:rPr lang="zh-TW" altLang="en-US" smtClean="0"/>
               <a:pPr/>
-              <a:t>2026/5/27</a:t>
+              <a:t>2026/5/28</a:t>
             </a:fld>
             <a:endParaRPr lang="zh-TW" altLang="en-US"/>
           </a:p>
@@ -17846,7 +17846,7 @@
             <a:fld id="{C95C3C99-9A5D-4B12-8519-BF3493FEA3BD}" type="datetime1">
               <a:rPr lang="zh-TW" altLang="en-US" smtClean="0"/>
               <a:pPr/>
-              <a:t>2026/5/27</a:t>
+              <a:t>2026/5/28</a:t>
             </a:fld>
             <a:endParaRPr lang="zh-TW" altLang="en-US"/>
           </a:p>
@@ -18284,7 +18284,7 @@
             <a:fld id="{C0C1B973-9C4C-43B9-BBC9-7D038B5E66BB}" type="datetime1">
               <a:rPr lang="zh-TW" altLang="en-US" smtClean="0"/>
               <a:pPr/>
-              <a:t>2026/5/27</a:t>
+              <a:t>2026/5/28</a:t>
             </a:fld>
             <a:endParaRPr lang="zh-TW" altLang="en-US"/>
           </a:p>
@@ -18599,7 +18599,7 @@
             <a:fld id="{E3A2E384-56FB-46D9-B267-C20E836A8212}" type="datetime1">
               <a:rPr lang="zh-TW" altLang="en-US" smtClean="0"/>
               <a:pPr/>
-              <a:t>2026/5/27</a:t>
+              <a:t>2026/5/28</a:t>
             </a:fld>
             <a:endParaRPr lang="zh-TW" altLang="en-US"/>
           </a:p>
@@ -19329,7 +19329,7 @@
             <a:fld id="{33A25C06-3635-48B4-9326-561BB1229EEB}" type="datetime1">
               <a:rPr lang="zh-TW" altLang="en-US" smtClean="0"/>
               <a:pPr/>
-              <a:t>2026/5/27</a:t>
+              <a:t>2026/5/28</a:t>
             </a:fld>
             <a:endParaRPr lang="zh-TW" altLang="en-US"/>
           </a:p>
@@ -19995,7 +19995,7 @@
             <a:fld id="{BA9F43BE-0941-4E88-B57D-D38DECBCB997}" type="datetime1">
               <a:rPr lang="zh-TW" altLang="en-US" smtClean="0"/>
               <a:pPr/>
-              <a:t>2026/5/27</a:t>
+              <a:t>2026/5/28</a:t>
             </a:fld>
             <a:endParaRPr lang="zh-TW" altLang="en-US"/>
           </a:p>
@@ -20269,7 +20269,7 @@
             <a:fld id="{73E7C058-3467-44CD-AC53-31F205DF3CA0}" type="datetime1">
               <a:rPr lang="zh-TW" altLang="en-US" smtClean="0"/>
               <a:pPr/>
-              <a:t>2026/5/27</a:t>
+              <a:t>2026/5/28</a:t>
             </a:fld>
             <a:endParaRPr lang="zh-TW" altLang="en-US"/>
           </a:p>
@@ -21166,7 +21166,7 @@
             <a:fld id="{73E7C058-3467-44CD-AC53-31F205DF3CA0}" type="datetime1">
               <a:rPr lang="zh-TW" altLang="en-US" smtClean="0"/>
               <a:pPr/>
-              <a:t>2026/5/27</a:t>
+              <a:t>2026/5/28</a:t>
             </a:fld>
             <a:endParaRPr lang="zh-TW" altLang="en-US"/>
           </a:p>
@@ -49963,7 +49963,15 @@
             </a:r>
             <a:r>
               <a:rPr lang="zh-TW" altLang="en-US" sz="2800" dirty="0"/>
-              <a:t>，其餘有差異的保留</a:t>
+              <a:t>，其餘有差異的保留變成</a:t>
+            </a:r>
+            <a:r>
+              <a:rPr lang="en-US" altLang="zh-TW" sz="2800" dirty="0"/>
+              <a:t>about.html</a:t>
+            </a:r>
+            <a:r>
+              <a:rPr lang="zh-TW" altLang="en-US" sz="2800" dirty="0"/>
+              <a:t>的內容</a:t>
             </a:r>
             <a:endParaRPr lang="en-US" altLang="zh-TW" sz="2800" dirty="0"/>
           </a:p>
